--- a/Warehouse_OS_Presentation.pptx
+++ b/Warehouse_OS_Presentation.pptx
@@ -3093,7 +3093,7 @@
     <p:bg>
       <p:bgPr>
         <a:solidFill>
-          <a:srgbClr val="0F172A"/>
+          <a:srgbClr val="070B15"/>
         </a:solidFill>
         <a:effectLst/>
       </p:bgPr>
@@ -3120,7 +3120,7 @@
             <a:avLst/>
           </a:prstGeom>
           <a:solidFill>
-            <a:srgbClr val="0A0F1E"/>
+            <a:srgbClr val="050912"/>
           </a:solidFill>
           <a:ln>
             <a:noFill/>
@@ -3199,8 +3199,8 @@
         </p:nvSpPr>
         <p:spPr>
           <a:xfrm>
-            <a:off x="1371600" y="1371600"/>
-            <a:ext cx="9144000" cy="1097280"/>
+            <a:off x="1371600" y="1280160"/>
+            <a:ext cx="9144000" cy="457200"/>
           </a:xfrm>
           <a:prstGeom prst="rect">
             <a:avLst/>
@@ -3214,9 +3214,45 @@
           <a:lstStyle/>
           <a:p>
             <a:pPr algn="ctr">
-              <a:defRPr sz="5400" b="1">
-                <a:solidFill>
-                  <a:srgbClr val="FFFFFF"/>
+              <a:defRPr sz="1300" b="0">
+                <a:solidFill>
+                  <a:srgbClr val="94A3B8"/>
+                </a:solidFill>
+                <a:latin typeface="Calibri"/>
+              </a:defRPr>
+            </a:pPr>
+            <a:r>
+              <a:t>✦  FINAL PROJECT PRESENTATION</a:t>
+            </a:r>
+          </a:p>
+        </p:txBody>
+      </p:sp>
+      <p:sp>
+        <p:nvSpPr>
+          <p:cNvPr id="5" name="TextBox 4"/>
+          <p:cNvSpPr txBox="1"/>
+          <p:nvPr/>
+        </p:nvSpPr>
+        <p:spPr>
+          <a:xfrm>
+            <a:off x="1371600" y="1828800"/>
+            <a:ext cx="9144000" cy="1371600"/>
+          </a:xfrm>
+          <a:prstGeom prst="rect">
+            <a:avLst/>
+          </a:prstGeom>
+          <a:noFill/>
+        </p:spPr>
+        <p:txBody>
+          <a:bodyPr wrap="square">
+            <a:spAutoFit/>
+          </a:bodyPr>
+          <a:lstStyle/>
+          <a:p>
+            <a:pPr algn="ctr">
+              <a:defRPr sz="5600" b="1">
+                <a:solidFill>
+                  <a:srgbClr val="F1F5F9"/>
                 </a:solidFill>
                 <a:latin typeface="Calibri"/>
               </a:defRPr>
@@ -3229,14 +3265,14 @@
       </p:sp>
       <p:sp>
         <p:nvSpPr>
-          <p:cNvPr id="5" name="Rectangle 4"/>
+          <p:cNvPr id="6" name="Rectangle 5"/>
           <p:cNvSpPr/>
           <p:nvPr/>
         </p:nvSpPr>
         <p:spPr>
           <a:xfrm>
-            <a:off x="5303520" y="2651760"/>
-            <a:ext cx="1463040" cy="54864"/>
+            <a:off x="5303520" y="3291840"/>
+            <a:ext cx="1463040" cy="36576"/>
           </a:xfrm>
           <a:prstGeom prst="rect">
             <a:avLst/>
@@ -3272,14 +3308,14 @@
       </p:sp>
       <p:sp>
         <p:nvSpPr>
-          <p:cNvPr id="6" name="TextBox 5"/>
+          <p:cNvPr id="7" name="TextBox 6"/>
           <p:cNvSpPr txBox="1"/>
           <p:nvPr/>
         </p:nvSpPr>
         <p:spPr>
           <a:xfrm>
-            <a:off x="1371600" y="3017520"/>
-            <a:ext cx="9144000" cy="731520"/>
+            <a:off x="1371600" y="3566160"/>
+            <a:ext cx="9144000" cy="640080"/>
           </a:xfrm>
           <a:prstGeom prst="rect">
             <a:avLst/>
@@ -3308,14 +3344,14 @@
       </p:sp>
       <p:sp>
         <p:nvSpPr>
-          <p:cNvPr id="7" name="TextBox 6"/>
+          <p:cNvPr id="8" name="TextBox 7"/>
           <p:cNvSpPr txBox="1"/>
           <p:nvPr/>
         </p:nvSpPr>
         <p:spPr>
           <a:xfrm>
-            <a:off x="1371600" y="3657600"/>
-            <a:ext cx="9144000" cy="548640"/>
+            <a:off x="1371600" y="4114800"/>
+            <a:ext cx="9144000" cy="457200"/>
           </a:xfrm>
           <a:prstGeom prst="rect">
             <a:avLst/>
@@ -3331,7 +3367,7 @@
             <a:pPr algn="ctr">
               <a:defRPr sz="1800" b="0">
                 <a:solidFill>
-                  <a:srgbClr val="94A3B8"/>
+                  <a:srgbClr val="475669"/>
                 </a:solidFill>
                 <a:latin typeface="Calibri"/>
               </a:defRPr>
@@ -3344,14 +3380,59 @@
       </p:sp>
       <p:sp>
         <p:nvSpPr>
-          <p:cNvPr id="8" name="TextBox 7"/>
+          <p:cNvPr id="9" name="Rounded Rectangle 8"/>
+          <p:cNvSpPr/>
+          <p:nvPr/>
+        </p:nvSpPr>
+        <p:spPr>
+          <a:xfrm>
+            <a:off x="2286000" y="4846320"/>
+            <a:ext cx="2011680" cy="411480"/>
+          </a:xfrm>
+          <a:prstGeom prst="roundRect">
+            <a:avLst>
+              <a:gd name="adj" fmla="val 15000"/>
+            </a:avLst>
+          </a:prstGeom>
+          <a:solidFill>
+            <a:srgbClr val="111B2E"/>
+          </a:solidFill>
+          <a:ln>
+            <a:noFill/>
+          </a:ln>
+        </p:spPr>
+        <p:style>
+          <a:lnRef idx="1">
+            <a:schemeClr val="accent1"/>
+          </a:lnRef>
+          <a:fillRef idx="3">
+            <a:schemeClr val="accent1"/>
+          </a:fillRef>
+          <a:effectRef idx="2">
+            <a:schemeClr val="accent1"/>
+          </a:effectRef>
+          <a:fontRef idx="minor">
+            <a:schemeClr val="lt1"/>
+          </a:fontRef>
+        </p:style>
+        <p:txBody>
+          <a:bodyPr rtlCol="0" anchor="ctr"/>
+          <a:lstStyle/>
+          <a:p>
+            <a:pPr algn="ctr"/>
+          </a:p>
+        </p:txBody>
+      </p:sp>
+      <p:sp>
+        <p:nvSpPr>
+          <p:cNvPr id="10" name="TextBox 9"/>
           <p:cNvSpPr txBox="1"/>
           <p:nvPr/>
         </p:nvSpPr>
         <p:spPr>
           <a:xfrm>
-            <a:off x="1371600" y="5029200"/>
-            <a:ext cx="9144000" cy="457200"/>
+            <a:off x="2377440" y="4873752"/>
+            <a:ext cx="1828800" cy="365760"/>
           </a:xfrm>
           <a:prstGeom prst="rect">
             <a:avLst/>
@@ -3365,15 +3446,258 @@
           <a:lstStyle/>
           <a:p>
             <a:pPr algn="ctr">
-              <a:defRPr sz="1800" b="0">
-                <a:solidFill>
-                  <a:srgbClr val="6B728B"/>
-                </a:solidFill>
-                <a:latin typeface="Calibri"/>
-              </a:defRPr>
-            </a:pPr>
-            <a:r>
-              <a:t>Class Presentation - Final Project</a:t>
+              <a:defRPr sz="1200" b="0">
+                <a:solidFill>
+                  <a:srgbClr val="94A3B8"/>
+                </a:solidFill>
+                <a:latin typeface="Calibri"/>
+              </a:defRPr>
+            </a:pPr>
+            <a:r>
+              <a:t>Python 3.12 + FastAPI</a:t>
+            </a:r>
+          </a:p>
+        </p:txBody>
+      </p:sp>
+      <p:sp>
+        <p:nvSpPr>
+          <p:cNvPr id="11" name="Rounded Rectangle 10"/>
+          <p:cNvSpPr/>
+          <p:nvPr/>
+        </p:nvSpPr>
+        <p:spPr>
+          <a:xfrm>
+            <a:off x="4572000" y="4846320"/>
+            <a:ext cx="2011680" cy="411480"/>
+          </a:xfrm>
+          <a:prstGeom prst="roundRect">
+            <a:avLst>
+              <a:gd name="adj" fmla="val 15000"/>
+            </a:avLst>
+          </a:prstGeom>
+          <a:solidFill>
+            <a:srgbClr val="111B2E"/>
+          </a:solidFill>
+          <a:ln>
+            <a:noFill/>
+          </a:ln>
+        </p:spPr>
+        <p:style>
+          <a:lnRef idx="1">
+            <a:schemeClr val="accent1"/>
+          </a:lnRef>
+          <a:fillRef idx="3">
+            <a:schemeClr val="accent1"/>
+          </a:fillRef>
+          <a:effectRef idx="2">
+            <a:schemeClr val="accent1"/>
+          </a:effectRef>
+          <a:fontRef idx="minor">
+            <a:schemeClr val="lt1"/>
+          </a:fontRef>
+        </p:style>
+        <p:txBody>
+          <a:bodyPr rtlCol="0" anchor="ctr"/>
+          <a:lstStyle/>
+          <a:p>
+            <a:pPr algn="ctr"/>
+          </a:p>
+        </p:txBody>
+      </p:sp>
+      <p:sp>
+        <p:nvSpPr>
+          <p:cNvPr id="12" name="TextBox 11"/>
+          <p:cNvSpPr txBox="1"/>
+          <p:nvPr/>
+        </p:nvSpPr>
+        <p:spPr>
+          <a:xfrm>
+            <a:off x="4663440" y="4873752"/>
+            <a:ext cx="1828800" cy="365760"/>
+          </a:xfrm>
+          <a:prstGeom prst="rect">
+            <a:avLst/>
+          </a:prstGeom>
+          <a:noFill/>
+        </p:spPr>
+        <p:txBody>
+          <a:bodyPr wrap="square">
+            <a:spAutoFit/>
+          </a:bodyPr>
+          <a:lstStyle/>
+          <a:p>
+            <a:pPr algn="ctr">
+              <a:defRPr sz="1200" b="0">
+                <a:solidFill>
+                  <a:srgbClr val="94A3B8"/>
+                </a:solidFill>
+                <a:latin typeface="Calibri"/>
+              </a:defRPr>
+            </a:pPr>
+            <a:r>
+              <a:t>Next.js 16 + React 19</a:t>
+            </a:r>
+          </a:p>
+        </p:txBody>
+      </p:sp>
+      <p:sp>
+        <p:nvSpPr>
+          <p:cNvPr id="13" name="Rounded Rectangle 12"/>
+          <p:cNvSpPr/>
+          <p:nvPr/>
+        </p:nvSpPr>
+        <p:spPr>
+          <a:xfrm>
+            <a:off x="6858000" y="4846320"/>
+            <a:ext cx="2011680" cy="411480"/>
+          </a:xfrm>
+          <a:prstGeom prst="roundRect">
+            <a:avLst>
+              <a:gd name="adj" fmla="val 15000"/>
+            </a:avLst>
+          </a:prstGeom>
+          <a:solidFill>
+            <a:srgbClr val="111B2E"/>
+          </a:solidFill>
+          <a:ln>
+            <a:noFill/>
+          </a:ln>
+        </p:spPr>
+        <p:style>
+          <a:lnRef idx="1">
+            <a:schemeClr val="accent1"/>
+          </a:lnRef>
+          <a:fillRef idx="3">
+            <a:schemeClr val="accent1"/>
+          </a:fillRef>
+          <a:effectRef idx="2">
+            <a:schemeClr val="accent1"/>
+          </a:effectRef>
+          <a:fontRef idx="minor">
+            <a:schemeClr val="lt1"/>
+          </a:fontRef>
+        </p:style>
+        <p:txBody>
+          <a:bodyPr rtlCol="0" anchor="ctr"/>
+          <a:lstStyle/>
+          <a:p>
+            <a:pPr algn="ctr"/>
+          </a:p>
+        </p:txBody>
+      </p:sp>
+      <p:sp>
+        <p:nvSpPr>
+          <p:cNvPr id="14" name="TextBox 13"/>
+          <p:cNvSpPr txBox="1"/>
+          <p:nvPr/>
+        </p:nvSpPr>
+        <p:spPr>
+          <a:xfrm>
+            <a:off x="6949440" y="4873752"/>
+            <a:ext cx="1828800" cy="365760"/>
+          </a:xfrm>
+          <a:prstGeom prst="rect">
+            <a:avLst/>
+          </a:prstGeom>
+          <a:noFill/>
+        </p:spPr>
+        <p:txBody>
+          <a:bodyPr wrap="square">
+            <a:spAutoFit/>
+          </a:bodyPr>
+          <a:lstStyle/>
+          <a:p>
+            <a:pPr algn="ctr">
+              <a:defRPr sz="1200" b="0">
+                <a:solidFill>
+                  <a:srgbClr val="94A3B8"/>
+                </a:solidFill>
+                <a:latin typeface="Calibri"/>
+              </a:defRPr>
+            </a:pPr>
+            <a:r>
+              <a:t>OpenAI Agents SDK</a:t>
+            </a:r>
+          </a:p>
+        </p:txBody>
+      </p:sp>
+      <p:sp>
+        <p:nvSpPr>
+          <p:cNvPr id="15" name="Rounded Rectangle 14"/>
+          <p:cNvSpPr/>
+          <p:nvPr/>
+        </p:nvSpPr>
+        <p:spPr>
+          <a:xfrm>
+            <a:off x="9144000" y="4846320"/>
+            <a:ext cx="2011680" cy="411480"/>
+          </a:xfrm>
+          <a:prstGeom prst="roundRect">
+            <a:avLst>
+              <a:gd name="adj" fmla="val 15000"/>
+            </a:avLst>
+          </a:prstGeom>
+          <a:solidFill>
+            <a:srgbClr val="111B2E"/>
+          </a:solidFill>
+          <a:ln>
+            <a:noFill/>
+          </a:ln>
+        </p:spPr>
+        <p:style>
+          <a:lnRef idx="1">
+            <a:schemeClr val="accent1"/>
+          </a:lnRef>
+          <a:fillRef idx="3">
+            <a:schemeClr val="accent1"/>
+          </a:fillRef>
+          <a:effectRef idx="2">
+            <a:schemeClr val="accent1"/>
+          </a:effectRef>
+          <a:fontRef idx="minor">
+            <a:schemeClr val="lt1"/>
+          </a:fontRef>
+        </p:style>
+        <p:txBody>
+          <a:bodyPr rtlCol="0" anchor="ctr"/>
+          <a:lstStyle/>
+          <a:p>
+            <a:pPr algn="ctr"/>
+          </a:p>
+        </p:txBody>
+      </p:sp>
+      <p:sp>
+        <p:nvSpPr>
+          <p:cNvPr id="16" name="TextBox 15"/>
+          <p:cNvSpPr txBox="1"/>
+          <p:nvPr/>
+        </p:nvSpPr>
+        <p:spPr>
+          <a:xfrm>
+            <a:off x="9235440" y="4873752"/>
+            <a:ext cx="1828800" cy="365760"/>
+          </a:xfrm>
+          <a:prstGeom prst="rect">
+            <a:avLst/>
+          </a:prstGeom>
+          <a:noFill/>
+        </p:spPr>
+        <p:txBody>
+          <a:bodyPr wrap="square">
+            <a:spAutoFit/>
+          </a:bodyPr>
+          <a:lstStyle/>
+          <a:p>
+            <a:pPr algn="ctr">
+              <a:defRPr sz="1200" b="0">
+                <a:solidFill>
+                  <a:srgbClr val="94A3B8"/>
+                </a:solidFill>
+                <a:latin typeface="Calibri"/>
+              </a:defRPr>
+            </a:pPr>
+            <a:r>
+              <a:t>PostgreSQL + Qdrant</a:t>
             </a:r>
           </a:p>
         </p:txBody>
@@ -3392,7 +3716,7 @@
     <p:bg>
       <p:bgPr>
         <a:solidFill>
-          <a:srgbClr val="0F172A"/>
+          <a:srgbClr val="070B15"/>
         </a:solidFill>
         <a:effectLst/>
       </p:bgPr>
@@ -3419,7 +3743,7 @@
             <a:avLst/>
           </a:prstGeom>
           <a:solidFill>
-            <a:srgbClr val="0A0F1E"/>
+            <a:srgbClr val="050912"/>
           </a:solidFill>
           <a:ln>
             <a:noFill/>
@@ -3498,8 +3822,8 @@
         </p:nvSpPr>
         <p:spPr>
           <a:xfrm>
-            <a:off x="1371600" y="1828800"/>
-            <a:ext cx="9144000" cy="1097280"/>
+            <a:off x="1371600" y="1371600"/>
+            <a:ext cx="9144000" cy="457200"/>
           </a:xfrm>
           <a:prstGeom prst="rect">
             <a:avLst/>
@@ -3513,9 +3837,45 @@
           <a:lstStyle/>
           <a:p>
             <a:pPr algn="ctr">
-              <a:defRPr sz="4800" b="1">
-                <a:solidFill>
-                  <a:srgbClr val="FFFFFF"/>
+              <a:defRPr sz="1300" b="0">
+                <a:solidFill>
+                  <a:srgbClr val="3B82F6"/>
+                </a:solidFill>
+                <a:latin typeface="Calibri"/>
+              </a:defRPr>
+            </a:pPr>
+            <a:r>
+              <a:t>✦  FINAL</a:t>
+            </a:r>
+          </a:p>
+        </p:txBody>
+      </p:sp>
+      <p:sp>
+        <p:nvSpPr>
+          <p:cNvPr id="5" name="TextBox 4"/>
+          <p:cNvSpPr txBox="1"/>
+          <p:nvPr/>
+        </p:nvSpPr>
+        <p:spPr>
+          <a:xfrm>
+            <a:off x="1371600" y="2011680"/>
+            <a:ext cx="9144000" cy="1097280"/>
+          </a:xfrm>
+          <a:prstGeom prst="rect">
+            <a:avLst/>
+          </a:prstGeom>
+          <a:noFill/>
+        </p:spPr>
+        <p:txBody>
+          <a:bodyPr wrap="square">
+            <a:spAutoFit/>
+          </a:bodyPr>
+          <a:lstStyle/>
+          <a:p>
+            <a:pPr algn="ctr">
+              <a:defRPr sz="5200" b="1">
+                <a:solidFill>
+                  <a:srgbClr val="F1F5F9"/>
                 </a:solidFill>
                 <a:latin typeface="Calibri"/>
               </a:defRPr>
@@ -3528,14 +3888,14 @@
       </p:sp>
       <p:sp>
         <p:nvSpPr>
-          <p:cNvPr id="5" name="Rectangle 4"/>
+          <p:cNvPr id="6" name="Rectangle 5"/>
           <p:cNvSpPr/>
           <p:nvPr/>
         </p:nvSpPr>
         <p:spPr>
           <a:xfrm>
-            <a:off x="5029200" y="3017520"/>
-            <a:ext cx="2011680" cy="54864"/>
+            <a:off x="5029200" y="3200400"/>
+            <a:ext cx="2011680" cy="36576"/>
           </a:xfrm>
           <a:prstGeom prst="rect">
             <a:avLst/>
@@ -3571,13 +3931,13 @@
       </p:sp>
       <p:sp>
         <p:nvSpPr>
-          <p:cNvPr id="6" name="TextBox 5"/>
+          <p:cNvPr id="7" name="TextBox 6"/>
           <p:cNvSpPr txBox="1"/>
           <p:nvPr/>
         </p:nvSpPr>
         <p:spPr>
           <a:xfrm>
-            <a:off x="1371600" y="3291840"/>
+            <a:off x="1371600" y="3566160"/>
             <a:ext cx="9144000" cy="548640"/>
           </a:xfrm>
           <a:prstGeom prst="rect">
@@ -3607,14 +3967,59 @@
       </p:sp>
       <p:sp>
         <p:nvSpPr>
-          <p:cNvPr id="7" name="TextBox 6"/>
+          <p:cNvPr id="8" name="Rounded Rectangle 7"/>
+          <p:cNvSpPr/>
+          <p:nvPr/>
+        </p:nvSpPr>
+        <p:spPr>
+          <a:xfrm>
+            <a:off x="4114800" y="4389120"/>
+            <a:ext cx="3931920" cy="457200"/>
+          </a:xfrm>
+          <a:prstGeom prst="roundRect">
+            <a:avLst>
+              <a:gd name="adj" fmla="val 15000"/>
+            </a:avLst>
+          </a:prstGeom>
+          <a:solidFill>
+            <a:srgbClr val="111B2E"/>
+          </a:solidFill>
+          <a:ln>
+            <a:noFill/>
+          </a:ln>
+        </p:spPr>
+        <p:style>
+          <a:lnRef idx="1">
+            <a:schemeClr val="accent1"/>
+          </a:lnRef>
+          <a:fillRef idx="3">
+            <a:schemeClr val="accent1"/>
+          </a:fillRef>
+          <a:effectRef idx="2">
+            <a:schemeClr val="accent1"/>
+          </a:effectRef>
+          <a:fontRef idx="minor">
+            <a:schemeClr val="lt1"/>
+          </a:fontRef>
+        </p:style>
+        <p:txBody>
+          <a:bodyPr rtlCol="0" anchor="ctr"/>
+          <a:lstStyle/>
+          <a:p>
+            <a:pPr algn="ctr"/>
+          </a:p>
+        </p:txBody>
+      </p:sp>
+      <p:sp>
+        <p:nvSpPr>
+          <p:cNvPr id="9" name="TextBox 8"/>
           <p:cNvSpPr txBox="1"/>
           <p:nvPr/>
         </p:nvSpPr>
         <p:spPr>
           <a:xfrm>
-            <a:off x="1371600" y="4114800"/>
-            <a:ext cx="9144000" cy="457200"/>
+            <a:off x="4206240" y="4434840"/>
+            <a:ext cx="3749039" cy="365760"/>
           </a:xfrm>
           <a:prstGeom prst="rect">
             <a:avLst/>
@@ -3628,7 +4033,7 @@
           <a:lstStyle/>
           <a:p>
             <a:pPr algn="ctr">
-              <a:defRPr sz="1600" b="0">
+              <a:defRPr sz="1400" b="0">
                 <a:solidFill>
                   <a:srgbClr val="3B82F6"/>
                 </a:solidFill>
@@ -3636,20 +4041,20 @@
               </a:defRPr>
             </a:pPr>
             <a:r>
-              <a:t>GitHub: github.com/muhammadharis-web/wherehouse-os-</a:t>
-            </a:r>
-          </a:p>
-        </p:txBody>
-      </p:sp>
-      <p:sp>
-        <p:nvSpPr>
-          <p:cNvPr id="8" name="TextBox 7"/>
+              <a:t>📂  Final Project Presentation</a:t>
+            </a:r>
+          </a:p>
+        </p:txBody>
+      </p:sp>
+      <p:sp>
+        <p:nvSpPr>
+          <p:cNvPr id="10" name="TextBox 9"/>
           <p:cNvSpPr txBox="1"/>
           <p:nvPr/>
         </p:nvSpPr>
         <p:spPr>
           <a:xfrm>
-            <a:off x="1371600" y="5029200"/>
+            <a:off x="1371600" y="5303520"/>
             <a:ext cx="9144000" cy="914400"/>
           </a:xfrm>
           <a:prstGeom prst="rect">
@@ -3666,7 +4071,7 @@
             <a:pPr algn="ctr">
               <a:defRPr sz="3200" b="0">
                 <a:solidFill>
-                  <a:srgbClr val="94A3B8"/>
+                  <a:srgbClr val="475669"/>
                 </a:solidFill>
                 <a:latin typeface="Calibri"/>
               </a:defRPr>
@@ -3691,7 +4096,7 @@
     <p:bg>
       <p:bgPr>
         <a:solidFill>
-          <a:srgbClr val="F8FAFC"/>
+          <a:srgbClr val="070B15"/>
         </a:solidFill>
         <a:effectLst/>
       </p:bgPr>
@@ -3712,13 +4117,13 @@
         <p:spPr>
           <a:xfrm>
             <a:off x="0" y="0"/>
-            <a:ext cx="5029200" cy="6858000"/>
+            <a:ext cx="5303520" cy="6858000"/>
           </a:xfrm>
           <a:prstGeom prst="rect">
             <a:avLst/>
           </a:prstGeom>
           <a:solidFill>
-            <a:srgbClr val="0F172A"/>
+            <a:srgbClr val="0D1428"/>
           </a:solidFill>
           <a:ln>
             <a:noFill/>
@@ -3754,8 +4159,8 @@
         </p:nvSpPr>
         <p:spPr>
           <a:xfrm>
-            <a:off x="731520" y="731520"/>
-            <a:ext cx="4114800" cy="548640"/>
+            <a:off x="548640" y="548640"/>
+            <a:ext cx="4572000" cy="365760"/>
           </a:xfrm>
           <a:prstGeom prst="rect">
             <a:avLst/>
@@ -3769,29 +4174,65 @@
           <a:lstStyle/>
           <a:p>
             <a:pPr algn="l">
-              <a:defRPr sz="2800" b="1">
-                <a:solidFill>
-                  <a:srgbClr val="FFFFFF"/>
-                </a:solidFill>
-                <a:latin typeface="Calibri"/>
-              </a:defRPr>
-            </a:pPr>
-            <a:r>
-              <a:t>PROJECT OVERVIEW</a:t>
-            </a:r>
-          </a:p>
-        </p:txBody>
-      </p:sp>
-      <p:sp>
-        <p:nvSpPr>
-          <p:cNvPr id="4" name="Rectangle 3"/>
+              <a:defRPr sz="1300" b="0">
+                <a:solidFill>
+                  <a:srgbClr val="3B82F6"/>
+                </a:solidFill>
+                <a:latin typeface="Calibri"/>
+              </a:defRPr>
+            </a:pPr>
+            <a:r>
+              <a:t>✦  OVERVIEW</a:t>
+            </a:r>
+          </a:p>
+        </p:txBody>
+      </p:sp>
+      <p:sp>
+        <p:nvSpPr>
+          <p:cNvPr id="4" name="TextBox 3"/>
+          <p:cNvSpPr txBox="1"/>
+          <p:nvPr/>
+        </p:nvSpPr>
+        <p:spPr>
+          <a:xfrm>
+            <a:off x="548640" y="914400"/>
+            <a:ext cx="4572000" cy="640080"/>
+          </a:xfrm>
+          <a:prstGeom prst="rect">
+            <a:avLst/>
+          </a:prstGeom>
+          <a:noFill/>
+        </p:spPr>
+        <p:txBody>
+          <a:bodyPr wrap="square">
+            <a:spAutoFit/>
+          </a:bodyPr>
+          <a:lstStyle/>
+          <a:p>
+            <a:pPr algn="l">
+              <a:defRPr sz="3000" b="1">
+                <a:solidFill>
+                  <a:srgbClr val="F1F5F9"/>
+                </a:solidFill>
+                <a:latin typeface="Calibri"/>
+              </a:defRPr>
+            </a:pPr>
+            <a:r>
+              <a:t>Project Overview</a:t>
+            </a:r>
+          </a:p>
+        </p:txBody>
+      </p:sp>
+      <p:sp>
+        <p:nvSpPr>
+          <p:cNvPr id="5" name="Rectangle 4"/>
           <p:cNvSpPr/>
           <p:nvPr/>
         </p:nvSpPr>
         <p:spPr>
           <a:xfrm>
-            <a:off x="731520" y="1371600"/>
-            <a:ext cx="1097280" cy="54864"/>
+            <a:off x="548640" y="1554480"/>
+            <a:ext cx="914400" cy="36576"/>
           </a:xfrm>
           <a:prstGeom prst="rect">
             <a:avLst/>
@@ -3827,14 +4268,14 @@
       </p:sp>
       <p:sp>
         <p:nvSpPr>
-          <p:cNvPr id="5" name="TextBox 4"/>
+          <p:cNvPr id="6" name="TextBox 5"/>
           <p:cNvSpPr txBox="1"/>
           <p:nvPr/>
         </p:nvSpPr>
         <p:spPr>
           <a:xfrm>
-            <a:off x="731520" y="1828800"/>
-            <a:ext cx="3840480" cy="2286000"/>
+            <a:off x="548640" y="1920240"/>
+            <a:ext cx="4389120" cy="1645920"/>
           </a:xfrm>
           <a:prstGeom prst="rect">
             <a:avLst/>
@@ -3863,14 +4304,14 @@
       </p:sp>
       <p:sp>
         <p:nvSpPr>
-          <p:cNvPr id="6" name="TextBox 5"/>
+          <p:cNvPr id="7" name="TextBox 6"/>
           <p:cNvSpPr txBox="1"/>
           <p:nvPr/>
         </p:nvSpPr>
         <p:spPr>
           <a:xfrm>
-            <a:off x="731520" y="3840480"/>
-            <a:ext cx="4114800" cy="4114800"/>
+            <a:off x="548640" y="3474720"/>
+            <a:ext cx="4389120" cy="4114800"/>
           </a:xfrm>
           <a:prstGeom prst="rect">
             <a:avLst/>
@@ -3885,9 +4326,9 @@
           <a:p>
             <a:pPr>
               <a:spcAft>
-                <a:spcPts val="800"/>
+                <a:spcPts val="1000"/>
               </a:spcAft>
-              <a:defRPr sz="1400">
+              <a:defRPr sz="1300">
                 <a:solidFill>
                   <a:srgbClr val="CBD5E1"/>
                 </a:solidFill>
@@ -3895,15 +4336,15 @@
               </a:defRPr>
             </a:pPr>
             <a:r>
-              <a:t>Real-time order processing &amp; tracking</a:t>
+              <a:t>  Real-time order processing &amp; tracking</a:t>
             </a:r>
           </a:p>
           <a:p>
             <a:pPr>
               <a:spcAft>
-                <a:spcPts val="800"/>
+                <a:spcPts val="1000"/>
               </a:spcAft>
-              <a:defRPr sz="1400">
+              <a:defRPr sz="1300">
                 <a:solidFill>
                   <a:srgbClr val="CBD5E1"/>
                 </a:solidFill>
@@ -3911,15 +4352,15 @@
               </a:defRPr>
             </a:pPr>
             <a:r>
-              <a:t>Multi-agent AI orchestration</a:t>
+              <a:t>  Multi-agent AI orchestration</a:t>
             </a:r>
           </a:p>
           <a:p>
             <a:pPr>
               <a:spcAft>
-                <a:spcPts val="800"/>
+                <a:spcPts val="1000"/>
               </a:spcAft>
-              <a:defRPr sz="1400">
+              <a:defRPr sz="1300">
                 <a:solidFill>
                   <a:srgbClr val="CBD5E1"/>
                 </a:solidFill>
@@ -3927,15 +4368,15 @@
               </a:defRPr>
             </a:pPr>
             <a:r>
-              <a:t>Vector database for semantic search</a:t>
+              <a:t>  Vector database for semantic search</a:t>
             </a:r>
           </a:p>
           <a:p>
             <a:pPr>
               <a:spcAft>
-                <a:spcPts val="800"/>
+                <a:spcPts val="1000"/>
               </a:spcAft>
-              <a:defRPr sz="1400">
+              <a:defRPr sz="1300">
                 <a:solidFill>
                   <a:srgbClr val="CBD5E1"/>
                 </a:solidFill>
@@ -3943,15 +4384,15 @@
               </a:defRPr>
             </a:pPr>
             <a:r>
-              <a:t>Automated rerouting &amp; delay prediction</a:t>
+              <a:t>  Automated rerouting &amp; delay prediction</a:t>
             </a:r>
           </a:p>
           <a:p>
             <a:pPr>
               <a:spcAft>
-                <a:spcPts val="800"/>
+                <a:spcPts val="1000"/>
               </a:spcAft>
-              <a:defRPr sz="1400">
+              <a:defRPr sz="1300">
                 <a:solidFill>
                   <a:srgbClr val="CBD5E1"/>
                 </a:solidFill>
@@ -3959,15 +4400,15 @@
               </a:defRPr>
             </a:pPr>
             <a:r>
-              <a:t>SMS/Email notifications (Twilio + SendGrid)</a:t>
+              <a:t>  SMS/Email notifications (Twilio + SendGrid)</a:t>
             </a:r>
           </a:p>
           <a:p>
             <a:pPr>
               <a:spcAft>
-                <a:spcPts val="800"/>
+                <a:spcPts val="1000"/>
               </a:spcAft>
-              <a:defRPr sz="1400">
+              <a:defRPr sz="1300">
                 <a:solidFill>
                   <a:srgbClr val="CBD5E1"/>
                 </a:solidFill>
@@ -3975,15 +4416,15 @@
               </a:defRPr>
             </a:pPr>
             <a:r>
-              <a:t>3D warehouse visualization (Three.js)</a:t>
+              <a:t>  3D warehouse visualization (Three.js)</a:t>
             </a:r>
           </a:p>
           <a:p>
             <a:pPr>
               <a:spcAft>
-                <a:spcPts val="800"/>
+                <a:spcPts val="1000"/>
               </a:spcAft>
-              <a:defRPr sz="1400">
+              <a:defRPr sz="1300">
                 <a:solidFill>
                   <a:srgbClr val="CBD5E1"/>
                 </a:solidFill>
@@ -3991,21 +4432,21 @@
               </a:defRPr>
             </a:pPr>
             <a:r>
-              <a:t>Smooth animations (Framer Motion + GSAP)</a:t>
-            </a:r>
-          </a:p>
-        </p:txBody>
-      </p:sp>
-      <p:sp>
-        <p:nvSpPr>
-          <p:cNvPr id="7" name="TextBox 6"/>
+              <a:t>  Smooth animations (Framer Motion + GSAP)</a:t>
+            </a:r>
+          </a:p>
+        </p:txBody>
+      </p:sp>
+      <p:sp>
+        <p:nvSpPr>
+          <p:cNvPr id="8" name="TextBox 7"/>
           <p:cNvSpPr txBox="1"/>
           <p:nvPr/>
         </p:nvSpPr>
         <p:spPr>
           <a:xfrm>
-            <a:off x="5669280" y="731520"/>
-            <a:ext cx="5943600" cy="548640"/>
+            <a:off x="5943600" y="548640"/>
+            <a:ext cx="5486400" cy="365760"/>
           </a:xfrm>
           <a:prstGeom prst="rect">
             <a:avLst/>
@@ -4019,29 +4460,65 @@
           <a:lstStyle/>
           <a:p>
             <a:pPr algn="l">
-              <a:defRPr sz="2400" b="1">
-                <a:solidFill>
-                  <a:srgbClr val="0F172A"/>
-                </a:solidFill>
-                <a:latin typeface="Calibri"/>
-              </a:defRPr>
-            </a:pPr>
-            <a:r>
-              <a:t>TECH STACK OVERVIEW</a:t>
-            </a:r>
-          </a:p>
-        </p:txBody>
-      </p:sp>
-      <p:sp>
-        <p:nvSpPr>
-          <p:cNvPr id="8" name="Rectangle 7"/>
+              <a:defRPr sz="1300" b="0">
+                <a:solidFill>
+                  <a:srgbClr val="3B82F6"/>
+                </a:solidFill>
+                <a:latin typeface="Calibri"/>
+              </a:defRPr>
+            </a:pPr>
+            <a:r>
+              <a:t>TECH STACK</a:t>
+            </a:r>
+          </a:p>
+        </p:txBody>
+      </p:sp>
+      <p:sp>
+        <p:nvSpPr>
+          <p:cNvPr id="9" name="TextBox 8"/>
+          <p:cNvSpPr txBox="1"/>
+          <p:nvPr/>
+        </p:nvSpPr>
+        <p:spPr>
+          <a:xfrm>
+            <a:off x="5943600" y="914400"/>
+            <a:ext cx="5486400" cy="548640"/>
+          </a:xfrm>
+          <a:prstGeom prst="rect">
+            <a:avLst/>
+          </a:prstGeom>
+          <a:noFill/>
+        </p:spPr>
+        <p:txBody>
+          <a:bodyPr wrap="square">
+            <a:spAutoFit/>
+          </a:bodyPr>
+          <a:lstStyle/>
+          <a:p>
+            <a:pPr algn="l">
+              <a:defRPr sz="2600" b="1">
+                <a:solidFill>
+                  <a:srgbClr val="070B15"/>
+                </a:solidFill>
+                <a:latin typeface="Calibri"/>
+              </a:defRPr>
+            </a:pPr>
+            <a:r>
+              <a:t>Technology Stack</a:t>
+            </a:r>
+          </a:p>
+        </p:txBody>
+      </p:sp>
+      <p:sp>
+        <p:nvSpPr>
+          <p:cNvPr id="10" name="Rectangle 9"/>
           <p:cNvSpPr/>
           <p:nvPr/>
         </p:nvSpPr>
         <p:spPr>
           <a:xfrm>
-            <a:off x="5669280" y="1371600"/>
-            <a:ext cx="1097280" cy="54864"/>
+            <a:off x="5943600" y="1463040"/>
+            <a:ext cx="731520" cy="36576"/>
           </a:xfrm>
           <a:prstGeom prst="rect">
             <a:avLst/>
@@ -4077,20 +4554,22 @@
       </p:sp>
       <p:sp>
         <p:nvSpPr>
-          <p:cNvPr id="9" name="Rounded Rectangle 8"/>
+          <p:cNvPr id="11" name="Rounded Rectangle 10"/>
           <p:cNvSpPr/>
           <p:nvPr/>
         </p:nvSpPr>
         <p:spPr>
           <a:xfrm>
-            <a:off x="5669280" y="1828800"/>
-            <a:ext cx="2743200" cy="1463040"/>
+            <a:off x="5943600" y="1828800"/>
+            <a:ext cx="2743200" cy="1371600"/>
           </a:xfrm>
           <a:prstGeom prst="roundRect">
-            <a:avLst/>
+            <a:avLst>
+              <a:gd name="adj" fmla="val 4000"/>
+            </a:avLst>
           </a:prstGeom>
           <a:solidFill>
-            <a:srgbClr val="1E293B"/>
+            <a:srgbClr val="111B2E"/>
           </a:solidFill>
           <a:ln>
             <a:noFill/>
@@ -4111,13 +4590,13 @@
           </a:fontRef>
         </p:style>
         <p:txBody>
-          <a:bodyPr rtlCol="0" anchor="ctr" wrap="square" lIns="182880" rIns="182880" tIns="137160" bIns="137160"/>
+          <a:bodyPr rtlCol="0" anchor="ctr" wrap="square" lIns="182880" rIns="182880" tIns="164592" bIns="91440"/>
           <a:lstStyle/>
           <a:p>
             <a:pPr algn="ctr">
-              <a:defRPr sz="1200">
-                <a:solidFill>
-                  <a:srgbClr val="FFFFFF"/>
+              <a:defRPr sz="1400" b="1">
+                <a:solidFill>
+                  <a:srgbClr val="3B82F6"/>
                 </a:solidFill>
                 <a:latin typeface="Calibri"/>
               </a:defRPr>
@@ -4125,41 +4604,47 @@
             <a:r>
               <a:t>Backend</a:t>
             </a:r>
+          </a:p>
+          <a:p>
+            <a:pPr algn="ctr">
+              <a:spcBef>
+                <a:spcPts val="600"/>
+              </a:spcBef>
+              <a:defRPr sz="1100">
+                <a:solidFill>
+                  <a:srgbClr val="94A3B8"/>
+                </a:solidFill>
+                <a:latin typeface="Calibri"/>
+              </a:defRPr>
+            </a:pPr>
+            <a:r>
+              <a:t>Python 3.12 • FastAPI</a:t>
+            </a:r>
             <a:br/>
             <a:r>
-              <a:t>—————————</a:t>
-            </a:r>
-            <a:br/>
-            <a:r>
-              <a:t>Python 3.12 • FastAPI</a:t>
-            </a:r>
-            <a:br/>
-            <a:r>
-              <a:t>SQLAlchemy • Celery</a:t>
-            </a:r>
-            <a:br/>
-            <a:r>
-              <a:t>Redis • Qdrant • OpenAI</a:t>
-            </a:r>
-          </a:p>
-        </p:txBody>
-      </p:sp>
-      <p:sp>
-        <p:nvSpPr>
-          <p:cNvPr id="10" name="Rounded Rectangle 9"/>
+              <a:t>SQLAlchemy • Celery • Redis</a:t>
+            </a:r>
+          </a:p>
+        </p:txBody>
+      </p:sp>
+      <p:sp>
+        <p:nvSpPr>
+          <p:cNvPr id="12" name="Rounded Rectangle 11"/>
           <p:cNvSpPr/>
           <p:nvPr/>
         </p:nvSpPr>
         <p:spPr>
           <a:xfrm>
-            <a:off x="8686800" y="1828800"/>
-            <a:ext cx="2743200" cy="1463040"/>
+            <a:off x="8961120" y="1828800"/>
+            <a:ext cx="2743200" cy="1371600"/>
           </a:xfrm>
           <a:prstGeom prst="roundRect">
-            <a:avLst/>
+            <a:avLst>
+              <a:gd name="adj" fmla="val 4000"/>
+            </a:avLst>
           </a:prstGeom>
           <a:solidFill>
-            <a:srgbClr val="1E293B"/>
+            <a:srgbClr val="111B2E"/>
           </a:solidFill>
           <a:ln>
             <a:noFill/>
@@ -4180,13 +4665,13 @@
           </a:fontRef>
         </p:style>
         <p:txBody>
-          <a:bodyPr rtlCol="0" anchor="ctr" wrap="square" lIns="182880" rIns="182880" tIns="137160" bIns="137160"/>
+          <a:bodyPr rtlCol="0" anchor="ctr" wrap="square" lIns="182880" rIns="182880" tIns="164592" bIns="91440"/>
           <a:lstStyle/>
           <a:p>
             <a:pPr algn="ctr">
-              <a:defRPr sz="1200">
-                <a:solidFill>
-                  <a:srgbClr val="FFFFFF"/>
+              <a:defRPr sz="1400" b="1">
+                <a:solidFill>
+                  <a:srgbClr val="3B82F6"/>
                 </a:solidFill>
                 <a:latin typeface="Calibri"/>
               </a:defRPr>
@@ -4194,41 +4679,47 @@
             <a:r>
               <a:t>Frontend</a:t>
             </a:r>
+          </a:p>
+          <a:p>
+            <a:pPr algn="ctr">
+              <a:spcBef>
+                <a:spcPts val="600"/>
+              </a:spcBef>
+              <a:defRPr sz="1100">
+                <a:solidFill>
+                  <a:srgbClr val="94A3B8"/>
+                </a:solidFill>
+                <a:latin typeface="Calibri"/>
+              </a:defRPr>
+            </a:pPr>
+            <a:r>
+              <a:t>Next.js 16 • React 19</a:t>
+            </a:r>
             <a:br/>
             <a:r>
-              <a:t>—————————</a:t>
-            </a:r>
-            <a:br/>
-            <a:r>
-              <a:t>Next.js 16 • React 19</a:t>
-            </a:r>
-            <a:br/>
-            <a:r>
               <a:t>TypeScript • Tailwind CSS v4</a:t>
             </a:r>
-            <a:br/>
-            <a:r>
-              <a:t>Framer Motion • Three.js</a:t>
-            </a:r>
-          </a:p>
-        </p:txBody>
-      </p:sp>
-      <p:sp>
-        <p:nvSpPr>
-          <p:cNvPr id="11" name="Rounded Rectangle 10"/>
+          </a:p>
+        </p:txBody>
+      </p:sp>
+      <p:sp>
+        <p:nvSpPr>
+          <p:cNvPr id="13" name="Rounded Rectangle 12"/>
           <p:cNvSpPr/>
           <p:nvPr/>
         </p:nvSpPr>
         <p:spPr>
           <a:xfrm>
-            <a:off x="5669280" y="3566160"/>
-            <a:ext cx="2743200" cy="1463040"/>
+            <a:off x="5943600" y="3429000"/>
+            <a:ext cx="2743200" cy="1371600"/>
           </a:xfrm>
           <a:prstGeom prst="roundRect">
-            <a:avLst/>
+            <a:avLst>
+              <a:gd name="adj" fmla="val 4000"/>
+            </a:avLst>
           </a:prstGeom>
           <a:solidFill>
-            <a:srgbClr val="1E293B"/>
+            <a:srgbClr val="111B2E"/>
           </a:solidFill>
           <a:ln>
             <a:noFill/>
@@ -4249,13 +4740,13 @@
           </a:fontRef>
         </p:style>
         <p:txBody>
-          <a:bodyPr rtlCol="0" anchor="ctr" wrap="square" lIns="182880" rIns="182880" tIns="137160" bIns="137160"/>
+          <a:bodyPr rtlCol="0" anchor="ctr" wrap="square" lIns="182880" rIns="182880" tIns="164592" bIns="91440"/>
           <a:lstStyle/>
           <a:p>
             <a:pPr algn="ctr">
-              <a:defRPr sz="1200">
-                <a:solidFill>
-                  <a:srgbClr val="FFFFFF"/>
+              <a:defRPr sz="1400" b="1">
+                <a:solidFill>
+                  <a:srgbClr val="3B82F6"/>
                 </a:solidFill>
                 <a:latin typeface="Calibri"/>
               </a:defRPr>
@@ -4263,45 +4754,47 @@
             <a:r>
               <a:t>Database</a:t>
             </a:r>
+          </a:p>
+          <a:p>
+            <a:pPr algn="ctr">
+              <a:spcBef>
+                <a:spcPts val="600"/>
+              </a:spcBef>
+              <a:defRPr sz="1100">
+                <a:solidFill>
+                  <a:srgbClr val="94A3B8"/>
+                </a:solidFill>
+                <a:latin typeface="Calibri"/>
+              </a:defRPr>
+            </a:pPr>
+            <a:r>
+              <a:t>PostgreSQL 16 • SQLite</a:t>
+            </a:r>
             <a:br/>
             <a:r>
-              <a:t>—————————</a:t>
-            </a:r>
-            <a:br/>
-            <a:r>
-              <a:t>PostgreSQL 16 (Prod)</a:t>
-            </a:r>
-            <a:br/>
-            <a:r>
-              <a:t>SQLite (Dev)</a:t>
-            </a:r>
-            <a:br/>
-            <a:r>
-              <a:t>Qdrant Vector DB</a:t>
-            </a:r>
-            <a:br/>
-            <a:r>
-              <a:t>Redis Cache</a:t>
-            </a:r>
-          </a:p>
-        </p:txBody>
-      </p:sp>
-      <p:sp>
-        <p:nvSpPr>
-          <p:cNvPr id="12" name="Rounded Rectangle 11"/>
+              <a:t>Qdrant Vector DB • Redis Cache</a:t>
+            </a:r>
+          </a:p>
+        </p:txBody>
+      </p:sp>
+      <p:sp>
+        <p:nvSpPr>
+          <p:cNvPr id="14" name="Rounded Rectangle 13"/>
           <p:cNvSpPr/>
           <p:nvPr/>
         </p:nvSpPr>
         <p:spPr>
           <a:xfrm>
-            <a:off x="8686800" y="3566160"/>
-            <a:ext cx="2743200" cy="1463040"/>
+            <a:off x="8961120" y="3429000"/>
+            <a:ext cx="2743200" cy="1371600"/>
           </a:xfrm>
           <a:prstGeom prst="roundRect">
-            <a:avLst/>
+            <a:avLst>
+              <a:gd name="adj" fmla="val 4000"/>
+            </a:avLst>
           </a:prstGeom>
           <a:solidFill>
-            <a:srgbClr val="1E293B"/>
+            <a:srgbClr val="111B2E"/>
           </a:solidFill>
           <a:ln>
             <a:noFill/>
@@ -4322,13 +4815,13 @@
           </a:fontRef>
         </p:style>
         <p:txBody>
-          <a:bodyPr rtlCol="0" anchor="ctr" wrap="square" lIns="182880" rIns="182880" tIns="137160" bIns="137160"/>
+          <a:bodyPr rtlCol="0" anchor="ctr" wrap="square" lIns="182880" rIns="182880" tIns="164592" bIns="91440"/>
           <a:lstStyle/>
           <a:p>
             <a:pPr algn="ctr">
-              <a:defRPr sz="1200">
-                <a:solidFill>
-                  <a:srgbClr val="FFFFFF"/>
+              <a:defRPr sz="1400" b="1">
+                <a:solidFill>
+                  <a:srgbClr val="3B82F6"/>
                 </a:solidFill>
                 <a:latin typeface="Calibri"/>
               </a:defRPr>
@@ -4336,45 +4829,47 @@
             <a:r>
               <a:t>AI / Agents</a:t>
             </a:r>
+          </a:p>
+          <a:p>
+            <a:pPr algn="ctr">
+              <a:spcBef>
+                <a:spcPts val="600"/>
+              </a:spcBef>
+              <a:defRPr sz="1100">
+                <a:solidFill>
+                  <a:srgbClr val="94A3B8"/>
+                </a:solidFill>
+                <a:latin typeface="Calibri"/>
+              </a:defRPr>
+            </a:pPr>
+            <a:r>
+              <a:t>OpenAI GPT-4o</a:t>
+            </a:r>
             <a:br/>
             <a:r>
-              <a:t>—————————</a:t>
-            </a:r>
-            <a:br/>
-            <a:r>
-              <a:t>OpenAI GPT-4o</a:t>
-            </a:r>
-            <a:br/>
-            <a:r>
-              <a:t>OpenAI Agents SDK</a:t>
-            </a:r>
-            <a:br/>
-            <a:r>
-              <a:t>5 Autonomous Agents</a:t>
-            </a:r>
-            <a:br/>
-            <a:r>
-              <a:t>Vector Embeddings</a:t>
-            </a:r>
-          </a:p>
-        </p:txBody>
-      </p:sp>
-      <p:sp>
-        <p:nvSpPr>
-          <p:cNvPr id="13" name="Rounded Rectangle 12"/>
+              <a:t>Agents SDK • 5 Agents</a:t>
+            </a:r>
+          </a:p>
+        </p:txBody>
+      </p:sp>
+      <p:sp>
+        <p:nvSpPr>
+          <p:cNvPr id="15" name="Rounded Rectangle 14"/>
           <p:cNvSpPr/>
           <p:nvPr/>
         </p:nvSpPr>
         <p:spPr>
           <a:xfrm>
-            <a:off x="5669280" y="5303520"/>
-            <a:ext cx="2743200" cy="1463040"/>
+            <a:off x="5943600" y="5029200"/>
+            <a:ext cx="2743200" cy="1371600"/>
           </a:xfrm>
           <a:prstGeom prst="roundRect">
-            <a:avLst/>
+            <a:avLst>
+              <a:gd name="adj" fmla="val 4000"/>
+            </a:avLst>
           </a:prstGeom>
           <a:solidFill>
-            <a:srgbClr val="1E293B"/>
+            <a:srgbClr val="111B2E"/>
           </a:solidFill>
           <a:ln>
             <a:noFill/>
@@ -4395,13 +4890,13 @@
           </a:fontRef>
         </p:style>
         <p:txBody>
-          <a:bodyPr rtlCol="0" anchor="ctr" wrap="square" lIns="182880" rIns="182880" tIns="137160" bIns="137160"/>
+          <a:bodyPr rtlCol="0" anchor="ctr" wrap="square" lIns="182880" rIns="182880" tIns="164592" bIns="91440"/>
           <a:lstStyle/>
           <a:p>
             <a:pPr algn="ctr">
-              <a:defRPr sz="1200">
-                <a:solidFill>
-                  <a:srgbClr val="FFFFFF"/>
+              <a:defRPr sz="1400" b="1">
+                <a:solidFill>
+                  <a:srgbClr val="3B82F6"/>
                 </a:solidFill>
                 <a:latin typeface="Calibri"/>
               </a:defRPr>
@@ -4409,45 +4904,47 @@
             <a:r>
               <a:t>DevOps</a:t>
             </a:r>
+          </a:p>
+          <a:p>
+            <a:pPr algn="ctr">
+              <a:spcBef>
+                <a:spcPts val="600"/>
+              </a:spcBef>
+              <a:defRPr sz="1100">
+                <a:solidFill>
+                  <a:srgbClr val="94A3B8"/>
+                </a:solidFill>
+                <a:latin typeface="Calibri"/>
+              </a:defRPr>
+            </a:pPr>
+            <a:r>
+              <a:t>Docker • Git • Ruff</a:t>
+            </a:r>
             <a:br/>
             <a:r>
-              <a:t>—————————</a:t>
-            </a:r>
-            <a:br/>
-            <a:r>
-              <a:t>Docker • docker-compose</a:t>
-            </a:r>
-            <a:br/>
-            <a:r>
-              <a:t>Git • Ruff • mypy</a:t>
-            </a:r>
-            <a:br/>
-            <a:r>
-              <a:t>pytest • Vitest</a:t>
-            </a:r>
-            <a:br/>
-            <a:r>
-              <a:t>ESLint</a:t>
-            </a:r>
-          </a:p>
-        </p:txBody>
-      </p:sp>
-      <p:sp>
-        <p:nvSpPr>
-          <p:cNvPr id="14" name="Rounded Rectangle 13"/>
+              <a:t>mypy • pytest • Vitest</a:t>
+            </a:r>
+          </a:p>
+        </p:txBody>
+      </p:sp>
+      <p:sp>
+        <p:nvSpPr>
+          <p:cNvPr id="16" name="Rounded Rectangle 15"/>
           <p:cNvSpPr/>
           <p:nvPr/>
         </p:nvSpPr>
         <p:spPr>
           <a:xfrm>
-            <a:off x="8686800" y="5303520"/>
-            <a:ext cx="2743200" cy="1463040"/>
+            <a:off x="8961120" y="5029200"/>
+            <a:ext cx="2743200" cy="1371600"/>
           </a:xfrm>
           <a:prstGeom prst="roundRect">
-            <a:avLst/>
+            <a:avLst>
+              <a:gd name="adj" fmla="val 4000"/>
+            </a:avLst>
           </a:prstGeom>
           <a:solidFill>
-            <a:srgbClr val="1E293B"/>
+            <a:srgbClr val="111B2E"/>
           </a:solidFill>
           <a:ln>
             <a:noFill/>
@@ -4468,13 +4965,13 @@
           </a:fontRef>
         </p:style>
         <p:txBody>
-          <a:bodyPr rtlCol="0" anchor="ctr" wrap="square" lIns="182880" rIns="182880" tIns="137160" bIns="137160"/>
+          <a:bodyPr rtlCol="0" anchor="ctr" wrap="square" lIns="182880" rIns="182880" tIns="164592" bIns="91440"/>
           <a:lstStyle/>
           <a:p>
             <a:pPr algn="ctr">
-              <a:defRPr sz="1200">
-                <a:solidFill>
-                  <a:srgbClr val="FFFFFF"/>
+              <a:defRPr sz="1400" b="1">
+                <a:solidFill>
+                  <a:srgbClr val="3B82F6"/>
                 </a:solidFill>
                 <a:latin typeface="Calibri"/>
               </a:defRPr>
@@ -4482,25 +4979,25 @@
             <a:r>
               <a:t>Notifications</a:t>
             </a:r>
+          </a:p>
+          <a:p>
+            <a:pPr algn="ctr">
+              <a:spcBef>
+                <a:spcPts val="600"/>
+              </a:spcBef>
+              <a:defRPr sz="1100">
+                <a:solidFill>
+                  <a:srgbClr val="94A3B8"/>
+                </a:solidFill>
+                <a:latin typeface="Calibri"/>
+              </a:defRPr>
+            </a:pPr>
+            <a:r>
+              <a:t>Twilio (SMS) • SendGrid</a:t>
+            </a:r>
             <a:br/>
             <a:r>
-              <a:t>—————————</a:t>
-            </a:r>
-            <a:br/>
-            <a:r>
-              <a:t>Twilio (SMS)</a:t>
-            </a:r>
-            <a:br/>
-            <a:r>
-              <a:t>SendGrid (Email)</a:t>
-            </a:r>
-            <a:br/>
-            <a:r>
-              <a:t>EasyPost (Shipping)</a:t>
-            </a:r>
-            <a:br/>
-            <a:r>
-              <a:t>SmartyStreets (Addr)</a:t>
+              <a:t>EasyPost • SmartyStreets</a:t>
             </a:r>
           </a:p>
         </p:txBody>
@@ -4519,7 +5016,7 @@
     <p:bg>
       <p:bgPr>
         <a:solidFill>
-          <a:srgbClr val="0F172A"/>
+          <a:srgbClr val="070B15"/>
         </a:solidFill>
         <a:effectLst/>
       </p:bgPr>
@@ -4539,8 +5036,8 @@
         </p:nvSpPr>
         <p:spPr>
           <a:xfrm>
-            <a:off x="731520" y="365760"/>
-            <a:ext cx="7315200" cy="548640"/>
+            <a:off x="548640" y="365760"/>
+            <a:ext cx="5486400" cy="365760"/>
           </a:xfrm>
           <a:prstGeom prst="rect">
             <a:avLst/>
@@ -4554,29 +5051,65 @@
           <a:lstStyle/>
           <a:p>
             <a:pPr algn="l">
+              <a:defRPr sz="1300" b="0">
+                <a:solidFill>
+                  <a:srgbClr val="3B82F6"/>
+                </a:solidFill>
+                <a:latin typeface="Calibri"/>
+              </a:defRPr>
+            </a:pPr>
+            <a:r>
+              <a:t>✦  ARCHITECTURE</a:t>
+            </a:r>
+          </a:p>
+        </p:txBody>
+      </p:sp>
+      <p:sp>
+        <p:nvSpPr>
+          <p:cNvPr id="3" name="TextBox 2"/>
+          <p:cNvSpPr txBox="1"/>
+          <p:nvPr/>
+        </p:nvSpPr>
+        <p:spPr>
+          <a:xfrm>
+            <a:off x="548640" y="731520"/>
+            <a:ext cx="5486400" cy="548640"/>
+          </a:xfrm>
+          <a:prstGeom prst="rect">
+            <a:avLst/>
+          </a:prstGeom>
+          <a:noFill/>
+        </p:spPr>
+        <p:txBody>
+          <a:bodyPr wrap="square">
+            <a:spAutoFit/>
+          </a:bodyPr>
+          <a:lstStyle/>
+          <a:p>
+            <a:pPr algn="l">
               <a:defRPr sz="2800" b="1">
                 <a:solidFill>
-                  <a:srgbClr val="FFFFFF"/>
-                </a:solidFill>
-                <a:latin typeface="Calibri"/>
-              </a:defRPr>
-            </a:pPr>
-            <a:r>
-              <a:t>SYSTEM ARCHITECTURE</a:t>
-            </a:r>
-          </a:p>
-        </p:txBody>
-      </p:sp>
-      <p:sp>
-        <p:nvSpPr>
-          <p:cNvPr id="3" name="Rectangle 2"/>
+                  <a:srgbClr val="F1F5F9"/>
+                </a:solidFill>
+                <a:latin typeface="Calibri"/>
+              </a:defRPr>
+            </a:pPr>
+            <a:r>
+              <a:t>System Architecture</a:t>
+            </a:r>
+          </a:p>
+        </p:txBody>
+      </p:sp>
+      <p:sp>
+        <p:nvSpPr>
+          <p:cNvPr id="4" name="Rectangle 3"/>
           <p:cNvSpPr/>
           <p:nvPr/>
         </p:nvSpPr>
         <p:spPr>
           <a:xfrm>
-            <a:off x="731520" y="1005840"/>
-            <a:ext cx="1097280" cy="54864"/>
+            <a:off x="548640" y="1280160"/>
+            <a:ext cx="731520" cy="36576"/>
           </a:xfrm>
           <a:prstGeom prst="rect">
             <a:avLst/>
@@ -4612,20 +5145,22 @@
       </p:sp>
       <p:sp>
         <p:nvSpPr>
-          <p:cNvPr id="4" name="Rounded Rectangle 3"/>
+          <p:cNvPr id="5" name="Rounded Rectangle 4"/>
           <p:cNvSpPr/>
           <p:nvPr/>
         </p:nvSpPr>
         <p:spPr>
           <a:xfrm>
-            <a:off x="457200" y="1463040"/>
-            <a:ext cx="2560320" cy="1371600"/>
+            <a:off x="457200" y="1645920"/>
+            <a:ext cx="2651760" cy="1463040"/>
           </a:xfrm>
           <a:prstGeom prst="roundRect">
-            <a:avLst/>
+            <a:avLst>
+              <a:gd name="adj" fmla="val 4000"/>
+            </a:avLst>
           </a:prstGeom>
           <a:solidFill>
-            <a:srgbClr val="1E4073"/>
+            <a:srgbClr val="0D254A"/>
           </a:solidFill>
           <a:ln>
             <a:noFill/>
@@ -4646,30 +5181,42 @@
           </a:fontRef>
         </p:style>
         <p:txBody>
-          <a:bodyPr rtlCol="0" anchor="ctr" wrap="square" lIns="182880" rIns="182880" tIns="137160" bIns="137160"/>
+          <a:bodyPr rtlCol="0" anchor="ctr" wrap="square" lIns="182880" rIns="182880" tIns="164592" bIns="91440"/>
           <a:lstStyle/>
           <a:p>
             <a:pPr algn="ctr">
-              <a:defRPr sz="1200">
-                <a:solidFill>
-                  <a:srgbClr val="FFFFFF"/>
-                </a:solidFill>
-                <a:latin typeface="Calibri"/>
-              </a:defRPr>
-            </a:pPr>
-            <a:r>
-              <a:t>Frontend</a:t>
+              <a:defRPr sz="1400" b="1">
+                <a:solidFill>
+                  <a:srgbClr val="3B82F6"/>
+                </a:solidFill>
+                <a:latin typeface="Calibri"/>
+              </a:defRPr>
+            </a:pPr>
+            <a:r>
+              <a:t>⚛  Frontend</a:t>
+            </a:r>
+          </a:p>
+          <a:p>
+            <a:pPr algn="ctr">
+              <a:spcBef>
+                <a:spcPts val="600"/>
+              </a:spcBef>
+              <a:defRPr sz="1100">
+                <a:solidFill>
+                  <a:srgbClr val="94A3B8"/>
+                </a:solidFill>
+                <a:latin typeface="Calibri"/>
+              </a:defRPr>
+            </a:pPr>
+            <a:r>
+              <a:t>Next.js 16 • React 19</a:t>
             </a:r>
             <a:br/>
             <a:r>
-              <a:t>Next.js 16 • React 19</a:t>
+              <a:t>Tailwind CSS v4</a:t>
             </a:r>
             <a:br/>
             <a:r>
-              <a:t>Tailwind CSS v4</a:t>
-            </a:r>
-            <a:br/>
-            <a:r>
               <a:t>Port 3000</a:t>
             </a:r>
           </a:p>
@@ -4677,20 +5224,22 @@
       </p:sp>
       <p:sp>
         <p:nvSpPr>
-          <p:cNvPr id="5" name="Rounded Rectangle 4"/>
+          <p:cNvPr id="6" name="Rounded Rectangle 5"/>
           <p:cNvSpPr/>
           <p:nvPr/>
         </p:nvSpPr>
         <p:spPr>
           <a:xfrm>
-            <a:off x="3291840" y="1463040"/>
-            <a:ext cx="2560320" cy="1371600"/>
+            <a:off x="3383280" y="1645920"/>
+            <a:ext cx="2651760" cy="1463040"/>
           </a:xfrm>
           <a:prstGeom prst="roundRect">
-            <a:avLst/>
+            <a:avLst>
+              <a:gd name="adj" fmla="val 4000"/>
+            </a:avLst>
           </a:prstGeom>
           <a:solidFill>
-            <a:srgbClr val="1E4073"/>
+            <a:srgbClr val="0A2A20"/>
           </a:solidFill>
           <a:ln>
             <a:noFill/>
@@ -4711,30 +5260,42 @@
           </a:fontRef>
         </p:style>
         <p:txBody>
-          <a:bodyPr rtlCol="0" anchor="ctr" wrap="square" lIns="182880" rIns="182880" tIns="137160" bIns="137160"/>
+          <a:bodyPr rtlCol="0" anchor="ctr" wrap="square" lIns="182880" rIns="182880" tIns="164592" bIns="91440"/>
           <a:lstStyle/>
           <a:p>
             <a:pPr algn="ctr">
-              <a:defRPr sz="1200">
-                <a:solidFill>
-                  <a:srgbClr val="FFFFFF"/>
-                </a:solidFill>
-                <a:latin typeface="Calibri"/>
-              </a:defRPr>
-            </a:pPr>
-            <a:r>
-              <a:t>Backend API</a:t>
+              <a:defRPr sz="1400" b="1">
+                <a:solidFill>
+                  <a:srgbClr val="22C55E"/>
+                </a:solidFill>
+                <a:latin typeface="Calibri"/>
+              </a:defRPr>
+            </a:pPr>
+            <a:r>
+              <a:t>⚡  Backend API</a:t>
+            </a:r>
+          </a:p>
+          <a:p>
+            <a:pPr algn="ctr">
+              <a:spcBef>
+                <a:spcPts val="600"/>
+              </a:spcBef>
+              <a:defRPr sz="1100">
+                <a:solidFill>
+                  <a:srgbClr val="94A3B8"/>
+                </a:solidFill>
+                <a:latin typeface="Calibri"/>
+              </a:defRPr>
+            </a:pPr>
+            <a:r>
+              <a:t>FastAPI • Uvicorn</a:t>
             </a:r>
             <a:br/>
             <a:r>
-              <a:t>FastAPI • Uvicorn</a:t>
+              <a:t>REST + WebSocket</a:t>
             </a:r>
             <a:br/>
             <a:r>
-              <a:t>REST + WebSocket</a:t>
-            </a:r>
-            <a:br/>
-            <a:r>
               <a:t>Port 8000</a:t>
             </a:r>
           </a:p>
@@ -4742,20 +5303,22 @@
       </p:sp>
       <p:sp>
         <p:nvSpPr>
-          <p:cNvPr id="6" name="Rounded Rectangle 5"/>
+          <p:cNvPr id="7" name="Rounded Rectangle 6"/>
           <p:cNvSpPr/>
           <p:nvPr/>
         </p:nvSpPr>
         <p:spPr>
           <a:xfrm>
-            <a:off x="6126480" y="1463040"/>
-            <a:ext cx="2560320" cy="1371600"/>
+            <a:off x="6309360" y="1645920"/>
+            <a:ext cx="2651760" cy="1463040"/>
           </a:xfrm>
           <a:prstGeom prst="roundRect">
-            <a:avLst/>
+            <a:avLst>
+              <a:gd name="adj" fmla="val 4000"/>
+            </a:avLst>
           </a:prstGeom>
           <a:solidFill>
-            <a:srgbClr val="7C3AED"/>
+            <a:srgbClr val="1E0A3A"/>
           </a:solidFill>
           <a:ln>
             <a:noFill/>
@@ -4776,30 +5339,42 @@
           </a:fontRef>
         </p:style>
         <p:txBody>
-          <a:bodyPr rtlCol="0" anchor="ctr" wrap="square" lIns="182880" rIns="182880" tIns="137160" bIns="137160"/>
+          <a:bodyPr rtlCol="0" anchor="ctr" wrap="square" lIns="182880" rIns="182880" tIns="164592" bIns="91440"/>
           <a:lstStyle/>
           <a:p>
             <a:pPr algn="ctr">
-              <a:defRPr sz="1200">
-                <a:solidFill>
-                  <a:srgbClr val="FFFFFF"/>
-                </a:solidFill>
-                <a:latin typeface="Calibri"/>
-              </a:defRPr>
-            </a:pPr>
-            <a:r>
-              <a:t>AI Agents</a:t>
+              <a:defRPr sz="1400" b="1">
+                <a:solidFill>
+                  <a:srgbClr val="8B5CF6"/>
+                </a:solidFill>
+                <a:latin typeface="Calibri"/>
+              </a:defRPr>
+            </a:pPr>
+            <a:r>
+              <a:t>🤖  AI Agents</a:t>
+            </a:r>
+          </a:p>
+          <a:p>
+            <a:pPr algn="ctr">
+              <a:spcBef>
+                <a:spcPts val="600"/>
+              </a:spcBef>
+              <a:defRPr sz="1100">
+                <a:solidFill>
+                  <a:srgbClr val="94A3B8"/>
+                </a:solidFill>
+                <a:latin typeface="Calibri"/>
+              </a:defRPr>
+            </a:pPr>
+            <a:r>
+              <a:t>OpenAI Agents SDK</a:t>
             </a:r>
             <a:br/>
             <a:r>
-              <a:t>OpenAI Agents SDK</a:t>
+              <a:t>5 Specialized Agents</a:t>
             </a:r>
             <a:br/>
             <a:r>
-              <a:t>5 Specialized Agents</a:t>
-            </a:r>
-            <a:br/>
-            <a:r>
               <a:t>GPT-4o Powered</a:t>
             </a:r>
           </a:p>
@@ -4807,20 +5382,22 @@
       </p:sp>
       <p:sp>
         <p:nvSpPr>
-          <p:cNvPr id="7" name="Rounded Rectangle 6"/>
+          <p:cNvPr id="8" name="Rounded Rectangle 7"/>
           <p:cNvSpPr/>
           <p:nvPr/>
         </p:nvSpPr>
         <p:spPr>
           <a:xfrm>
-            <a:off x="8961120" y="1463040"/>
-            <a:ext cx="2560320" cy="1371600"/>
+            <a:off x="9235440" y="1645920"/>
+            <a:ext cx="2651760" cy="1463040"/>
           </a:xfrm>
           <a:prstGeom prst="roundRect">
-            <a:avLst/>
+            <a:avLst>
+              <a:gd name="adj" fmla="val 4000"/>
+            </a:avLst>
           </a:prstGeom>
           <a:solidFill>
-            <a:srgbClr val="7C3AED"/>
+            <a:srgbClr val="1E0A3A"/>
           </a:solidFill>
           <a:ln>
             <a:noFill/>
@@ -4841,30 +5418,42 @@
           </a:fontRef>
         </p:style>
         <p:txBody>
-          <a:bodyPr rtlCol="0" anchor="ctr" wrap="square" lIns="182880" rIns="182880" tIns="137160" bIns="137160"/>
+          <a:bodyPr rtlCol="0" anchor="ctr" wrap="square" lIns="182880" rIns="182880" tIns="164592" bIns="91440"/>
           <a:lstStyle/>
           <a:p>
             <a:pPr algn="ctr">
-              <a:defRPr sz="1200">
-                <a:solidFill>
-                  <a:srgbClr val="FFFFFF"/>
-                </a:solidFill>
-                <a:latin typeface="Calibri"/>
-              </a:defRPr>
-            </a:pPr>
-            <a:r>
-              <a:t>Vector DB</a:t>
+              <a:defRPr sz="1400" b="1">
+                <a:solidFill>
+                  <a:srgbClr val="8B5CF6"/>
+                </a:solidFill>
+                <a:latin typeface="Calibri"/>
+              </a:defRPr>
+            </a:pPr>
+            <a:r>
+              <a:t>🗄  Vector DB</a:t>
+            </a:r>
+          </a:p>
+          <a:p>
+            <a:pPr algn="ctr">
+              <a:spcBef>
+                <a:spcPts val="600"/>
+              </a:spcBef>
+              <a:defRPr sz="1100">
+                <a:solidFill>
+                  <a:srgbClr val="94A3B8"/>
+                </a:solidFill>
+                <a:latin typeface="Calibri"/>
+              </a:defRPr>
+            </a:pPr>
+            <a:r>
+              <a:t>Qdrant</a:t>
             </a:r>
             <a:br/>
             <a:r>
-              <a:t>Qdrant</a:t>
+              <a:t>4 Collections</a:t>
             </a:r>
             <a:br/>
             <a:r>
-              <a:t>4 Collections</a:t>
-            </a:r>
-            <a:br/>
-            <a:r>
               <a:t>1536-dim Vectors</a:t>
             </a:r>
           </a:p>
@@ -4872,20 +5461,22 @@
       </p:sp>
       <p:sp>
         <p:nvSpPr>
-          <p:cNvPr id="8" name="Rounded Rectangle 7"/>
+          <p:cNvPr id="9" name="Rounded Rectangle 8"/>
           <p:cNvSpPr/>
           <p:nvPr/>
         </p:nvSpPr>
         <p:spPr>
           <a:xfrm>
-            <a:off x="457200" y="3200400"/>
-            <a:ext cx="2560320" cy="1371600"/>
+            <a:off x="457200" y="3383280"/>
+            <a:ext cx="2651760" cy="1463040"/>
           </a:xfrm>
           <a:prstGeom prst="roundRect">
-            <a:avLst/>
+            <a:avLst>
+              <a:gd name="adj" fmla="val 4000"/>
+            </a:avLst>
           </a:prstGeom>
           <a:solidFill>
-            <a:srgbClr val="065F46"/>
+            <a:srgbClr val="0A2A20"/>
           </a:solidFill>
           <a:ln>
             <a:noFill/>
@@ -4906,30 +5497,42 @@
           </a:fontRef>
         </p:style>
         <p:txBody>
-          <a:bodyPr rtlCol="0" anchor="ctr" wrap="square" lIns="182880" rIns="182880" tIns="137160" bIns="137160"/>
+          <a:bodyPr rtlCol="0" anchor="ctr" wrap="square" lIns="182880" rIns="182880" tIns="164592" bIns="91440"/>
           <a:lstStyle/>
           <a:p>
             <a:pPr algn="ctr">
-              <a:defRPr sz="1200">
-                <a:solidFill>
-                  <a:srgbClr val="FFFFFF"/>
-                </a:solidFill>
-                <a:latin typeface="Calibri"/>
-              </a:defRPr>
-            </a:pPr>
-            <a:r>
-              <a:t>PostgreSQL 16</a:t>
+              <a:defRPr sz="1400" b="1">
+                <a:solidFill>
+                  <a:srgbClr val="22C55E"/>
+                </a:solidFill>
+                <a:latin typeface="Calibri"/>
+              </a:defRPr>
+            </a:pPr>
+            <a:r>
+              <a:t>🗃  PostgreSQL 16</a:t>
+            </a:r>
+          </a:p>
+          <a:p>
+            <a:pPr algn="ctr">
+              <a:spcBef>
+                <a:spcPts val="600"/>
+              </a:spcBef>
+              <a:defRPr sz="1100">
+                <a:solidFill>
+                  <a:srgbClr val="94A3B8"/>
+                </a:solidFill>
+                <a:latin typeface="Calibri"/>
+              </a:defRPr>
+            </a:pPr>
+            <a:r>
+              <a:t>Relational DB</a:t>
             </a:r>
             <a:br/>
             <a:r>
-              <a:t>Relational DB</a:t>
+              <a:t>Orders, Shipments</a:t>
             </a:r>
             <a:br/>
             <a:r>
-              <a:t>Orders, Shipments</a:t>
-            </a:r>
-            <a:br/>
-            <a:r>
               <a:t>Fulfillment Centers</a:t>
             </a:r>
           </a:p>
@@ -4937,20 +5540,22 @@
       </p:sp>
       <p:sp>
         <p:nvSpPr>
-          <p:cNvPr id="9" name="Rounded Rectangle 8"/>
+          <p:cNvPr id="10" name="Rounded Rectangle 9"/>
           <p:cNvSpPr/>
           <p:nvPr/>
         </p:nvSpPr>
         <p:spPr>
           <a:xfrm>
-            <a:off x="3291840" y="3200400"/>
-            <a:ext cx="2560320" cy="1371600"/>
+            <a:off x="3383280" y="3383280"/>
+            <a:ext cx="2651760" cy="1463040"/>
           </a:xfrm>
           <a:prstGeom prst="roundRect">
-            <a:avLst/>
+            <a:avLst>
+              <a:gd name="adj" fmla="val 4000"/>
+            </a:avLst>
           </a:prstGeom>
           <a:solidFill>
-            <a:srgbClr val="065F46"/>
+            <a:srgbClr val="0A2A20"/>
           </a:solidFill>
           <a:ln>
             <a:noFill/>
@@ -4971,30 +5576,42 @@
           </a:fontRef>
         </p:style>
         <p:txBody>
-          <a:bodyPr rtlCol="0" anchor="ctr" wrap="square" lIns="182880" rIns="182880" tIns="137160" bIns="137160"/>
+          <a:bodyPr rtlCol="0" anchor="ctr" wrap="square" lIns="182880" rIns="182880" tIns="164592" bIns="91440"/>
           <a:lstStyle/>
           <a:p>
             <a:pPr algn="ctr">
-              <a:defRPr sz="1200">
-                <a:solidFill>
-                  <a:srgbClr val="FFFFFF"/>
-                </a:solidFill>
-                <a:latin typeface="Calibri"/>
-              </a:defRPr>
-            </a:pPr>
-            <a:r>
-              <a:t>Redis 7</a:t>
+              <a:defRPr sz="1400" b="1">
+                <a:solidFill>
+                  <a:srgbClr val="22C55E"/>
+                </a:solidFill>
+                <a:latin typeface="Calibri"/>
+              </a:defRPr>
+            </a:pPr>
+            <a:r>
+              <a:t>📦  Redis 7</a:t>
+            </a:r>
+          </a:p>
+          <a:p>
+            <a:pPr algn="ctr">
+              <a:spcBef>
+                <a:spcPts val="600"/>
+              </a:spcBef>
+              <a:defRPr sz="1100">
+                <a:solidFill>
+                  <a:srgbClr val="94A3B8"/>
+                </a:solidFill>
+                <a:latin typeface="Calibri"/>
+              </a:defRPr>
+            </a:pPr>
+            <a:r>
+              <a:t>Message Broker</a:t>
             </a:r>
             <a:br/>
             <a:r>
-              <a:t>Message Broker</a:t>
+              <a:t>Celery Backend</a:t>
             </a:r>
             <a:br/>
             <a:r>
-              <a:t>Celery Backend</a:t>
-            </a:r>
-            <a:br/>
-            <a:r>
               <a:t>Cache Layer</a:t>
             </a:r>
           </a:p>
@@ -5002,20 +5619,22 @@
       </p:sp>
       <p:sp>
         <p:nvSpPr>
-          <p:cNvPr id="10" name="Rounded Rectangle 9"/>
+          <p:cNvPr id="11" name="Rounded Rectangle 10"/>
           <p:cNvSpPr/>
           <p:nvPr/>
         </p:nvSpPr>
         <p:spPr>
           <a:xfrm>
-            <a:off x="6126480" y="3200400"/>
-            <a:ext cx="2560320" cy="1371600"/>
+            <a:off x="6309360" y="3383280"/>
+            <a:ext cx="2651760" cy="1463040"/>
           </a:xfrm>
           <a:prstGeom prst="roundRect">
-            <a:avLst/>
+            <a:avLst>
+              <a:gd name="adj" fmla="val 4000"/>
+            </a:avLst>
           </a:prstGeom>
           <a:solidFill>
-            <a:srgbClr val="065F46"/>
+            <a:srgbClr val="2A1A0A"/>
           </a:solidFill>
           <a:ln>
             <a:noFill/>
@@ -5036,30 +5655,42 @@
           </a:fontRef>
         </p:style>
         <p:txBody>
-          <a:bodyPr rtlCol="0" anchor="ctr" wrap="square" lIns="182880" rIns="182880" tIns="137160" bIns="137160"/>
+          <a:bodyPr rtlCol="0" anchor="ctr" wrap="square" lIns="182880" rIns="182880" tIns="164592" bIns="91440"/>
           <a:lstStyle/>
           <a:p>
             <a:pPr algn="ctr">
-              <a:defRPr sz="1200">
-                <a:solidFill>
-                  <a:srgbClr val="FFFFFF"/>
-                </a:solidFill>
-                <a:latin typeface="Calibri"/>
-              </a:defRPr>
-            </a:pPr>
-            <a:r>
-              <a:t>Celery Workers</a:t>
+              <a:defRPr sz="1400" b="1">
+                <a:solidFill>
+                  <a:srgbClr val="F59E0B"/>
+                </a:solidFill>
+                <a:latin typeface="Calibri"/>
+              </a:defRPr>
+            </a:pPr>
+            <a:r>
+              <a:t>🔄  Celery Workers</a:t>
+            </a:r>
+          </a:p>
+          <a:p>
+            <a:pPr algn="ctr">
+              <a:spcBef>
+                <a:spcPts val="600"/>
+              </a:spcBef>
+              <a:defRPr sz="1100">
+                <a:solidFill>
+                  <a:srgbClr val="94A3B8"/>
+                </a:solidFill>
+                <a:latin typeface="Calibri"/>
+              </a:defRPr>
+            </a:pPr>
+            <a:r>
+              <a:t>Async Tasks</a:t>
             </a:r>
             <a:br/>
             <a:r>
-              <a:t>Async Tasks</a:t>
+              <a:t>Monitor Cycles</a:t>
             </a:r>
             <a:br/>
             <a:r>
-              <a:t>Monitor Cycles</a:t>
-            </a:r>
-            <a:br/>
-            <a:r>
               <a:t>Background Jobs</a:t>
             </a:r>
           </a:p>
@@ -5067,20 +5698,22 @@
       </p:sp>
       <p:sp>
         <p:nvSpPr>
-          <p:cNvPr id="11" name="Rounded Rectangle 10"/>
+          <p:cNvPr id="12" name="Rounded Rectangle 11"/>
           <p:cNvSpPr/>
           <p:nvPr/>
         </p:nvSpPr>
         <p:spPr>
           <a:xfrm>
-            <a:off x="8961120" y="3200400"/>
-            <a:ext cx="2560320" cy="1371600"/>
+            <a:off x="9235440" y="3383280"/>
+            <a:ext cx="2651760" cy="1463040"/>
           </a:xfrm>
           <a:prstGeom prst="roundRect">
-            <a:avLst/>
+            <a:avLst>
+              <a:gd name="adj" fmla="val 4000"/>
+            </a:avLst>
           </a:prstGeom>
           <a:solidFill>
-            <a:srgbClr val="781A0F"/>
+            <a:srgbClr val="2A0A0A"/>
           </a:solidFill>
           <a:ln>
             <a:noFill/>
@@ -5101,30 +5734,42 @@
           </a:fontRef>
         </p:style>
         <p:txBody>
-          <a:bodyPr rtlCol="0" anchor="ctr" wrap="square" lIns="182880" rIns="182880" tIns="137160" bIns="137160"/>
+          <a:bodyPr rtlCol="0" anchor="ctr" wrap="square" lIns="182880" rIns="182880" tIns="164592" bIns="91440"/>
           <a:lstStyle/>
           <a:p>
             <a:pPr algn="ctr">
-              <a:defRPr sz="1200">
-                <a:solidFill>
-                  <a:srgbClr val="FFFFFF"/>
-                </a:solidFill>
-                <a:latin typeface="Calibri"/>
-              </a:defRPr>
-            </a:pPr>
-            <a:r>
-              <a:t>External APIs</a:t>
+              <a:defRPr sz="1400" b="1">
+                <a:solidFill>
+                  <a:srgbClr val="EF4444"/>
+                </a:solidFill>
+                <a:latin typeface="Calibri"/>
+              </a:defRPr>
+            </a:pPr>
+            <a:r>
+              <a:t>🌐  External APIs</a:t>
+            </a:r>
+          </a:p>
+          <a:p>
+            <a:pPr algn="ctr">
+              <a:spcBef>
+                <a:spcPts val="600"/>
+              </a:spcBef>
+              <a:defRPr sz="1100">
+                <a:solidFill>
+                  <a:srgbClr val="94A3B8"/>
+                </a:solidFill>
+                <a:latin typeface="Calibri"/>
+              </a:defRPr>
+            </a:pPr>
+            <a:r>
+              <a:t>Twilio • SendGrid</a:t>
             </a:r>
             <a:br/>
             <a:r>
-              <a:t>Twilio • SendGrid</a:t>
+              <a:t>OpenAI • EasyPost</a:t>
             </a:r>
             <a:br/>
             <a:r>
-              <a:t>OpenAI • EasyPost</a:t>
-            </a:r>
-            <a:br/>
-            <a:r>
               <a:t>SmartyStreets</a:t>
             </a:r>
           </a:p>
@@ -5132,14 +5777,14 @@
       </p:sp>
       <p:sp>
         <p:nvSpPr>
-          <p:cNvPr id="12" name="TextBox 11"/>
+          <p:cNvPr id="13" name="TextBox 12"/>
           <p:cNvSpPr txBox="1"/>
           <p:nvPr/>
         </p:nvSpPr>
         <p:spPr>
           <a:xfrm>
-            <a:off x="457200" y="5120640"/>
-            <a:ext cx="11430000" cy="731520"/>
+            <a:off x="457200" y="5303520"/>
+            <a:ext cx="11430000" cy="457200"/>
           </a:xfrm>
           <a:prstGeom prst="rect">
             <a:avLst/>
@@ -5153,7 +5798,7 @@
           <a:lstStyle/>
           <a:p>
             <a:pPr algn="ctr">
-              <a:defRPr sz="1400" b="0">
+              <a:defRPr sz="1300" b="0">
                 <a:solidFill>
                   <a:srgbClr val="94A3B8"/>
                 </a:solidFill>
@@ -5168,14 +5813,14 @@
       </p:sp>
       <p:sp>
         <p:nvSpPr>
-          <p:cNvPr id="13" name="TextBox 12"/>
+          <p:cNvPr id="14" name="TextBox 13"/>
           <p:cNvSpPr txBox="1"/>
           <p:nvPr/>
         </p:nvSpPr>
         <p:spPr>
           <a:xfrm>
             <a:off x="457200" y="5760720"/>
-            <a:ext cx="11430000" cy="731520"/>
+            <a:ext cx="11430000" cy="457200"/>
           </a:xfrm>
           <a:prstGeom prst="rect">
             <a:avLst/>
@@ -5189,7 +5834,7 @@
           <a:lstStyle/>
           <a:p>
             <a:pPr algn="ctr">
-              <a:defRPr sz="1400" b="0">
+              <a:defRPr sz="1300" b="0">
                 <a:solidFill>
                   <a:srgbClr val="94A3B8"/>
                 </a:solidFill>
@@ -5216,7 +5861,7 @@
     <p:bg>
       <p:bgPr>
         <a:solidFill>
-          <a:srgbClr val="F8FAFC"/>
+          <a:srgbClr val="070B15"/>
         </a:solidFill>
         <a:effectLst/>
       </p:bgPr>
@@ -5237,13 +5882,13 @@
         <p:spPr>
           <a:xfrm>
             <a:off x="0" y="0"/>
-            <a:ext cx="12191695" cy="1188720"/>
+            <a:ext cx="12191695" cy="1280160"/>
           </a:xfrm>
           <a:prstGeom prst="rect">
             <a:avLst/>
           </a:prstGeom>
           <a:solidFill>
-            <a:srgbClr val="0F172A"/>
+            <a:srgbClr val="0D1428"/>
           </a:solidFill>
           <a:ln>
             <a:noFill/>
@@ -5279,8 +5924,8 @@
         </p:nvSpPr>
         <p:spPr>
           <a:xfrm>
-            <a:off x="731520" y="320040"/>
-            <a:ext cx="9144000" cy="548640"/>
+            <a:off x="548640" y="320040"/>
+            <a:ext cx="5486400" cy="365760"/>
           </a:xfrm>
           <a:prstGeom prst="rect">
             <a:avLst/>
@@ -5294,29 +5939,65 @@
           <a:lstStyle/>
           <a:p>
             <a:pPr algn="l">
+              <a:defRPr sz="1300" b="0">
+                <a:solidFill>
+                  <a:srgbClr val="3B82F6"/>
+                </a:solidFill>
+                <a:latin typeface="Calibri"/>
+              </a:defRPr>
+            </a:pPr>
+            <a:r>
+              <a:t>✦  AGENTS</a:t>
+            </a:r>
+          </a:p>
+        </p:txBody>
+      </p:sp>
+      <p:sp>
+        <p:nvSpPr>
+          <p:cNvPr id="4" name="TextBox 3"/>
+          <p:cNvSpPr txBox="1"/>
+          <p:nvPr/>
+        </p:nvSpPr>
+        <p:spPr>
+          <a:xfrm>
+            <a:off x="548640" y="640080"/>
+            <a:ext cx="9144000" cy="548640"/>
+          </a:xfrm>
+          <a:prstGeom prst="rect">
+            <a:avLst/>
+          </a:prstGeom>
+          <a:noFill/>
+        </p:spPr>
+        <p:txBody>
+          <a:bodyPr wrap="square">
+            <a:spAutoFit/>
+          </a:bodyPr>
+          <a:lstStyle/>
+          <a:p>
+            <a:pPr algn="l">
               <a:defRPr sz="2800" b="1">
                 <a:solidFill>
-                  <a:srgbClr val="FFFFFF"/>
-                </a:solidFill>
-                <a:latin typeface="Calibri"/>
-              </a:defRPr>
-            </a:pPr>
-            <a:r>
-              <a:t>AI AGENTS ARCHITECTURE</a:t>
-            </a:r>
-          </a:p>
-        </p:txBody>
-      </p:sp>
-      <p:sp>
-        <p:nvSpPr>
-          <p:cNvPr id="4" name="Rectangle 3"/>
+                  <a:srgbClr val="F1F5F9"/>
+                </a:solidFill>
+                <a:latin typeface="Calibri"/>
+              </a:defRPr>
+            </a:pPr>
+            <a:r>
+              <a:t>AI Agents Architecture</a:t>
+            </a:r>
+          </a:p>
+        </p:txBody>
+      </p:sp>
+      <p:sp>
+        <p:nvSpPr>
+          <p:cNvPr id="5" name="Rectangle 4"/>
           <p:cNvSpPr/>
           <p:nvPr/>
         </p:nvSpPr>
         <p:spPr>
           <a:xfrm>
-            <a:off x="731520" y="960120"/>
-            <a:ext cx="1097280" cy="54864"/>
+            <a:off x="548640" y="1097280"/>
+            <a:ext cx="731520" cy="36576"/>
           </a:xfrm>
           <a:prstGeom prst="rect">
             <a:avLst/>
@@ -5352,14 +6033,14 @@
       </p:sp>
       <p:sp>
         <p:nvSpPr>
-          <p:cNvPr id="5" name="Rectangle 4"/>
+          <p:cNvPr id="6" name="Rectangle 5"/>
           <p:cNvSpPr/>
           <p:nvPr/>
         </p:nvSpPr>
         <p:spPr>
           <a:xfrm>
             <a:off x="457200" y="1554480"/>
-            <a:ext cx="73152" cy="548640"/>
+            <a:ext cx="54864" cy="502920"/>
           </a:xfrm>
           <a:prstGeom prst="rect">
             <a:avLst/>
@@ -5395,14 +6076,14 @@
       </p:sp>
       <p:sp>
         <p:nvSpPr>
-          <p:cNvPr id="6" name="TextBox 5"/>
+          <p:cNvPr id="7" name="TextBox 6"/>
           <p:cNvSpPr txBox="1"/>
           <p:nvPr/>
         </p:nvSpPr>
         <p:spPr>
           <a:xfrm>
-            <a:off x="731520" y="1536192"/>
-            <a:ext cx="3200400" cy="365760"/>
+            <a:off x="731520" y="1554480"/>
+            <a:ext cx="3200400" cy="320040"/>
           </a:xfrm>
           <a:prstGeom prst="rect">
             <a:avLst/>
@@ -5418,7 +6099,7 @@
             <a:pPr algn="l">
               <a:defRPr sz="1600" b="1">
                 <a:solidFill>
-                  <a:srgbClr val="0F172A"/>
+                  <a:srgbClr val="F1F5F9"/>
                 </a:solidFill>
                 <a:latin typeface="Calibri"/>
               </a:defRPr>
@@ -5431,14 +6112,14 @@
       </p:sp>
       <p:sp>
         <p:nvSpPr>
-          <p:cNvPr id="7" name="TextBox 6"/>
+          <p:cNvPr id="8" name="TextBox 7"/>
           <p:cNvSpPr txBox="1"/>
           <p:nvPr/>
         </p:nvSpPr>
         <p:spPr>
           <a:xfrm>
-            <a:off x="4114800" y="1536192"/>
-            <a:ext cx="7498079" cy="548640"/>
+            <a:off x="4114800" y="1554480"/>
+            <a:ext cx="7498079" cy="502920"/>
           </a:xfrm>
           <a:prstGeom prst="rect">
             <a:avLst/>
@@ -5454,7 +6135,7 @@
             <a:pPr algn="l">
               <a:defRPr sz="1200" b="0">
                 <a:solidFill>
-                  <a:srgbClr val="474E63"/>
+                  <a:srgbClr val="94A3B8"/>
                 </a:solidFill>
                 <a:latin typeface="Calibri"/>
               </a:defRPr>
@@ -5467,14 +6148,14 @@
       </p:sp>
       <p:sp>
         <p:nvSpPr>
-          <p:cNvPr id="8" name="Rectangle 7"/>
+          <p:cNvPr id="9" name="Rectangle 8"/>
           <p:cNvSpPr/>
           <p:nvPr/>
         </p:nvSpPr>
         <p:spPr>
           <a:xfrm>
-            <a:off x="457200" y="2267712"/>
-            <a:ext cx="73152" cy="548640"/>
+            <a:off x="457200" y="2286000"/>
+            <a:ext cx="54864" cy="502920"/>
           </a:xfrm>
           <a:prstGeom prst="rect">
             <a:avLst/>
@@ -5510,14 +6191,14 @@
       </p:sp>
       <p:sp>
         <p:nvSpPr>
-          <p:cNvPr id="9" name="TextBox 8"/>
+          <p:cNvPr id="10" name="TextBox 9"/>
           <p:cNvSpPr txBox="1"/>
           <p:nvPr/>
         </p:nvSpPr>
         <p:spPr>
           <a:xfrm>
-            <a:off x="731520" y="2249424"/>
-            <a:ext cx="3200400" cy="365760"/>
+            <a:off x="731520" y="2286000"/>
+            <a:ext cx="3200400" cy="320040"/>
           </a:xfrm>
           <a:prstGeom prst="rect">
             <a:avLst/>
@@ -5533,7 +6214,7 @@
             <a:pPr algn="l">
               <a:defRPr sz="1600" b="1">
                 <a:solidFill>
-                  <a:srgbClr val="0F172A"/>
+                  <a:srgbClr val="F1F5F9"/>
                 </a:solidFill>
                 <a:latin typeface="Calibri"/>
               </a:defRPr>
@@ -5546,14 +6227,14 @@
       </p:sp>
       <p:sp>
         <p:nvSpPr>
-          <p:cNvPr id="10" name="TextBox 9"/>
+          <p:cNvPr id="11" name="TextBox 10"/>
           <p:cNvSpPr txBox="1"/>
           <p:nvPr/>
         </p:nvSpPr>
         <p:spPr>
           <a:xfrm>
-            <a:off x="4114800" y="2249424"/>
-            <a:ext cx="7498079" cy="548640"/>
+            <a:off x="4114800" y="2286000"/>
+            <a:ext cx="7498079" cy="502920"/>
           </a:xfrm>
           <a:prstGeom prst="rect">
             <a:avLst/>
@@ -5569,7 +6250,7 @@
             <a:pPr algn="l">
               <a:defRPr sz="1200" b="0">
                 <a:solidFill>
-                  <a:srgbClr val="474E63"/>
+                  <a:srgbClr val="94A3B8"/>
                 </a:solidFill>
                 <a:latin typeface="Calibri"/>
               </a:defRPr>
@@ -5582,14 +6263,14 @@
       </p:sp>
       <p:sp>
         <p:nvSpPr>
-          <p:cNvPr id="11" name="Rectangle 10"/>
+          <p:cNvPr id="12" name="Rectangle 11"/>
           <p:cNvSpPr/>
           <p:nvPr/>
         </p:nvSpPr>
         <p:spPr>
           <a:xfrm>
-            <a:off x="457200" y="2980944"/>
-            <a:ext cx="73152" cy="548640"/>
+            <a:off x="457200" y="3017520"/>
+            <a:ext cx="54864" cy="502920"/>
           </a:xfrm>
           <a:prstGeom prst="rect">
             <a:avLst/>
@@ -5625,14 +6306,14 @@
       </p:sp>
       <p:sp>
         <p:nvSpPr>
-          <p:cNvPr id="12" name="TextBox 11"/>
+          <p:cNvPr id="13" name="TextBox 12"/>
           <p:cNvSpPr txBox="1"/>
           <p:nvPr/>
         </p:nvSpPr>
         <p:spPr>
           <a:xfrm>
-            <a:off x="731520" y="2962656"/>
-            <a:ext cx="3200400" cy="365760"/>
+            <a:off x="731520" y="3017520"/>
+            <a:ext cx="3200400" cy="320040"/>
           </a:xfrm>
           <a:prstGeom prst="rect">
             <a:avLst/>
@@ -5648,7 +6329,7 @@
             <a:pPr algn="l">
               <a:defRPr sz="1600" b="1">
                 <a:solidFill>
-                  <a:srgbClr val="0F172A"/>
+                  <a:srgbClr val="F1F5F9"/>
                 </a:solidFill>
                 <a:latin typeface="Calibri"/>
               </a:defRPr>
@@ -5661,14 +6342,14 @@
       </p:sp>
       <p:sp>
         <p:nvSpPr>
-          <p:cNvPr id="13" name="TextBox 12"/>
+          <p:cNvPr id="14" name="TextBox 13"/>
           <p:cNvSpPr txBox="1"/>
           <p:nvPr/>
         </p:nvSpPr>
         <p:spPr>
           <a:xfrm>
-            <a:off x="4114800" y="2962656"/>
-            <a:ext cx="7498079" cy="548640"/>
+            <a:off x="4114800" y="3017520"/>
+            <a:ext cx="7498079" cy="502920"/>
           </a:xfrm>
           <a:prstGeom prst="rect">
             <a:avLst/>
@@ -5684,7 +6365,7 @@
             <a:pPr algn="l">
               <a:defRPr sz="1200" b="0">
                 <a:solidFill>
-                  <a:srgbClr val="474E63"/>
+                  <a:srgbClr val="94A3B8"/>
                 </a:solidFill>
                 <a:latin typeface="Calibri"/>
               </a:defRPr>
@@ -5697,14 +6378,14 @@
       </p:sp>
       <p:sp>
         <p:nvSpPr>
-          <p:cNvPr id="14" name="Rectangle 13"/>
+          <p:cNvPr id="15" name="Rectangle 14"/>
           <p:cNvSpPr/>
           <p:nvPr/>
         </p:nvSpPr>
         <p:spPr>
           <a:xfrm>
-            <a:off x="457200" y="3694176"/>
-            <a:ext cx="73152" cy="548640"/>
+            <a:off x="457200" y="3749040"/>
+            <a:ext cx="54864" cy="502920"/>
           </a:xfrm>
           <a:prstGeom prst="rect">
             <a:avLst/>
@@ -5740,14 +6421,14 @@
       </p:sp>
       <p:sp>
         <p:nvSpPr>
-          <p:cNvPr id="15" name="TextBox 14"/>
+          <p:cNvPr id="16" name="TextBox 15"/>
           <p:cNvSpPr txBox="1"/>
           <p:nvPr/>
         </p:nvSpPr>
         <p:spPr>
           <a:xfrm>
-            <a:off x="731520" y="3675888"/>
-            <a:ext cx="3200400" cy="365760"/>
+            <a:off x="731520" y="3749040"/>
+            <a:ext cx="3200400" cy="320040"/>
           </a:xfrm>
           <a:prstGeom prst="rect">
             <a:avLst/>
@@ -5763,7 +6444,7 @@
             <a:pPr algn="l">
               <a:defRPr sz="1600" b="1">
                 <a:solidFill>
-                  <a:srgbClr val="0F172A"/>
+                  <a:srgbClr val="F1F5F9"/>
                 </a:solidFill>
                 <a:latin typeface="Calibri"/>
               </a:defRPr>
@@ -5776,14 +6457,14 @@
       </p:sp>
       <p:sp>
         <p:nvSpPr>
-          <p:cNvPr id="16" name="TextBox 15"/>
+          <p:cNvPr id="17" name="TextBox 16"/>
           <p:cNvSpPr txBox="1"/>
           <p:nvPr/>
         </p:nvSpPr>
         <p:spPr>
           <a:xfrm>
-            <a:off x="4114800" y="3675888"/>
-            <a:ext cx="7498079" cy="548640"/>
+            <a:off x="4114800" y="3749040"/>
+            <a:ext cx="7498079" cy="502920"/>
           </a:xfrm>
           <a:prstGeom prst="rect">
             <a:avLst/>
@@ -5799,7 +6480,7 @@
             <a:pPr algn="l">
               <a:defRPr sz="1200" b="0">
                 <a:solidFill>
-                  <a:srgbClr val="474E63"/>
+                  <a:srgbClr val="94A3B8"/>
                 </a:solidFill>
                 <a:latin typeface="Calibri"/>
               </a:defRPr>
@@ -5812,14 +6493,14 @@
       </p:sp>
       <p:sp>
         <p:nvSpPr>
-          <p:cNvPr id="17" name="Rectangle 16"/>
+          <p:cNvPr id="18" name="Rectangle 17"/>
           <p:cNvSpPr/>
           <p:nvPr/>
         </p:nvSpPr>
         <p:spPr>
           <a:xfrm>
-            <a:off x="457200" y="4407408"/>
-            <a:ext cx="73152" cy="548640"/>
+            <a:off x="457200" y="4480560"/>
+            <a:ext cx="54864" cy="502920"/>
           </a:xfrm>
           <a:prstGeom prst="rect">
             <a:avLst/>
@@ -5855,14 +6536,14 @@
       </p:sp>
       <p:sp>
         <p:nvSpPr>
-          <p:cNvPr id="18" name="TextBox 17"/>
+          <p:cNvPr id="19" name="TextBox 18"/>
           <p:cNvSpPr txBox="1"/>
           <p:nvPr/>
         </p:nvSpPr>
         <p:spPr>
           <a:xfrm>
-            <a:off x="731520" y="4389120"/>
-            <a:ext cx="3200400" cy="365760"/>
+            <a:off x="731520" y="4480560"/>
+            <a:ext cx="3200400" cy="320040"/>
           </a:xfrm>
           <a:prstGeom prst="rect">
             <a:avLst/>
@@ -5878,7 +6559,7 @@
             <a:pPr algn="l">
               <a:defRPr sz="1600" b="1">
                 <a:solidFill>
-                  <a:srgbClr val="0F172A"/>
+                  <a:srgbClr val="F1F5F9"/>
                 </a:solidFill>
                 <a:latin typeface="Calibri"/>
               </a:defRPr>
@@ -5891,14 +6572,14 @@
       </p:sp>
       <p:sp>
         <p:nvSpPr>
-          <p:cNvPr id="19" name="TextBox 18"/>
+          <p:cNvPr id="20" name="TextBox 19"/>
           <p:cNvSpPr txBox="1"/>
           <p:nvPr/>
         </p:nvSpPr>
         <p:spPr>
           <a:xfrm>
-            <a:off x="4114800" y="4389120"/>
-            <a:ext cx="7498079" cy="548640"/>
+            <a:off x="4114800" y="4480560"/>
+            <a:ext cx="7498079" cy="502920"/>
           </a:xfrm>
           <a:prstGeom prst="rect">
             <a:avLst/>
@@ -5914,7 +6595,7 @@
             <a:pPr algn="l">
               <a:defRPr sz="1200" b="0">
                 <a:solidFill>
-                  <a:srgbClr val="474E63"/>
+                  <a:srgbClr val="94A3B8"/>
                 </a:solidFill>
                 <a:latin typeface="Calibri"/>
               </a:defRPr>
@@ -5927,14 +6608,14 @@
       </p:sp>
       <p:sp>
         <p:nvSpPr>
-          <p:cNvPr id="20" name="Rectangle 19"/>
+          <p:cNvPr id="21" name="Rectangle 20"/>
           <p:cNvSpPr/>
           <p:nvPr/>
         </p:nvSpPr>
         <p:spPr>
           <a:xfrm>
-            <a:off x="457200" y="5120640"/>
-            <a:ext cx="73152" cy="548640"/>
+            <a:off x="457200" y="5212080"/>
+            <a:ext cx="54864" cy="502920"/>
           </a:xfrm>
           <a:prstGeom prst="rect">
             <a:avLst/>
@@ -5970,14 +6651,14 @@
       </p:sp>
       <p:sp>
         <p:nvSpPr>
-          <p:cNvPr id="21" name="TextBox 20"/>
+          <p:cNvPr id="22" name="TextBox 21"/>
           <p:cNvSpPr txBox="1"/>
           <p:nvPr/>
         </p:nvSpPr>
         <p:spPr>
           <a:xfrm>
-            <a:off x="731520" y="5102352"/>
-            <a:ext cx="3200400" cy="365760"/>
+            <a:off x="731520" y="5212080"/>
+            <a:ext cx="3200400" cy="320040"/>
           </a:xfrm>
           <a:prstGeom prst="rect">
             <a:avLst/>
@@ -5993,7 +6674,7 @@
             <a:pPr algn="l">
               <a:defRPr sz="1600" b="1">
                 <a:solidFill>
-                  <a:srgbClr val="0F172A"/>
+                  <a:srgbClr val="F1F5F9"/>
                 </a:solidFill>
                 <a:latin typeface="Calibri"/>
               </a:defRPr>
@@ -6006,14 +6687,14 @@
       </p:sp>
       <p:sp>
         <p:nvSpPr>
-          <p:cNvPr id="22" name="TextBox 21"/>
+          <p:cNvPr id="23" name="TextBox 22"/>
           <p:cNvSpPr txBox="1"/>
           <p:nvPr/>
         </p:nvSpPr>
         <p:spPr>
           <a:xfrm>
-            <a:off x="4114800" y="5102352"/>
-            <a:ext cx="7498079" cy="548640"/>
+            <a:off x="4114800" y="5212080"/>
+            <a:ext cx="7498079" cy="502920"/>
           </a:xfrm>
           <a:prstGeom prst="rect">
             <a:avLst/>
@@ -6029,7 +6710,7 @@
             <a:pPr algn="l">
               <a:defRPr sz="1200" b="0">
                 <a:solidFill>
-                  <a:srgbClr val="474E63"/>
+                  <a:srgbClr val="94A3B8"/>
                 </a:solidFill>
                 <a:latin typeface="Calibri"/>
               </a:defRPr>
@@ -6042,14 +6723,14 @@
       </p:sp>
       <p:sp>
         <p:nvSpPr>
-          <p:cNvPr id="23" name="Rectangle 22"/>
+          <p:cNvPr id="24" name="Rectangle 23"/>
           <p:cNvSpPr/>
           <p:nvPr/>
         </p:nvSpPr>
         <p:spPr>
           <a:xfrm>
-            <a:off x="457200" y="5833872"/>
-            <a:ext cx="73152" cy="548640"/>
+            <a:off x="457200" y="5943600"/>
+            <a:ext cx="54864" cy="502920"/>
           </a:xfrm>
           <a:prstGeom prst="rect">
             <a:avLst/>
@@ -6085,14 +6766,14 @@
       </p:sp>
       <p:sp>
         <p:nvSpPr>
-          <p:cNvPr id="24" name="TextBox 23"/>
+          <p:cNvPr id="25" name="TextBox 24"/>
           <p:cNvSpPr txBox="1"/>
           <p:nvPr/>
         </p:nvSpPr>
         <p:spPr>
           <a:xfrm>
-            <a:off x="731520" y="5815584"/>
-            <a:ext cx="3200400" cy="365760"/>
+            <a:off x="731520" y="5943600"/>
+            <a:ext cx="3200400" cy="320040"/>
           </a:xfrm>
           <a:prstGeom prst="rect">
             <a:avLst/>
@@ -6108,7 +6789,7 @@
             <a:pPr algn="l">
               <a:defRPr sz="1600" b="1">
                 <a:solidFill>
-                  <a:srgbClr val="0F172A"/>
+                  <a:srgbClr val="F1F5F9"/>
                 </a:solidFill>
                 <a:latin typeface="Calibri"/>
               </a:defRPr>
@@ -6121,14 +6802,14 @@
       </p:sp>
       <p:sp>
         <p:nvSpPr>
-          <p:cNvPr id="25" name="TextBox 24"/>
+          <p:cNvPr id="26" name="TextBox 25"/>
           <p:cNvSpPr txBox="1"/>
           <p:nvPr/>
         </p:nvSpPr>
         <p:spPr>
           <a:xfrm>
-            <a:off x="4114800" y="5815584"/>
-            <a:ext cx="7498079" cy="548640"/>
+            <a:off x="4114800" y="5943600"/>
+            <a:ext cx="7498079" cy="502920"/>
           </a:xfrm>
           <a:prstGeom prst="rect">
             <a:avLst/>
@@ -6144,7 +6825,7 @@
             <a:pPr algn="l">
               <a:defRPr sz="1200" b="0">
                 <a:solidFill>
-                  <a:srgbClr val="474E63"/>
+                  <a:srgbClr val="94A3B8"/>
                 </a:solidFill>
                 <a:latin typeface="Calibri"/>
               </a:defRPr>
@@ -6169,7 +6850,7 @@
     <p:bg>
       <p:bgPr>
         <a:solidFill>
-          <a:srgbClr val="0F172A"/>
+          <a:srgbClr val="070B15"/>
         </a:solidFill>
         <a:effectLst/>
       </p:bgPr>
@@ -6189,8 +6870,8 @@
         </p:nvSpPr>
         <p:spPr>
           <a:xfrm>
-            <a:off x="731520" y="457200"/>
-            <a:ext cx="7315200" cy="548640"/>
+            <a:off x="548640" y="457200"/>
+            <a:ext cx="5486400" cy="365760"/>
           </a:xfrm>
           <a:prstGeom prst="rect">
             <a:avLst/>
@@ -6204,29 +6885,65 @@
           <a:lstStyle/>
           <a:p>
             <a:pPr algn="l">
+              <a:defRPr sz="1300" b="0">
+                <a:solidFill>
+                  <a:srgbClr val="3B82F6"/>
+                </a:solidFill>
+                <a:latin typeface="Calibri"/>
+              </a:defRPr>
+            </a:pPr>
+            <a:r>
+              <a:t>✦  SAFETY</a:t>
+            </a:r>
+          </a:p>
+        </p:txBody>
+      </p:sp>
+      <p:sp>
+        <p:nvSpPr>
+          <p:cNvPr id="3" name="TextBox 2"/>
+          <p:cNvSpPr txBox="1"/>
+          <p:nvPr/>
+        </p:nvSpPr>
+        <p:spPr>
+          <a:xfrm>
+            <a:off x="548640" y="822960"/>
+            <a:ext cx="7315200" cy="548640"/>
+          </a:xfrm>
+          <a:prstGeom prst="rect">
+            <a:avLst/>
+          </a:prstGeom>
+          <a:noFill/>
+        </p:spPr>
+        <p:txBody>
+          <a:bodyPr wrap="square">
+            <a:spAutoFit/>
+          </a:bodyPr>
+          <a:lstStyle/>
+          <a:p>
+            <a:pPr algn="l">
               <a:defRPr sz="2800" b="1">
                 <a:solidFill>
-                  <a:srgbClr val="FFFFFF"/>
-                </a:solidFill>
-                <a:latin typeface="Calibri"/>
-              </a:defRPr>
-            </a:pPr>
-            <a:r>
-              <a:t>BUSINESS GUARDRAILS</a:t>
-            </a:r>
-          </a:p>
-        </p:txBody>
-      </p:sp>
-      <p:sp>
-        <p:nvSpPr>
-          <p:cNvPr id="3" name="Rectangle 2"/>
+                  <a:srgbClr val="F1F5F9"/>
+                </a:solidFill>
+                <a:latin typeface="Calibri"/>
+              </a:defRPr>
+            </a:pPr>
+            <a:r>
+              <a:t>Business Guardrails</a:t>
+            </a:r>
+          </a:p>
+        </p:txBody>
+      </p:sp>
+      <p:sp>
+        <p:nvSpPr>
+          <p:cNvPr id="4" name="Rectangle 3"/>
           <p:cNvSpPr/>
           <p:nvPr/>
         </p:nvSpPr>
         <p:spPr>
           <a:xfrm>
-            <a:off x="731520" y="1097280"/>
-            <a:ext cx="1097280" cy="54864"/>
+            <a:off x="548640" y="1371600"/>
+            <a:ext cx="731520" cy="36576"/>
           </a:xfrm>
           <a:prstGeom prst="rect">
             <a:avLst/>
@@ -6262,14 +6979,14 @@
       </p:sp>
       <p:sp>
         <p:nvSpPr>
-          <p:cNvPr id="4" name="TextBox 3"/>
+          <p:cNvPr id="5" name="TextBox 4"/>
           <p:cNvSpPr txBox="1"/>
           <p:nvPr/>
         </p:nvSpPr>
         <p:spPr>
           <a:xfrm>
-            <a:off x="731520" y="1371600"/>
-            <a:ext cx="10058400" cy="457200"/>
+            <a:off x="548640" y="1554480"/>
+            <a:ext cx="10058400" cy="365760"/>
           </a:xfrm>
           <a:prstGeom prst="rect">
             <a:avLst/>
@@ -6291,27 +7008,29 @@
               </a:defRPr>
             </a:pPr>
             <a:r>
-              <a:t>Safety rules enforced during every monitor cycle to ensure business compliance:</a:t>
-            </a:r>
-          </a:p>
-        </p:txBody>
-      </p:sp>
-      <p:sp>
-        <p:nvSpPr>
-          <p:cNvPr id="5" name="Rounded Rectangle 4"/>
+              <a:t>Safety rules enforced during every monitor cycle to ensure business compliance</a:t>
+            </a:r>
+          </a:p>
+        </p:txBody>
+      </p:sp>
+      <p:sp>
+        <p:nvSpPr>
+          <p:cNvPr id="6" name="Rounded Rectangle 5"/>
           <p:cNvSpPr/>
           <p:nvPr/>
         </p:nvSpPr>
         <p:spPr>
           <a:xfrm>
-            <a:off x="731520" y="2103120"/>
-            <a:ext cx="3291840" cy="1645920"/>
+            <a:off x="548640" y="2103120"/>
+            <a:ext cx="3474720" cy="1645920"/>
           </a:xfrm>
           <a:prstGeom prst="roundRect">
-            <a:avLst/>
+            <a:avLst>
+              <a:gd name="adj" fmla="val 4000"/>
+            </a:avLst>
           </a:prstGeom>
           <a:solidFill>
-            <a:srgbClr val="1E293B"/>
+            <a:srgbClr val="111B2E"/>
           </a:solidFill>
           <a:ln>
             <a:noFill/>
@@ -6332,13 +7051,13 @@
           </a:fontRef>
         </p:style>
         <p:txBody>
-          <a:bodyPr rtlCol="0" anchor="ctr" wrap="square" lIns="182880" rIns="182880" tIns="137160" bIns="137160"/>
+          <a:bodyPr rtlCol="0" anchor="ctr" wrap="square" lIns="182880" rIns="182880" tIns="164592" bIns="91440"/>
           <a:lstStyle/>
           <a:p>
             <a:pPr algn="ctr">
-              <a:defRPr sz="1200">
-                <a:solidFill>
-                  <a:srgbClr val="FFFFFF"/>
+              <a:defRPr sz="1400" b="1">
+                <a:solidFill>
+                  <a:srgbClr val="3B82F6"/>
                 </a:solidFill>
                 <a:latin typeface="Calibri"/>
               </a:defRPr>
@@ -6346,29 +7065,47 @@
             <a:r>
               <a:t>🛡  SLA Compliance</a:t>
             </a:r>
+          </a:p>
+          <a:p>
+            <a:pPr algn="ctr">
+              <a:spcBef>
+                <a:spcPts val="600"/>
+              </a:spcBef>
+              <a:defRPr sz="1100">
+                <a:solidFill>
+                  <a:srgbClr val="94A3B8"/>
+                </a:solidFill>
+                <a:latin typeface="Calibri"/>
+              </a:defRPr>
+            </a:pPr>
+            <a:r>
+              <a:t>Flags shipments exceeding</a:t>
+            </a:r>
             <a:br/>
             <a:r>
-              <a:t>Flags shipments exceeding critical SLA hours thresholds</a:t>
-            </a:r>
-          </a:p>
-        </p:txBody>
-      </p:sp>
-      <p:sp>
-        <p:nvSpPr>
-          <p:cNvPr id="6" name="Rounded Rectangle 5"/>
+              <a:t>critical SLA hours thresholds</a:t>
+            </a:r>
+          </a:p>
+        </p:txBody>
+      </p:sp>
+      <p:sp>
+        <p:nvSpPr>
+          <p:cNvPr id="7" name="Rounded Rectangle 6"/>
           <p:cNvSpPr/>
           <p:nvPr/>
         </p:nvSpPr>
         <p:spPr>
           <a:xfrm>
-            <a:off x="4480559" y="2103120"/>
-            <a:ext cx="3291840" cy="1645920"/>
+            <a:off x="4389120" y="2103120"/>
+            <a:ext cx="3474720" cy="1645920"/>
           </a:xfrm>
           <a:prstGeom prst="roundRect">
-            <a:avLst/>
+            <a:avLst>
+              <a:gd name="adj" fmla="val 4000"/>
+            </a:avLst>
           </a:prstGeom>
           <a:solidFill>
-            <a:srgbClr val="1E293B"/>
+            <a:srgbClr val="111B2E"/>
           </a:solidFill>
           <a:ln>
             <a:noFill/>
@@ -6389,43 +7126,61 @@
           </a:fontRef>
         </p:style>
         <p:txBody>
-          <a:bodyPr rtlCol="0" anchor="ctr" wrap="square" lIns="182880" rIns="182880" tIns="137160" bIns="137160"/>
+          <a:bodyPr rtlCol="0" anchor="ctr" wrap="square" lIns="182880" rIns="182880" tIns="164592" bIns="91440"/>
           <a:lstStyle/>
           <a:p>
             <a:pPr algn="ctr">
-              <a:defRPr sz="1200">
-                <a:solidFill>
-                  <a:srgbClr val="FFFFFF"/>
-                </a:solidFill>
-                <a:latin typeface="Calibri"/>
-              </a:defRPr>
-            </a:pPr>
-            <a:r>
-              <a:t>🛡  Cost Cap</a:t>
+              <a:defRPr sz="1400" b="1">
+                <a:solidFill>
+                  <a:srgbClr val="3B82F6"/>
+                </a:solidFill>
+                <a:latin typeface="Calibri"/>
+              </a:defRPr>
+            </a:pPr>
+            <a:r>
+              <a:t>💰  Cost Cap</a:t>
+            </a:r>
+          </a:p>
+          <a:p>
+            <a:pPr algn="ctr">
+              <a:spcBef>
+                <a:spcPts val="600"/>
+              </a:spcBef>
+              <a:defRPr sz="1100">
+                <a:solidFill>
+                  <a:srgbClr val="94A3B8"/>
+                </a:solidFill>
+                <a:latin typeface="Calibri"/>
+              </a:defRPr>
+            </a:pPr>
+            <a:r>
+              <a:t>Prevents reroutes exceeding</a:t>
             </a:r>
             <a:br/>
             <a:r>
-              <a:t>Prevents reroutes exceeding maximum allowed cost increase percentage</a:t>
-            </a:r>
-          </a:p>
-        </p:txBody>
-      </p:sp>
-      <p:sp>
-        <p:nvSpPr>
-          <p:cNvPr id="7" name="Rounded Rectangle 6"/>
+              <a:t>max allowed cost increase %</a:t>
+            </a:r>
+          </a:p>
+        </p:txBody>
+      </p:sp>
+      <p:sp>
+        <p:nvSpPr>
+          <p:cNvPr id="8" name="Rounded Rectangle 7"/>
           <p:cNvSpPr/>
           <p:nvPr/>
         </p:nvSpPr>
         <p:spPr>
           <a:xfrm>
             <a:off x="8229600" y="2103120"/>
-            <a:ext cx="3291840" cy="1645920"/>
+            <a:ext cx="3474720" cy="1645920"/>
           </a:xfrm>
           <a:prstGeom prst="roundRect">
-            <a:avLst/>
+            <a:avLst>
+              <a:gd name="adj" fmla="val 4000"/>
+            </a:avLst>
           </a:prstGeom>
           <a:solidFill>
-            <a:srgbClr val="1E293B"/>
+            <a:srgbClr val="111B2E"/>
           </a:solidFill>
           <a:ln>
             <a:noFill/>
@@ -6446,43 +7201,61 @@
           </a:fontRef>
         </p:style>
         <p:txBody>
-          <a:bodyPr rtlCol="0" anchor="ctr" wrap="square" lIns="182880" rIns="182880" tIns="137160" bIns="137160"/>
+          <a:bodyPr rtlCol="0" anchor="ctr" wrap="square" lIns="182880" rIns="182880" tIns="164592" bIns="91440"/>
           <a:lstStyle/>
           <a:p>
             <a:pPr algn="ctr">
-              <a:defRPr sz="1200">
-                <a:solidFill>
-                  <a:srgbClr val="FFFFFF"/>
-                </a:solidFill>
-                <a:latin typeface="Calibri"/>
-              </a:defRPr>
-            </a:pPr>
-            <a:r>
-              <a:t>🛡  Notification Frequency</a:t>
+              <a:defRPr sz="1400" b="1">
+                <a:solidFill>
+                  <a:srgbClr val="3B82F6"/>
+                </a:solidFill>
+                <a:latin typeface="Calibri"/>
+              </a:defRPr>
+            </a:pPr>
+            <a:r>
+              <a:t>🔕  Notification Frequency</a:t>
+            </a:r>
+          </a:p>
+          <a:p>
+            <a:pPr algn="ctr">
+              <a:spcBef>
+                <a:spcPts val="600"/>
+              </a:spcBef>
+              <a:defRPr sz="1100">
+                <a:solidFill>
+                  <a:srgbClr val="94A3B8"/>
+                </a:solidFill>
+                <a:latin typeface="Calibri"/>
+              </a:defRPr>
+            </a:pPr>
+            <a:r>
+              <a:t>Limits notifications per order</a:t>
             </a:r>
             <a:br/>
             <a:r>
-              <a:t>Limits notifications per order to avoid spam</a:t>
-            </a:r>
-          </a:p>
-        </p:txBody>
-      </p:sp>
-      <p:sp>
-        <p:nvSpPr>
-          <p:cNvPr id="8" name="Rounded Rectangle 7"/>
+              <a:t>to avoid spam (max 4)</a:t>
+            </a:r>
+          </a:p>
+        </p:txBody>
+      </p:sp>
+      <p:sp>
+        <p:nvSpPr>
+          <p:cNvPr id="9" name="Rounded Rectangle 8"/>
           <p:cNvSpPr/>
           <p:nvPr/>
         </p:nvSpPr>
         <p:spPr>
           <a:xfrm>
-            <a:off x="731520" y="4206240"/>
-            <a:ext cx="3291840" cy="1645920"/>
+            <a:off x="548640" y="4206240"/>
+            <a:ext cx="3474720" cy="1645920"/>
           </a:xfrm>
           <a:prstGeom prst="roundRect">
-            <a:avLst/>
+            <a:avLst>
+              <a:gd name="adj" fmla="val 4000"/>
+            </a:avLst>
           </a:prstGeom>
           <a:solidFill>
-            <a:srgbClr val="1E293B"/>
+            <a:srgbClr val="111B2E"/>
           </a:solidFill>
           <a:ln>
             <a:noFill/>
@@ -6503,43 +7276,61 @@
           </a:fontRef>
         </p:style>
         <p:txBody>
-          <a:bodyPr rtlCol="0" anchor="ctr" wrap="square" lIns="182880" rIns="182880" tIns="137160" bIns="137160"/>
+          <a:bodyPr rtlCol="0" anchor="ctr" wrap="square" lIns="182880" rIns="182880" tIns="164592" bIns="91440"/>
           <a:lstStyle/>
           <a:p>
             <a:pPr algn="ctr">
-              <a:defRPr sz="1200">
-                <a:solidFill>
-                  <a:srgbClr val="FFFFFF"/>
-                </a:solidFill>
-                <a:latin typeface="Calibri"/>
-              </a:defRPr>
-            </a:pPr>
-            <a:r>
-              <a:t>🛡  Failed Delivery Threshold</a:t>
+              <a:defRPr sz="1400" b="1">
+                <a:solidFill>
+                  <a:srgbClr val="3B82F6"/>
+                </a:solidFill>
+                <a:latin typeface="Calibri"/>
+              </a:defRPr>
+            </a:pPr>
+            <a:r>
+              <a:t>⚠  Failed Delivery Threshold</a:t>
+            </a:r>
+          </a:p>
+          <a:p>
+            <a:pPr algn="ctr">
+              <a:spcBef>
+                <a:spcPts val="600"/>
+              </a:spcBef>
+              <a:defRPr sz="1100">
+                <a:solidFill>
+                  <a:srgbClr val="94A3B8"/>
+                </a:solidFill>
+                <a:latin typeface="Calibri"/>
+              </a:defRPr>
+            </a:pPr>
+            <a:r>
+              <a:t>Flags shipments exceeding</a:t>
             </a:r>
             <a:br/>
             <a:r>
-              <a:t>Flags shipments exceeding overdue delivery threshold</a:t>
-            </a:r>
-          </a:p>
-        </p:txBody>
-      </p:sp>
-      <p:sp>
-        <p:nvSpPr>
-          <p:cNvPr id="9" name="Rounded Rectangle 8"/>
+              <a:t>overdue delivery threshold</a:t>
+            </a:r>
+          </a:p>
+        </p:txBody>
+      </p:sp>
+      <p:sp>
+        <p:nvSpPr>
+          <p:cNvPr id="10" name="Rounded Rectangle 9"/>
           <p:cNvSpPr/>
           <p:nvPr/>
         </p:nvSpPr>
         <p:spPr>
           <a:xfrm>
-            <a:off x="4480559" y="4206240"/>
-            <a:ext cx="3291840" cy="1645920"/>
+            <a:off x="4389120" y="4206240"/>
+            <a:ext cx="3474720" cy="1645920"/>
           </a:xfrm>
           <a:prstGeom prst="roundRect">
-            <a:avLst/>
+            <a:avLst>
+              <a:gd name="adj" fmla="val 4000"/>
+            </a:avLst>
           </a:prstGeom>
           <a:solidFill>
-            <a:srgbClr val="1E293B"/>
+            <a:srgbClr val="111B2E"/>
           </a:solidFill>
           <a:ln>
             <a:noFill/>
@@ -6560,43 +7351,61 @@
           </a:fontRef>
         </p:style>
         <p:txBody>
-          <a:bodyPr rtlCol="0" anchor="ctr" wrap="square" lIns="182880" rIns="182880" tIns="137160" bIns="137160"/>
+          <a:bodyPr rtlCol="0" anchor="ctr" wrap="square" lIns="182880" rIns="182880" tIns="164592" bIns="91440"/>
           <a:lstStyle/>
           <a:p>
             <a:pPr algn="ctr">
-              <a:defRPr sz="1200">
-                <a:solidFill>
-                  <a:srgbClr val="FFFFFF"/>
-                </a:solidFill>
-                <a:latin typeface="Calibri"/>
-              </a:defRPr>
-            </a:pPr>
-            <a:r>
-              <a:t>🛡  Carrier Diversity</a:t>
+              <a:defRPr sz="1400" b="1">
+                <a:solidFill>
+                  <a:srgbClr val="3B82F6"/>
+                </a:solidFill>
+                <a:latin typeface="Calibri"/>
+              </a:defRPr>
+            </a:pPr>
+            <a:r>
+              <a:t>🔀  Carrier Diversity</a:t>
+            </a:r>
+          </a:p>
+          <a:p>
+            <a:pPr algn="ctr">
+              <a:spcBef>
+                <a:spcPts val="600"/>
+              </a:spcBef>
+              <a:defRPr sz="1100">
+                <a:solidFill>
+                  <a:srgbClr val="94A3B8"/>
+                </a:solidFill>
+                <a:latin typeface="Calibri"/>
+              </a:defRPr>
+            </a:pPr>
+            <a:r>
+              <a:t>Prevents switching to same</a:t>
             </a:r>
             <a:br/>
             <a:r>
-              <a:t>Prevents switching to same/similar monopoly carriers</a:t>
-            </a:r>
-          </a:p>
-        </p:txBody>
-      </p:sp>
-      <p:sp>
-        <p:nvSpPr>
-          <p:cNvPr id="10" name="Rounded Rectangle 9"/>
+              <a:t>monopoly carriers (&gt;70% vol)</a:t>
+            </a:r>
+          </a:p>
+        </p:txBody>
+      </p:sp>
+      <p:sp>
+        <p:nvSpPr>
+          <p:cNvPr id="11" name="Rounded Rectangle 10"/>
           <p:cNvSpPr/>
           <p:nvPr/>
         </p:nvSpPr>
         <p:spPr>
           <a:xfrm>
             <a:off x="8229600" y="4206240"/>
-            <a:ext cx="3291840" cy="1645920"/>
+            <a:ext cx="3474720" cy="1645920"/>
           </a:xfrm>
           <a:prstGeom prst="roundRect">
-            <a:avLst/>
+            <a:avLst>
+              <a:gd name="adj" fmla="val 4000"/>
+            </a:avLst>
           </a:prstGeom>
           <a:solidFill>
-            <a:srgbClr val="1E293B"/>
+            <a:srgbClr val="111B2E"/>
           </a:solidFill>
           <a:ln>
             <a:noFill/>
@@ -6617,37 +7426,53 @@
           </a:fontRef>
         </p:style>
         <p:txBody>
-          <a:bodyPr rtlCol="0" anchor="ctr" wrap="square" lIns="182880" rIns="182880" tIns="137160" bIns="137160"/>
+          <a:bodyPr rtlCol="0" anchor="ctr" wrap="square" lIns="182880" rIns="182880" tIns="164592" bIns="91440"/>
           <a:lstStyle/>
           <a:p>
             <a:pPr algn="ctr">
-              <a:defRPr sz="1200">
-                <a:solidFill>
-                  <a:srgbClr val="FFFFFF"/>
-                </a:solidFill>
-                <a:latin typeface="Calibri"/>
-              </a:defRPr>
-            </a:pPr>
-            <a:r>
-              <a:t>🛡  Address Validation</a:t>
+              <a:defRPr sz="1400" b="1">
+                <a:solidFill>
+                  <a:srgbClr val="3B82F6"/>
+                </a:solidFill>
+                <a:latin typeface="Calibri"/>
+              </a:defRPr>
+            </a:pPr>
+            <a:r>
+              <a:t>📍  Address Validation</a:t>
+            </a:r>
+          </a:p>
+          <a:p>
+            <a:pPr algn="ctr">
+              <a:spcBef>
+                <a:spcPts val="600"/>
+              </a:spcBef>
+              <a:defRPr sz="1100">
+                <a:solidFill>
+                  <a:srgbClr val="94A3B8"/>
+                </a:solidFill>
+                <a:latin typeface="Calibri"/>
+              </a:defRPr>
+            </a:pPr>
+            <a:r>
+              <a:t>Validates address format,</a:t>
             </a:r>
             <a:br/>
             <a:r>
-              <a:t>Validates address format, ZIP code, and street indicators</a:t>
-            </a:r>
-          </a:p>
-        </p:txBody>
-      </p:sp>
-      <p:sp>
-        <p:nvSpPr>
-          <p:cNvPr id="11" name="TextBox 10"/>
+              <a:t>ZIP code, and street indicators</a:t>
+            </a:r>
+          </a:p>
+        </p:txBody>
+      </p:sp>
+      <p:sp>
+        <p:nvSpPr>
+          <p:cNvPr id="12" name="TextBox 11"/>
           <p:cNvSpPr txBox="1"/>
           <p:nvPr/>
         </p:nvSpPr>
         <p:spPr>
           <a:xfrm>
-            <a:off x="731520" y="6035040"/>
-            <a:ext cx="10058400" cy="457200"/>
+            <a:off x="548640" y="6126480"/>
+            <a:ext cx="10972800" cy="365760"/>
           </a:xfrm>
           <a:prstGeom prst="rect">
             <a:avLst/>
@@ -6660,10 +7485,10 @@
           </a:bodyPr>
           <a:lstStyle/>
           <a:p>
-            <a:pPr algn="l">
-              <a:defRPr sz="1300" b="0">
-                <a:solidFill>
-                  <a:srgbClr val="94A3B8"/>
+            <a:pPr algn="ctr">
+              <a:defRPr sz="1200" b="0">
+                <a:solidFill>
+                  <a:srgbClr val="475669"/>
                 </a:solidFill>
                 <a:latin typeface="Calibri"/>
               </a:defRPr>
@@ -6688,7 +7513,7 @@
     <p:bg>
       <p:bgPr>
         <a:solidFill>
-          <a:srgbClr val="F8FAFC"/>
+          <a:srgbClr val="070B15"/>
         </a:solidFill>
         <a:effectLst/>
       </p:bgPr>
@@ -6709,13 +7534,13 @@
         <p:spPr>
           <a:xfrm>
             <a:off x="0" y="0"/>
-            <a:ext cx="12191695" cy="1188720"/>
+            <a:ext cx="12191695" cy="1280160"/>
           </a:xfrm>
           <a:prstGeom prst="rect">
             <a:avLst/>
           </a:prstGeom>
           <a:solidFill>
-            <a:srgbClr val="0F172A"/>
+            <a:srgbClr val="0D1428"/>
           </a:solidFill>
           <a:ln>
             <a:noFill/>
@@ -6751,8 +7576,8 @@
         </p:nvSpPr>
         <p:spPr>
           <a:xfrm>
-            <a:off x="731520" y="320040"/>
-            <a:ext cx="9144000" cy="548640"/>
+            <a:off x="548640" y="320040"/>
+            <a:ext cx="5486400" cy="365760"/>
           </a:xfrm>
           <a:prstGeom prst="rect">
             <a:avLst/>
@@ -6766,29 +7591,65 @@
           <a:lstStyle/>
           <a:p>
             <a:pPr algn="l">
+              <a:defRPr sz="1300" b="0">
+                <a:solidFill>
+                  <a:srgbClr val="3B82F6"/>
+                </a:solidFill>
+                <a:latin typeface="Calibri"/>
+              </a:defRPr>
+            </a:pPr>
+            <a:r>
+              <a:t>✦  UI</a:t>
+            </a:r>
+          </a:p>
+        </p:txBody>
+      </p:sp>
+      <p:sp>
+        <p:nvSpPr>
+          <p:cNvPr id="4" name="TextBox 3"/>
+          <p:cNvSpPr txBox="1"/>
+          <p:nvPr/>
+        </p:nvSpPr>
+        <p:spPr>
+          <a:xfrm>
+            <a:off x="548640" y="640080"/>
+            <a:ext cx="9144000" cy="548640"/>
+          </a:xfrm>
+          <a:prstGeom prst="rect">
+            <a:avLst/>
+          </a:prstGeom>
+          <a:noFill/>
+        </p:spPr>
+        <p:txBody>
+          <a:bodyPr wrap="square">
+            <a:spAutoFit/>
+          </a:bodyPr>
+          <a:lstStyle/>
+          <a:p>
+            <a:pPr algn="l">
               <a:defRPr sz="2800" b="1">
                 <a:solidFill>
-                  <a:srgbClr val="FFFFFF"/>
-                </a:solidFill>
-                <a:latin typeface="Calibri"/>
-              </a:defRPr>
-            </a:pPr>
-            <a:r>
-              <a:t>FRONTEND HIGHLIGHTS</a:t>
-            </a:r>
-          </a:p>
-        </p:txBody>
-      </p:sp>
-      <p:sp>
-        <p:nvSpPr>
-          <p:cNvPr id="4" name="Rectangle 3"/>
+                  <a:srgbClr val="F1F5F9"/>
+                </a:solidFill>
+                <a:latin typeface="Calibri"/>
+              </a:defRPr>
+            </a:pPr>
+            <a:r>
+              <a:t>Frontend Highlights</a:t>
+            </a:r>
+          </a:p>
+        </p:txBody>
+      </p:sp>
+      <p:sp>
+        <p:nvSpPr>
+          <p:cNvPr id="5" name="Rectangle 4"/>
           <p:cNvSpPr/>
           <p:nvPr/>
         </p:nvSpPr>
         <p:spPr>
           <a:xfrm>
-            <a:off x="731520" y="960120"/>
-            <a:ext cx="1097280" cy="54864"/>
+            <a:off x="548640" y="1097280"/>
+            <a:ext cx="731520" cy="36576"/>
           </a:xfrm>
           <a:prstGeom prst="rect">
             <a:avLst/>
@@ -6824,20 +7685,22 @@
       </p:sp>
       <p:sp>
         <p:nvSpPr>
-          <p:cNvPr id="5" name="Rounded Rectangle 4"/>
+          <p:cNvPr id="6" name="Rounded Rectangle 5"/>
           <p:cNvSpPr/>
           <p:nvPr/>
         </p:nvSpPr>
         <p:spPr>
           <a:xfrm>
-            <a:off x="457200" y="1463040"/>
-            <a:ext cx="2560320" cy="2103120"/>
+            <a:off x="457200" y="1554480"/>
+            <a:ext cx="2651760" cy="2194560"/>
           </a:xfrm>
           <a:prstGeom prst="roundRect">
-            <a:avLst/>
+            <a:avLst>
+              <a:gd name="adj" fmla="val 4000"/>
+            </a:avLst>
           </a:prstGeom>
           <a:solidFill>
-            <a:srgbClr val="FFFFFF"/>
+            <a:srgbClr val="111B2E"/>
           </a:solidFill>
           <a:ln>
             <a:noFill/>
@@ -6858,89 +7721,69 @@
           </a:fontRef>
         </p:style>
         <p:txBody>
-          <a:bodyPr rtlCol="0" anchor="ctr" wrap="square" lIns="182880" rIns="182880" tIns="137160" bIns="137160"/>
+          <a:bodyPr rtlCol="0" anchor="ctr" wrap="square" lIns="182880" rIns="182880" tIns="164592" bIns="91440"/>
           <a:lstStyle/>
           <a:p>
             <a:pPr algn="ctr">
-              <a:defRPr sz="1200">
-                <a:solidFill>
-                  <a:srgbClr val="FFFFFF"/>
-                </a:solidFill>
-                <a:latin typeface="Calibri"/>
-              </a:defRPr>
-            </a:pPr>
-            <a:r>
-              <a:rPr>
-                <a:solidFill>
-                  <a:srgbClr val="0F172A"/>
-                </a:solidFill>
-              </a:rPr>
-              <a:t>Landing Page</a:t>
+              <a:defRPr sz="1400" b="1">
+                <a:solidFill>
+                  <a:srgbClr val="3B82F6"/>
+                </a:solidFill>
+                <a:latin typeface="Calibri"/>
+              </a:defRPr>
+            </a:pPr>
+            <a:r>
+              <a:t>🏠 Landing Page</a:t>
+            </a:r>
+          </a:p>
+          <a:p>
+            <a:pPr algn="ctr">
+              <a:spcBef>
+                <a:spcPts val="600"/>
+              </a:spcBef>
+              <a:defRPr sz="1100">
+                <a:solidFill>
+                  <a:srgbClr val="94A3B8"/>
+                </a:solidFill>
+                <a:latin typeface="Calibri"/>
+              </a:defRPr>
+            </a:pPr>
+            <a:r>
+              <a:t>3D Warehouse Scene (Three.js)</a:t>
             </a:r>
             <a:br/>
             <a:r>
-              <a:rPr>
-                <a:solidFill>
-                  <a:srgbClr val="0F172A"/>
-                </a:solidFill>
-              </a:rPr>
-              <a:t>—————————</a:t>
+              <a:t>Hero animations</a:t>
             </a:r>
             <a:br/>
             <a:r>
-              <a:rPr>
-                <a:solidFill>
-                  <a:srgbClr val="0F172A"/>
-                </a:solidFill>
-              </a:rPr>
-              <a:t>3D Warehouse Scene (Three.js)</a:t>
+              <a:t>Smooth scrolling (Lenis)</a:t>
             </a:r>
             <a:br/>
             <a:r>
-              <a:rPr>
-                <a:solidFill>
-                  <a:srgbClr val="0F172A"/>
-                </a:solidFill>
-              </a:rPr>
-              <a:t>Hero animations (Framer Motion, GSAP)</a:t>
-            </a:r>
-            <a:br/>
-            <a:r>
-              <a:rPr>
-                <a:solidFill>
-                  <a:srgbClr val="0F172A"/>
-                </a:solidFill>
-              </a:rPr>
-              <a:t>Smooth scrolling (Lenis)</a:t>
-            </a:r>
-            <a:br/>
-            <a:r>
-              <a:rPr>
-                <a:solidFill>
-                  <a:srgbClr val="0F172A"/>
-                </a:solidFill>
-              </a:rPr>
-              <a:t>Parallax layers, Tilt cards</a:t>
-            </a:r>
-          </a:p>
-        </p:txBody>
-      </p:sp>
-      <p:sp>
-        <p:nvSpPr>
-          <p:cNvPr id="6" name="Rounded Rectangle 5"/>
+              <a:t>Parallax, Tilt cards</a:t>
+            </a:r>
+          </a:p>
+        </p:txBody>
+      </p:sp>
+      <p:sp>
+        <p:nvSpPr>
+          <p:cNvPr id="7" name="Rounded Rectangle 6"/>
           <p:cNvSpPr/>
           <p:nvPr/>
         </p:nvSpPr>
         <p:spPr>
           <a:xfrm>
-            <a:off x="3200400" y="1463040"/>
-            <a:ext cx="2560320" cy="2103120"/>
+            <a:off x="3383280" y="1554480"/>
+            <a:ext cx="2651760" cy="2194560"/>
           </a:xfrm>
           <a:prstGeom prst="roundRect">
-            <a:avLst/>
+            <a:avLst>
+              <a:gd name="adj" fmla="val 4000"/>
+            </a:avLst>
           </a:prstGeom>
           <a:solidFill>
-            <a:srgbClr val="FFFFFF"/>
+            <a:srgbClr val="111B2E"/>
           </a:solidFill>
           <a:ln>
             <a:noFill/>
@@ -6961,68 +7804,46 @@
           </a:fontRef>
         </p:style>
         <p:txBody>
-          <a:bodyPr rtlCol="0" anchor="ctr" wrap="square" lIns="182880" rIns="182880" tIns="137160" bIns="137160"/>
+          <a:bodyPr rtlCol="0" anchor="ctr" wrap="square" lIns="182880" rIns="182880" tIns="164592" bIns="91440"/>
           <a:lstStyle/>
           <a:p>
             <a:pPr algn="ctr">
-              <a:defRPr sz="1200">
-                <a:solidFill>
-                  <a:srgbClr val="FFFFFF"/>
-                </a:solidFill>
-                <a:latin typeface="Calibri"/>
-              </a:defRPr>
-            </a:pPr>
-            <a:r>
-              <a:rPr>
-                <a:solidFill>
-                  <a:srgbClr val="0F172A"/>
-                </a:solidFill>
-              </a:rPr>
-              <a:t>Dashboard</a:t>
+              <a:defRPr sz="1400" b="1">
+                <a:solidFill>
+                  <a:srgbClr val="3B82F6"/>
+                </a:solidFill>
+                <a:latin typeface="Calibri"/>
+              </a:defRPr>
+            </a:pPr>
+            <a:r>
+              <a:t>📊 Dashboard</a:t>
+            </a:r>
+          </a:p>
+          <a:p>
+            <a:pPr algn="ctr">
+              <a:spcBef>
+                <a:spcPts val="600"/>
+              </a:spcBef>
+              <a:defRPr sz="1100">
+                <a:solidFill>
+                  <a:srgbClr val="94A3B8"/>
+                </a:solidFill>
+                <a:latin typeface="Calibri"/>
+              </a:defRPr>
+            </a:pPr>
+            <a:r>
+              <a:t>Real-time order tracking</a:t>
             </a:r>
             <a:br/>
             <a:r>
-              <a:rPr>
-                <a:solidFill>
-                  <a:srgbClr val="0F172A"/>
-                </a:solidFill>
-              </a:rPr>
-              <a:t>—————————</a:t>
+              <a:t>Inventory zones panel</a:t>
             </a:r>
             <a:br/>
             <a:r>
-              <a:rPr>
-                <a:solidFill>
-                  <a:srgbClr val="0F172A"/>
-                </a:solidFill>
-              </a:rPr>
-              <a:t>Real-time order tracking</a:t>
+              <a:t>Analytics &amp; metrics</a:t>
             </a:r>
             <a:br/>
             <a:r>
-              <a:rPr>
-                <a:solidFill>
-                  <a:srgbClr val="0F172A"/>
-                </a:solidFill>
-              </a:rPr>
-              <a:t>Inventory zones panel</a:t>
-            </a:r>
-            <a:br/>
-            <a:r>
-              <a:rPr>
-                <a:solidFill>
-                  <a:srgbClr val="0F172A"/>
-                </a:solidFill>
-              </a:rPr>
-              <a:t>Analytics &amp; metrics</a:t>
-            </a:r>
-            <a:br/>
-            <a:r>
-              <a:rPr>
-                <a:solidFill>
-                  <a:srgbClr val="0F172A"/>
-                </a:solidFill>
-              </a:rPr>
               <a:t>Agent activity logs</a:t>
             </a:r>
           </a:p>
@@ -7030,20 +7851,22 @@
       </p:sp>
       <p:sp>
         <p:nvSpPr>
-          <p:cNvPr id="7" name="Rounded Rectangle 6"/>
+          <p:cNvPr id="8" name="Rounded Rectangle 7"/>
           <p:cNvSpPr/>
           <p:nvPr/>
         </p:nvSpPr>
         <p:spPr>
           <a:xfrm>
-            <a:off x="5943600" y="1463040"/>
-            <a:ext cx="2560320" cy="2103120"/>
+            <a:off x="6309360" y="1554480"/>
+            <a:ext cx="2651760" cy="2194560"/>
           </a:xfrm>
           <a:prstGeom prst="roundRect">
-            <a:avLst/>
+            <a:avLst>
+              <a:gd name="adj" fmla="val 4000"/>
+            </a:avLst>
           </a:prstGeom>
           <a:solidFill>
-            <a:srgbClr val="FFFFFF"/>
+            <a:srgbClr val="111B2E"/>
           </a:solidFill>
           <a:ln>
             <a:noFill/>
@@ -7064,68 +7887,46 @@
           </a:fontRef>
         </p:style>
         <p:txBody>
-          <a:bodyPr rtlCol="0" anchor="ctr" wrap="square" lIns="182880" rIns="182880" tIns="137160" bIns="137160"/>
+          <a:bodyPr rtlCol="0" anchor="ctr" wrap="square" lIns="182880" rIns="182880" tIns="164592" bIns="91440"/>
           <a:lstStyle/>
           <a:p>
             <a:pPr algn="ctr">
-              <a:defRPr sz="1200">
-                <a:solidFill>
-                  <a:srgbClr val="FFFFFF"/>
-                </a:solidFill>
-                <a:latin typeface="Calibri"/>
-              </a:defRPr>
-            </a:pPr>
-            <a:r>
-              <a:rPr>
-                <a:solidFill>
-                  <a:srgbClr val="0F172A"/>
-                </a:solidFill>
-              </a:rPr>
-              <a:t>AI Assistant</a:t>
+              <a:defRPr sz="1400" b="1">
+                <a:solidFill>
+                  <a:srgbClr val="3B82F6"/>
+                </a:solidFill>
+                <a:latin typeface="Calibri"/>
+              </a:defRPr>
+            </a:pPr>
+            <a:r>
+              <a:t>🤖 AI Assistant</a:t>
+            </a:r>
+          </a:p>
+          <a:p>
+            <a:pPr algn="ctr">
+              <a:spcBef>
+                <a:spcPts val="600"/>
+              </a:spcBef>
+              <a:defRPr sz="1100">
+                <a:solidFill>
+                  <a:srgbClr val="94A3B8"/>
+                </a:solidFill>
+                <a:latin typeface="Calibri"/>
+              </a:defRPr>
+            </a:pPr>
+            <a:r>
+              <a:t>Chat (GPT-4o-mini)</a:t>
             </a:r>
             <a:br/>
             <a:r>
-              <a:rPr>
-                <a:solidFill>
-                  <a:srgbClr val="0F172A"/>
-                </a:solidFill>
-              </a:rPr>
-              <a:t>—————————</a:t>
+              <a:t>Streaming responses</a:t>
             </a:r>
             <a:br/>
             <a:r>
-              <a:rPr>
-                <a:solidFill>
-                  <a:srgbClr val="0F172A"/>
-                </a:solidFill>
-              </a:rPr>
-              <a:t>Chat interface (OpenAI GPT-4o-mini)</a:t>
+              <a:t>Smart suggestions</a:t>
             </a:r>
             <a:br/>
             <a:r>
-              <a:rPr>
-                <a:solidFill>
-                  <a:srgbClr val="0F172A"/>
-                </a:solidFill>
-              </a:rPr>
-              <a:t>Streaming responses (Vercel AI SDK)</a:t>
-            </a:r>
-            <a:br/>
-            <a:r>
-              <a:rPr>
-                <a:solidFill>
-                  <a:srgbClr val="0F172A"/>
-                </a:solidFill>
-              </a:rPr>
-              <a:t>Smart suggestions &amp; insights</a:t>
-            </a:r>
-            <a:br/>
-            <a:r>
-              <a:rPr>
-                <a:solidFill>
-                  <a:srgbClr val="0F172A"/>
-                </a:solidFill>
-              </a:rPr>
               <a:t>Context-aware replies</a:t>
             </a:r>
           </a:p>
@@ -7133,20 +7934,22 @@
       </p:sp>
       <p:sp>
         <p:nvSpPr>
-          <p:cNvPr id="8" name="Rounded Rectangle 7"/>
+          <p:cNvPr id="9" name="Rounded Rectangle 8"/>
           <p:cNvSpPr/>
           <p:nvPr/>
         </p:nvSpPr>
         <p:spPr>
           <a:xfrm>
-            <a:off x="8686800" y="1463040"/>
-            <a:ext cx="2560320" cy="2103120"/>
+            <a:off x="9235440" y="1554480"/>
+            <a:ext cx="2651760" cy="2194560"/>
           </a:xfrm>
           <a:prstGeom prst="roundRect">
-            <a:avLst/>
+            <a:avLst>
+              <a:gd name="adj" fmla="val 4000"/>
+            </a:avLst>
           </a:prstGeom>
           <a:solidFill>
-            <a:srgbClr val="FFFFFF"/>
+            <a:srgbClr val="111B2E"/>
           </a:solidFill>
           <a:ln>
             <a:noFill/>
@@ -7167,98 +7970,69 @@
           </a:fontRef>
         </p:style>
         <p:txBody>
-          <a:bodyPr rtlCol="0" anchor="ctr" wrap="square" lIns="182880" rIns="182880" tIns="137160" bIns="137160"/>
+          <a:bodyPr rtlCol="0" anchor="ctr" wrap="square" lIns="182880" rIns="182880" tIns="164592" bIns="91440"/>
           <a:lstStyle/>
           <a:p>
             <a:pPr algn="ctr">
-              <a:defRPr sz="1200">
-                <a:solidFill>
-                  <a:srgbClr val="FFFFFF"/>
-                </a:solidFill>
-                <a:latin typeface="Calibri"/>
-              </a:defRPr>
-            </a:pPr>
-            <a:r>
-              <a:rPr>
-                <a:solidFill>
-                  <a:srgbClr val="0F172A"/>
-                </a:solidFill>
-              </a:rPr>
-              <a:t>UI/UX</a:t>
+              <a:defRPr sz="1400" b="1">
+                <a:solidFill>
+                  <a:srgbClr val="3B82F6"/>
+                </a:solidFill>
+                <a:latin typeface="Calibri"/>
+              </a:defRPr>
+            </a:pPr>
+            <a:r>
+              <a:t>🎨 UI/UX</a:t>
+            </a:r>
+          </a:p>
+          <a:p>
+            <a:pPr algn="ctr">
+              <a:spcBef>
+                <a:spcPts val="600"/>
+              </a:spcBef>
+              <a:defRPr sz="1100">
+                <a:solidFill>
+                  <a:srgbClr val="94A3B8"/>
+                </a:solidFill>
+                <a:latin typeface="Calibri"/>
+              </a:defRPr>
+            </a:pPr>
+            <a:r>
+              <a:t>Radix UI components</a:t>
             </a:r>
             <a:br/>
             <a:r>
-              <a:rPr>
-                <a:solidFill>
-                  <a:srgbClr val="0F172A"/>
-                </a:solidFill>
-              </a:rPr>
-              <a:t>—————————</a:t>
+              <a:t>Tailwind CSS v4</a:t>
             </a:r>
             <a:br/>
             <a:r>
-              <a:rPr>
-                <a:solidFill>
-                  <a:srgbClr val="0F172A"/>
-                </a:solidFill>
-              </a:rPr>
-              <a:t>Radix UI accessible components</a:t>
+              <a:t>Framer Motion</a:t>
             </a:r>
             <a:br/>
             <a:r>
-              <a:rPr>
-                <a:solidFill>
-                  <a:srgbClr val="0F172A"/>
-                </a:solidFill>
-              </a:rPr>
-              <a:t>Tailwind CSS v4 styling</a:t>
-            </a:r>
-            <a:br/>
-            <a:r>
-              <a:rPr>
-                <a:solidFill>
-                  <a:srgbClr val="0F172A"/>
-                </a:solidFill>
-              </a:rPr>
-              <a:t>Framer Motion animations</a:t>
-            </a:r>
-            <a:br/>
-            <a:r>
-              <a:rPr>
-                <a:solidFill>
-                  <a:srgbClr val="0F172A"/>
-                </a:solidFill>
-              </a:rPr>
-              <a:t>GSAP advanced timelines</a:t>
-            </a:r>
-            <a:br/>
-            <a:r>
-              <a:rPr>
-                <a:solidFill>
-                  <a:srgbClr val="0F172A"/>
-                </a:solidFill>
-              </a:rPr>
-              <a:t>Lucide icons • Dark theme</a:t>
-            </a:r>
-          </a:p>
-        </p:txBody>
-      </p:sp>
-      <p:sp>
-        <p:nvSpPr>
-          <p:cNvPr id="9" name="Rounded Rectangle 8"/>
+              <a:t>GSAP timelines</a:t>
+            </a:r>
+          </a:p>
+        </p:txBody>
+      </p:sp>
+      <p:sp>
+        <p:nvSpPr>
+          <p:cNvPr id="10" name="Rounded Rectangle 9"/>
           <p:cNvSpPr/>
           <p:nvPr/>
         </p:nvSpPr>
         <p:spPr>
           <a:xfrm>
-            <a:off x="457200" y="3840480"/>
-            <a:ext cx="2560320" cy="2103120"/>
+            <a:off x="457200" y="4114800"/>
+            <a:ext cx="2651760" cy="2194560"/>
           </a:xfrm>
           <a:prstGeom prst="roundRect">
-            <a:avLst/>
+            <a:avLst>
+              <a:gd name="adj" fmla="val 4000"/>
+            </a:avLst>
           </a:prstGeom>
           <a:solidFill>
-            <a:srgbClr val="FFFFFF"/>
+            <a:srgbClr val="111B2E"/>
           </a:solidFill>
           <a:ln>
             <a:noFill/>
@@ -7279,89 +8053,69 @@
           </a:fontRef>
         </p:style>
         <p:txBody>
-          <a:bodyPr rtlCol="0" anchor="ctr" wrap="square" lIns="182880" rIns="182880" tIns="137160" bIns="137160"/>
+          <a:bodyPr rtlCol="0" anchor="ctr" wrap="square" lIns="182880" rIns="182880" tIns="164592" bIns="91440"/>
           <a:lstStyle/>
           <a:p>
             <a:pPr algn="ctr">
-              <a:defRPr sz="1200">
-                <a:solidFill>
-                  <a:srgbClr val="FFFFFF"/>
-                </a:solidFill>
-                <a:latin typeface="Calibri"/>
-              </a:defRPr>
-            </a:pPr>
-            <a:r>
-              <a:rPr>
-                <a:solidFill>
-                  <a:srgbClr val="0F172A"/>
-                </a:solidFill>
-              </a:rPr>
-              <a:t>Auth &amp; Forms</a:t>
+              <a:defRPr sz="1400" b="1">
+                <a:solidFill>
+                  <a:srgbClr val="3B82F6"/>
+                </a:solidFill>
+                <a:latin typeface="Calibri"/>
+              </a:defRPr>
+            </a:pPr>
+            <a:r>
+              <a:t>🔐 Auth &amp; Forms</a:t>
+            </a:r>
+          </a:p>
+          <a:p>
+            <a:pPr algn="ctr">
+              <a:spcBef>
+                <a:spcPts val="600"/>
+              </a:spcBef>
+              <a:defRPr sz="1100">
+                <a:solidFill>
+                  <a:srgbClr val="94A3B8"/>
+                </a:solidFill>
+                <a:latin typeface="Calibri"/>
+              </a:defRPr>
+            </a:pPr>
+            <a:r>
+              <a:t>NextAuth.js</a:t>
             </a:r>
             <a:br/>
             <a:r>
-              <a:rPr>
-                <a:solidFill>
-                  <a:srgbClr val="0F172A"/>
-                </a:solidFill>
-              </a:rPr>
-              <a:t>—————————</a:t>
+              <a:t>OAuth (Google + FB)</a:t>
             </a:r>
             <a:br/>
             <a:r>
-              <a:rPr>
-                <a:solidFill>
-                  <a:srgbClr val="0F172A"/>
-                </a:solidFill>
-              </a:rPr>
-              <a:t>NextAuth.js authentication</a:t>
+              <a:t>React Hook Form + Zod</a:t>
             </a:r>
             <a:br/>
             <a:r>
-              <a:rPr>
-                <a:solidFill>
-                  <a:srgbClr val="0F172A"/>
-                </a:solidFill>
-              </a:rPr>
-              <a:t>Google + Facebook OAuth</a:t>
-            </a:r>
-            <a:br/>
-            <a:r>
-              <a:rPr>
-                <a:solidFill>
-                  <a:srgbClr val="0F172A"/>
-                </a:solidFill>
-              </a:rPr>
-              <a:t>React Hook Form + Zod v4</a:t>
-            </a:r>
-            <a:br/>
-            <a:r>
-              <a:rPr>
-                <a:solidFill>
-                  <a:srgbClr val="0F172A"/>
-                </a:solidFill>
-              </a:rPr>
-              <a:t>JWT session management</a:t>
-            </a:r>
-          </a:p>
-        </p:txBody>
-      </p:sp>
-      <p:sp>
-        <p:nvSpPr>
-          <p:cNvPr id="10" name="Rounded Rectangle 9"/>
+              <a:t>JWT sessions</a:t>
+            </a:r>
+          </a:p>
+        </p:txBody>
+      </p:sp>
+      <p:sp>
+        <p:nvSpPr>
+          <p:cNvPr id="11" name="Rounded Rectangle 10"/>
           <p:cNvSpPr/>
           <p:nvPr/>
         </p:nvSpPr>
         <p:spPr>
           <a:xfrm>
-            <a:off x="3200400" y="3840480"/>
-            <a:ext cx="2560320" cy="2103120"/>
+            <a:off x="3383280" y="4114800"/>
+            <a:ext cx="2651760" cy="2194560"/>
           </a:xfrm>
           <a:prstGeom prst="roundRect">
-            <a:avLst/>
+            <a:avLst>
+              <a:gd name="adj" fmla="val 4000"/>
+            </a:avLst>
           </a:prstGeom>
           <a:solidFill>
-            <a:srgbClr val="FFFFFF"/>
+            <a:srgbClr val="111B2E"/>
           </a:solidFill>
           <a:ln>
             <a:noFill/>
@@ -7382,89 +8136,69 @@
           </a:fontRef>
         </p:style>
         <p:txBody>
-          <a:bodyPr rtlCol="0" anchor="ctr" wrap="square" lIns="182880" rIns="182880" tIns="137160" bIns="137160"/>
+          <a:bodyPr rtlCol="0" anchor="ctr" wrap="square" lIns="182880" rIns="182880" tIns="164592" bIns="91440"/>
           <a:lstStyle/>
           <a:p>
             <a:pPr algn="ctr">
-              <a:defRPr sz="1200">
-                <a:solidFill>
-                  <a:srgbClr val="FFFFFF"/>
-                </a:solidFill>
-                <a:latin typeface="Calibri"/>
-              </a:defRPr>
-            </a:pPr>
-            <a:r>
-              <a:rPr>
-                <a:solidFill>
-                  <a:srgbClr val="0F172A"/>
-                </a:solidFill>
-              </a:rPr>
-              <a:t>Visual Effects</a:t>
+              <a:defRPr sz="1400" b="1">
+                <a:solidFill>
+                  <a:srgbClr val="3B82F6"/>
+                </a:solidFill>
+                <a:latin typeface="Calibri"/>
+              </a:defRPr>
+            </a:pPr>
+            <a:r>
+              <a:t>✨ Visual Effects</a:t>
+            </a:r>
+          </a:p>
+          <a:p>
+            <a:pPr algn="ctr">
+              <a:spcBef>
+                <a:spcPts val="600"/>
+              </a:spcBef>
+              <a:defRPr sz="1100">
+                <a:solidFill>
+                  <a:srgbClr val="94A3B8"/>
+                </a:solidFill>
+                <a:latin typeface="Calibri"/>
+              </a:defRPr>
+            </a:pPr>
+            <a:r>
+              <a:t>Noise overlay • Cursor</a:t>
             </a:r>
             <a:br/>
             <a:r>
-              <a:rPr>
-                <a:solidFill>
-                  <a:srgbClr val="0F172A"/>
-                </a:solidFill>
-              </a:rPr>
-              <a:t>—————————</a:t>
+              <a:t>Magnetic buttons</a:t>
             </a:r>
             <a:br/>
             <a:r>
-              <a:rPr>
-                <a:solidFill>
-                  <a:srgbClr val="0F172A"/>
-                </a:solidFill>
-              </a:rPr>
-              <a:t>Noise overlay • Cursor follower</a:t>
+              <a:t>Rotating borders</a:t>
             </a:r>
             <a:br/>
             <a:r>
-              <a:rPr>
-                <a:solidFill>
-                  <a:srgbClr val="0F172A"/>
-                </a:solidFill>
-              </a:rPr>
-              <a:t>Magnetic buttons • Rotating borders</a:t>
-            </a:r>
-            <a:br/>
-            <a:r>
-              <a:rPr>
-                <a:solidFill>
-                  <a:srgbClr val="0F172A"/>
-                </a:solidFill>
-              </a:rPr>
-              <a:t>Text reveal animations</a:t>
-            </a:r>
-            <a:br/>
-            <a:r>
-              <a:rPr>
-                <a:solidFill>
-                  <a:srgbClr val="0F172A"/>
-                </a:solidFill>
-              </a:rPr>
-              <a:t>Animated counters • Scroll animations</a:t>
-            </a:r>
-          </a:p>
-        </p:txBody>
-      </p:sp>
-      <p:sp>
-        <p:nvSpPr>
-          <p:cNvPr id="11" name="Rounded Rectangle 10"/>
+              <a:t>Text reveals</a:t>
+            </a:r>
+          </a:p>
+        </p:txBody>
+      </p:sp>
+      <p:sp>
+        <p:nvSpPr>
+          <p:cNvPr id="12" name="Rounded Rectangle 11"/>
           <p:cNvSpPr/>
           <p:nvPr/>
         </p:nvSpPr>
         <p:spPr>
           <a:xfrm>
-            <a:off x="5943600" y="3840480"/>
-            <a:ext cx="2560320" cy="2103120"/>
+            <a:off x="6309360" y="4114800"/>
+            <a:ext cx="2651760" cy="2194560"/>
           </a:xfrm>
           <a:prstGeom prst="roundRect">
-            <a:avLst/>
+            <a:avLst>
+              <a:gd name="adj" fmla="val 4000"/>
+            </a:avLst>
           </a:prstGeom>
           <a:solidFill>
-            <a:srgbClr val="FFFFFF"/>
+            <a:srgbClr val="111B2E"/>
           </a:solidFill>
           <a:ln>
             <a:noFill/>
@@ -7485,68 +8219,46 @@
           </a:fontRef>
         </p:style>
         <p:txBody>
-          <a:bodyPr rtlCol="0" anchor="ctr" wrap="square" lIns="182880" rIns="182880" tIns="137160" bIns="137160"/>
+          <a:bodyPr rtlCol="0" anchor="ctr" wrap="square" lIns="182880" rIns="182880" tIns="164592" bIns="91440"/>
           <a:lstStyle/>
           <a:p>
             <a:pPr algn="ctr">
-              <a:defRPr sz="1200">
-                <a:solidFill>
-                  <a:srgbClr val="FFFFFF"/>
-                </a:solidFill>
-                <a:latin typeface="Calibri"/>
-              </a:defRPr>
-            </a:pPr>
-            <a:r>
-              <a:rPr>
-                <a:solidFill>
-                  <a:srgbClr val="0F172A"/>
-                </a:solidFill>
-              </a:rPr>
-              <a:t>Pages</a:t>
+              <a:defRPr sz="1400" b="1">
+                <a:solidFill>
+                  <a:srgbClr val="3B82F6"/>
+                </a:solidFill>
+                <a:latin typeface="Calibri"/>
+              </a:defRPr>
+            </a:pPr>
+            <a:r>
+              <a:t>📄 Pages</a:t>
+            </a:r>
+          </a:p>
+          <a:p>
+            <a:pPr algn="ctr">
+              <a:spcBef>
+                <a:spcPts val="600"/>
+              </a:spcBef>
+              <a:defRPr sz="1100">
+                <a:solidFill>
+                  <a:srgbClr val="94A3B8"/>
+                </a:solidFill>
+                <a:latin typeface="Calibri"/>
+              </a:defRPr>
+            </a:pPr>
+            <a:r>
+              <a:t>/dashboard • /orders</a:t>
             </a:r>
             <a:br/>
             <a:r>
-              <a:rPr>
-                <a:solidFill>
-                  <a:srgbClr val="0F172A"/>
-                </a:solidFill>
-              </a:rPr>
-              <a:t>—————————</a:t>
+              <a:t>/agents • /analytics</a:t>
             </a:r>
             <a:br/>
             <a:r>
-              <a:rPr>
-                <a:solidFill>
-                  <a:srgbClr val="0F172A"/>
-                </a:solidFill>
-              </a:rPr>
-              <a:t>/dashboard • /orders • /agents</a:t>
+              <a:t>/workflows • /monitoring</a:t>
             </a:r>
             <a:br/>
             <a:r>
-              <a:rPr>
-                <a:solidFill>
-                  <a:srgbClr val="0F172A"/>
-                </a:solidFill>
-              </a:rPr>
-              <a:t>/analytics • /settings</a:t>
-            </a:r>
-            <a:br/>
-            <a:r>
-              <a:rPr>
-                <a:solidFill>
-                  <a:srgbClr val="0F172A"/>
-                </a:solidFill>
-              </a:rPr>
-              <a:t>/workflows • /monitoring</a:t>
-            </a:r>
-            <a:br/>
-            <a:r>
-              <a:rPr>
-                <a:solidFill>
-                  <a:srgbClr val="0F172A"/>
-                </a:solidFill>
-              </a:rPr>
               <a:t>/team</a:t>
             </a:r>
           </a:p>
@@ -7554,20 +8266,22 @@
       </p:sp>
       <p:sp>
         <p:nvSpPr>
-          <p:cNvPr id="12" name="Rounded Rectangle 11"/>
+          <p:cNvPr id="13" name="Rounded Rectangle 12"/>
           <p:cNvSpPr/>
           <p:nvPr/>
         </p:nvSpPr>
         <p:spPr>
           <a:xfrm>
-            <a:off x="8686800" y="3840480"/>
-            <a:ext cx="2560320" cy="2103120"/>
+            <a:off x="9235440" y="4114800"/>
+            <a:ext cx="2651760" cy="2194560"/>
           </a:xfrm>
           <a:prstGeom prst="roundRect">
-            <a:avLst/>
+            <a:avLst>
+              <a:gd name="adj" fmla="val 4000"/>
+            </a:avLst>
           </a:prstGeom>
           <a:solidFill>
-            <a:srgbClr val="FFFFFF"/>
+            <a:srgbClr val="111B2E"/>
           </a:solidFill>
           <a:ln>
             <a:noFill/>
@@ -7588,68 +8302,46 @@
           </a:fontRef>
         </p:style>
         <p:txBody>
-          <a:bodyPr rtlCol="0" anchor="ctr" wrap="square" lIns="182880" rIns="182880" tIns="137160" bIns="137160"/>
+          <a:bodyPr rtlCol="0" anchor="ctr" wrap="square" lIns="182880" rIns="182880" tIns="164592" bIns="91440"/>
           <a:lstStyle/>
           <a:p>
             <a:pPr algn="ctr">
-              <a:defRPr sz="1200">
-                <a:solidFill>
-                  <a:srgbClr val="FFFFFF"/>
-                </a:solidFill>
-                <a:latin typeface="Calibri"/>
-              </a:defRPr>
-            </a:pPr>
-            <a:r>
-              <a:rPr>
-                <a:solidFill>
-                  <a:srgbClr val="0F172A"/>
-                </a:solidFill>
-              </a:rPr>
-              <a:t>Testing</a:t>
+              <a:defRPr sz="1400" b="1">
+                <a:solidFill>
+                  <a:srgbClr val="3B82F6"/>
+                </a:solidFill>
+                <a:latin typeface="Calibri"/>
+              </a:defRPr>
+            </a:pPr>
+            <a:r>
+              <a:t>🧪 Testing</a:t>
+            </a:r>
+          </a:p>
+          <a:p>
+            <a:pPr algn="ctr">
+              <a:spcBef>
+                <a:spcPts val="600"/>
+              </a:spcBef>
+              <a:defRPr sz="1100">
+                <a:solidFill>
+                  <a:srgbClr val="94A3B8"/>
+                </a:solidFill>
+                <a:latin typeface="Calibri"/>
+              </a:defRPr>
+            </a:pPr>
+            <a:r>
+              <a:t>Vitest • RTL</a:t>
             </a:r>
             <a:br/>
             <a:r>
-              <a:rPr>
-                <a:solidFill>
-                  <a:srgbClr val="0F172A"/>
-                </a:solidFill>
-              </a:rPr>
-              <a:t>—————————</a:t>
+              <a:t>Jest DOM matchers</a:t>
             </a:r>
             <a:br/>
             <a:r>
-              <a:rPr>
-                <a:solidFill>
-                  <a:srgbClr val="0F172A"/>
-                </a:solidFill>
-              </a:rPr>
-              <a:t>Vitest • React Testing Library</a:t>
+              <a:t>User event simulation</a:t>
             </a:r>
             <a:br/>
             <a:r>
-              <a:rPr>
-                <a:solidFill>
-                  <a:srgbClr val="0F172A"/>
-                </a:solidFill>
-              </a:rPr>
-              <a:t>Jest DOM matchers</a:t>
-            </a:r>
-            <a:br/>
-            <a:r>
-              <a:rPr>
-                <a:solidFill>
-                  <a:srgbClr val="0F172A"/>
-                </a:solidFill>
-              </a:rPr>
-              <a:t>User event simulation</a:t>
-            </a:r>
-            <a:br/>
-            <a:r>
-              <a:rPr>
-                <a:solidFill>
-                  <a:srgbClr val="0F172A"/>
-                </a:solidFill>
-              </a:rPr>
               <a:t>jsdom environment</a:t>
             </a:r>
           </a:p>
@@ -7669,7 +8361,7 @@
     <p:bg>
       <p:bgPr>
         <a:solidFill>
-          <a:srgbClr val="0F172A"/>
+          <a:srgbClr val="070B15"/>
         </a:solidFill>
         <a:effectLst/>
       </p:bgPr>
@@ -7689,8 +8381,8 @@
         </p:nvSpPr>
         <p:spPr>
           <a:xfrm>
-            <a:off x="731520" y="365760"/>
-            <a:ext cx="7315200" cy="548640"/>
+            <a:off x="548640" y="365760"/>
+            <a:ext cx="5486400" cy="365760"/>
           </a:xfrm>
           <a:prstGeom prst="rect">
             <a:avLst/>
@@ -7704,29 +8396,65 @@
           <a:lstStyle/>
           <a:p>
             <a:pPr algn="l">
+              <a:defRPr sz="1300" b="0">
+                <a:solidFill>
+                  <a:srgbClr val="3B82F6"/>
+                </a:solidFill>
+                <a:latin typeface="Calibri"/>
+              </a:defRPr>
+            </a:pPr>
+            <a:r>
+              <a:t>✦  TECH</a:t>
+            </a:r>
+          </a:p>
+        </p:txBody>
+      </p:sp>
+      <p:sp>
+        <p:nvSpPr>
+          <p:cNvPr id="3" name="TextBox 2"/>
+          <p:cNvSpPr txBox="1"/>
+          <p:nvPr/>
+        </p:nvSpPr>
+        <p:spPr>
+          <a:xfrm>
+            <a:off x="548640" y="731520"/>
+            <a:ext cx="7315200" cy="548640"/>
+          </a:xfrm>
+          <a:prstGeom prst="rect">
+            <a:avLst/>
+          </a:prstGeom>
+          <a:noFill/>
+        </p:spPr>
+        <p:txBody>
+          <a:bodyPr wrap="square">
+            <a:spAutoFit/>
+          </a:bodyPr>
+          <a:lstStyle/>
+          <a:p>
+            <a:pPr algn="l">
               <a:defRPr sz="2800" b="1">
                 <a:solidFill>
-                  <a:srgbClr val="FFFFFF"/>
-                </a:solidFill>
-                <a:latin typeface="Calibri"/>
-              </a:defRPr>
-            </a:pPr>
-            <a:r>
-              <a:t>TECHNOLOGY STACK</a:t>
-            </a:r>
-          </a:p>
-        </p:txBody>
-      </p:sp>
-      <p:sp>
-        <p:nvSpPr>
-          <p:cNvPr id="3" name="Rectangle 2"/>
+                  <a:srgbClr val="F1F5F9"/>
+                </a:solidFill>
+                <a:latin typeface="Calibri"/>
+              </a:defRPr>
+            </a:pPr>
+            <a:r>
+              <a:t>Technology Stack</a:t>
+            </a:r>
+          </a:p>
+        </p:txBody>
+      </p:sp>
+      <p:sp>
+        <p:nvSpPr>
+          <p:cNvPr id="4" name="Rectangle 3"/>
           <p:cNvSpPr/>
           <p:nvPr/>
         </p:nvSpPr>
         <p:spPr>
           <a:xfrm>
-            <a:off x="731520" y="1005840"/>
-            <a:ext cx="1097280" cy="54864"/>
+            <a:off x="548640" y="1280160"/>
+            <a:ext cx="731520" cy="36576"/>
           </a:xfrm>
           <a:prstGeom prst="rect">
             <a:avLst/>
@@ -7762,14 +8490,14 @@
       </p:sp>
       <p:sp>
         <p:nvSpPr>
-          <p:cNvPr id="4" name="TextBox 3"/>
+          <p:cNvPr id="5" name="TextBox 4"/>
           <p:cNvSpPr txBox="1"/>
           <p:nvPr/>
         </p:nvSpPr>
         <p:spPr>
           <a:xfrm>
-            <a:off x="457200" y="1280160"/>
-            <a:ext cx="2560320" cy="320040"/>
+            <a:off x="457200" y="1554480"/>
+            <a:ext cx="2011680" cy="274320"/>
           </a:xfrm>
           <a:prstGeom prst="rect">
             <a:avLst/>
@@ -7783,7 +8511,7 @@
           <a:lstStyle/>
           <a:p>
             <a:pPr algn="l">
-              <a:defRPr sz="1200" b="1">
+              <a:defRPr sz="1100" b="1">
                 <a:solidFill>
                   <a:srgbClr val="3B82F6"/>
                 </a:solidFill>
@@ -7791,21 +8519,21 @@
               </a:defRPr>
             </a:pPr>
             <a:r>
-              <a:t>▸ Languages &amp; Runtimes</a:t>
-            </a:r>
-          </a:p>
-        </p:txBody>
-      </p:sp>
-      <p:sp>
-        <p:nvSpPr>
-          <p:cNvPr id="5" name="TextBox 4"/>
+              <a:t>▸ Languages</a:t>
+            </a:r>
+          </a:p>
+        </p:txBody>
+      </p:sp>
+      <p:sp>
+        <p:nvSpPr>
+          <p:cNvPr id="6" name="TextBox 5"/>
           <p:cNvSpPr txBox="1"/>
           <p:nvPr/>
         </p:nvSpPr>
         <p:spPr>
           <a:xfrm>
-            <a:off x="3017520" y="1280160"/>
-            <a:ext cx="3108960" cy="320040"/>
+            <a:off x="2560320" y="1554480"/>
+            <a:ext cx="3474720" cy="274320"/>
           </a:xfrm>
           <a:prstGeom prst="rect">
             <a:avLst/>
@@ -7834,14 +8562,14 @@
       </p:sp>
       <p:sp>
         <p:nvSpPr>
-          <p:cNvPr id="6" name="TextBox 5"/>
+          <p:cNvPr id="7" name="TextBox 6"/>
           <p:cNvSpPr txBox="1"/>
           <p:nvPr/>
         </p:nvSpPr>
         <p:spPr>
           <a:xfrm>
-            <a:off x="6309360" y="1280160"/>
-            <a:ext cx="2560320" cy="320040"/>
+            <a:off x="6309360" y="1554480"/>
+            <a:ext cx="2011680" cy="274320"/>
           </a:xfrm>
           <a:prstGeom prst="rect">
             <a:avLst/>
@@ -7855,7 +8583,7 @@
           <a:lstStyle/>
           <a:p>
             <a:pPr algn="l">
-              <a:defRPr sz="1200" b="1">
+              <a:defRPr sz="1100" b="1">
                 <a:solidFill>
                   <a:srgbClr val="3B82F6"/>
                 </a:solidFill>
@@ -7863,21 +8591,21 @@
               </a:defRPr>
             </a:pPr>
             <a:r>
-              <a:t>▸ Backend Framework</a:t>
-            </a:r>
-          </a:p>
-        </p:txBody>
-      </p:sp>
-      <p:sp>
-        <p:nvSpPr>
-          <p:cNvPr id="7" name="TextBox 6"/>
+              <a:t>▸ Backend</a:t>
+            </a:r>
+          </a:p>
+        </p:txBody>
+      </p:sp>
+      <p:sp>
+        <p:nvSpPr>
+          <p:cNvPr id="8" name="TextBox 7"/>
           <p:cNvSpPr txBox="1"/>
           <p:nvPr/>
         </p:nvSpPr>
         <p:spPr>
           <a:xfrm>
-            <a:off x="8869680" y="1280160"/>
-            <a:ext cx="3108960" cy="320040"/>
+            <a:off x="8412480" y="1554480"/>
+            <a:ext cx="3474720" cy="274320"/>
           </a:xfrm>
           <a:prstGeom prst="rect">
             <a:avLst/>
@@ -7906,14 +8634,14 @@
       </p:sp>
       <p:sp>
         <p:nvSpPr>
-          <p:cNvPr id="8" name="TextBox 7"/>
+          <p:cNvPr id="9" name="TextBox 8"/>
           <p:cNvSpPr txBox="1"/>
           <p:nvPr/>
         </p:nvSpPr>
         <p:spPr>
           <a:xfrm>
-            <a:off x="457200" y="1664207"/>
-            <a:ext cx="2560320" cy="320040"/>
+            <a:off x="457200" y="1901952"/>
+            <a:ext cx="2011680" cy="274320"/>
           </a:xfrm>
           <a:prstGeom prst="rect">
             <a:avLst/>
@@ -7927,7 +8655,7 @@
           <a:lstStyle/>
           <a:p>
             <a:pPr algn="l">
-              <a:defRPr sz="1200" b="1">
+              <a:defRPr sz="1100" b="1">
                 <a:solidFill>
                   <a:srgbClr val="3B82F6"/>
                 </a:solidFill>
@@ -7935,21 +8663,21 @@
               </a:defRPr>
             </a:pPr>
             <a:r>
-              <a:t>▸ Frontend Framework</a:t>
-            </a:r>
-          </a:p>
-        </p:txBody>
-      </p:sp>
-      <p:sp>
-        <p:nvSpPr>
-          <p:cNvPr id="9" name="TextBox 8"/>
+              <a:t>▸ Frontend</a:t>
+            </a:r>
+          </a:p>
+        </p:txBody>
+      </p:sp>
+      <p:sp>
+        <p:nvSpPr>
+          <p:cNvPr id="10" name="TextBox 9"/>
           <p:cNvSpPr txBox="1"/>
           <p:nvPr/>
         </p:nvSpPr>
         <p:spPr>
           <a:xfrm>
-            <a:off x="3017520" y="1664207"/>
-            <a:ext cx="3108960" cy="320040"/>
+            <a:off x="2560320" y="1901952"/>
+            <a:ext cx="3474720" cy="274320"/>
           </a:xfrm>
           <a:prstGeom prst="rect">
             <a:avLst/>
@@ -7978,14 +8706,14 @@
       </p:sp>
       <p:sp>
         <p:nvSpPr>
-          <p:cNvPr id="10" name="TextBox 9"/>
+          <p:cNvPr id="11" name="TextBox 10"/>
           <p:cNvSpPr txBox="1"/>
           <p:nvPr/>
         </p:nvSpPr>
         <p:spPr>
           <a:xfrm>
-            <a:off x="6309360" y="1664207"/>
-            <a:ext cx="2560320" cy="320040"/>
+            <a:off x="6309360" y="1901952"/>
+            <a:ext cx="2011680" cy="274320"/>
           </a:xfrm>
           <a:prstGeom prst="rect">
             <a:avLst/>
@@ -7999,7 +8727,7 @@
           <a:lstStyle/>
           <a:p>
             <a:pPr algn="l">
-              <a:defRPr sz="1200" b="1">
+              <a:defRPr sz="1100" b="1">
                 <a:solidFill>
                   <a:srgbClr val="3B82F6"/>
                 </a:solidFill>
@@ -8014,14 +8742,14 @@
       </p:sp>
       <p:sp>
         <p:nvSpPr>
-          <p:cNvPr id="11" name="TextBox 10"/>
+          <p:cNvPr id="12" name="TextBox 11"/>
           <p:cNvSpPr txBox="1"/>
           <p:nvPr/>
         </p:nvSpPr>
         <p:spPr>
           <a:xfrm>
-            <a:off x="8869680" y="1664207"/>
-            <a:ext cx="3108960" cy="320040"/>
+            <a:off x="8412480" y="1901952"/>
+            <a:ext cx="3474720" cy="274320"/>
           </a:xfrm>
           <a:prstGeom prst="rect">
             <a:avLst/>
@@ -8050,14 +8778,14 @@
       </p:sp>
       <p:sp>
         <p:nvSpPr>
-          <p:cNvPr id="12" name="TextBox 11"/>
+          <p:cNvPr id="13" name="TextBox 12"/>
           <p:cNvSpPr txBox="1"/>
           <p:nvPr/>
         </p:nvSpPr>
         <p:spPr>
           <a:xfrm>
-            <a:off x="457200" y="2048255"/>
-            <a:ext cx="2560320" cy="320040"/>
+            <a:off x="457200" y="2249424"/>
+            <a:ext cx="2011680" cy="274320"/>
           </a:xfrm>
           <a:prstGeom prst="rect">
             <a:avLst/>
@@ -8071,7 +8799,7 @@
           <a:lstStyle/>
           <a:p>
             <a:pPr algn="l">
-              <a:defRPr sz="1200" b="1">
+              <a:defRPr sz="1100" b="1">
                 <a:solidFill>
                   <a:srgbClr val="3B82F6"/>
                 </a:solidFill>
@@ -8086,14 +8814,14 @@
       </p:sp>
       <p:sp>
         <p:nvSpPr>
-          <p:cNvPr id="13" name="TextBox 12"/>
+          <p:cNvPr id="14" name="TextBox 13"/>
           <p:cNvSpPr txBox="1"/>
           <p:nvPr/>
         </p:nvSpPr>
         <p:spPr>
           <a:xfrm>
-            <a:off x="3017520" y="2048255"/>
-            <a:ext cx="3108960" cy="320040"/>
+            <a:off x="2560320" y="2249424"/>
+            <a:ext cx="3474720" cy="274320"/>
           </a:xfrm>
           <a:prstGeom prst="rect">
             <a:avLst/>
@@ -8122,14 +8850,14 @@
       </p:sp>
       <p:sp>
         <p:nvSpPr>
-          <p:cNvPr id="14" name="TextBox 13"/>
+          <p:cNvPr id="15" name="TextBox 14"/>
           <p:cNvSpPr txBox="1"/>
           <p:nvPr/>
         </p:nvSpPr>
         <p:spPr>
           <a:xfrm>
-            <a:off x="6309360" y="2048255"/>
-            <a:ext cx="2560320" cy="320040"/>
+            <a:off x="6309360" y="2249424"/>
+            <a:ext cx="2011680" cy="274320"/>
           </a:xfrm>
           <a:prstGeom prst="rect">
             <a:avLst/>
@@ -8143,7 +8871,7 @@
           <a:lstStyle/>
           <a:p>
             <a:pPr algn="l">
-              <a:defRPr sz="1200" b="1">
+              <a:defRPr sz="1100" b="1">
                 <a:solidFill>
                   <a:srgbClr val="3B82F6"/>
                 </a:solidFill>
@@ -8158,14 +8886,14 @@
       </p:sp>
       <p:sp>
         <p:nvSpPr>
-          <p:cNvPr id="15" name="TextBox 14"/>
+          <p:cNvPr id="16" name="TextBox 15"/>
           <p:cNvSpPr txBox="1"/>
           <p:nvPr/>
         </p:nvSpPr>
         <p:spPr>
           <a:xfrm>
-            <a:off x="8869680" y="2048255"/>
-            <a:ext cx="3108960" cy="320040"/>
+            <a:off x="8412480" y="2249424"/>
+            <a:ext cx="3474720" cy="274320"/>
           </a:xfrm>
           <a:prstGeom prst="rect">
             <a:avLst/>
@@ -8194,14 +8922,14 @@
       </p:sp>
       <p:sp>
         <p:nvSpPr>
-          <p:cNvPr id="16" name="TextBox 15"/>
+          <p:cNvPr id="17" name="TextBox 16"/>
           <p:cNvSpPr txBox="1"/>
           <p:nvPr/>
         </p:nvSpPr>
         <p:spPr>
           <a:xfrm>
-            <a:off x="457200" y="2432304"/>
-            <a:ext cx="2560320" cy="320040"/>
+            <a:off x="457200" y="2596896"/>
+            <a:ext cx="2011680" cy="274320"/>
           </a:xfrm>
           <a:prstGeom prst="rect">
             <a:avLst/>
@@ -8215,7 +8943,7 @@
           <a:lstStyle/>
           <a:p>
             <a:pPr algn="l">
-              <a:defRPr sz="1200" b="1">
+              <a:defRPr sz="1100" b="1">
                 <a:solidFill>
                   <a:srgbClr val="3B82F6"/>
                 </a:solidFill>
@@ -8230,14 +8958,14 @@
       </p:sp>
       <p:sp>
         <p:nvSpPr>
-          <p:cNvPr id="17" name="TextBox 16"/>
+          <p:cNvPr id="18" name="TextBox 17"/>
           <p:cNvSpPr txBox="1"/>
           <p:nvPr/>
         </p:nvSpPr>
         <p:spPr>
           <a:xfrm>
-            <a:off x="3017520" y="2432304"/>
-            <a:ext cx="3108960" cy="320040"/>
+            <a:off x="2560320" y="2596896"/>
+            <a:ext cx="3474720" cy="274320"/>
           </a:xfrm>
           <a:prstGeom prst="rect">
             <a:avLst/>
@@ -8259,21 +8987,21 @@
               </a:defRPr>
             </a:pPr>
             <a:r>
-              <a:t>NextAuth.js, JWT (python-jose), OAuth2, bcrypt</a:t>
-            </a:r>
-          </a:p>
-        </p:txBody>
-      </p:sp>
-      <p:sp>
-        <p:nvSpPr>
-          <p:cNvPr id="18" name="TextBox 17"/>
+              <a:t>NextAuth.js, JWT (python-jose), OAuth2</a:t>
+            </a:r>
+          </a:p>
+        </p:txBody>
+      </p:sp>
+      <p:sp>
+        <p:nvSpPr>
+          <p:cNvPr id="19" name="TextBox 18"/>
           <p:cNvSpPr txBox="1"/>
           <p:nvPr/>
         </p:nvSpPr>
         <p:spPr>
           <a:xfrm>
-            <a:off x="6309360" y="2432304"/>
-            <a:ext cx="2560320" cy="320040"/>
+            <a:off x="6309360" y="2596896"/>
+            <a:ext cx="2011680" cy="274320"/>
           </a:xfrm>
           <a:prstGeom prst="rect">
             <a:avLst/>
@@ -8287,7 +9015,7 @@
           <a:lstStyle/>
           <a:p>
             <a:pPr algn="l">
-              <a:defRPr sz="1200" b="1">
+              <a:defRPr sz="1100" b="1">
                 <a:solidFill>
                   <a:srgbClr val="3B82F6"/>
                 </a:solidFill>
@@ -8302,14 +9030,14 @@
       </p:sp>
       <p:sp>
         <p:nvSpPr>
-          <p:cNvPr id="19" name="TextBox 18"/>
+          <p:cNvPr id="20" name="TextBox 19"/>
           <p:cNvSpPr txBox="1"/>
           <p:nvPr/>
         </p:nvSpPr>
         <p:spPr>
           <a:xfrm>
-            <a:off x="8869680" y="2432304"/>
-            <a:ext cx="3108960" cy="320040"/>
+            <a:off x="8412480" y="2596896"/>
+            <a:ext cx="3474720" cy="274320"/>
           </a:xfrm>
           <a:prstGeom prst="rect">
             <a:avLst/>
@@ -8331,21 +9059,21 @@
               </a:defRPr>
             </a:pPr>
             <a:r>
-              <a:t>Radix UI, lucide-react, class-variance-authority, tailwind-merge</a:t>
-            </a:r>
-          </a:p>
-        </p:txBody>
-      </p:sp>
-      <p:sp>
-        <p:nvSpPr>
-          <p:cNvPr id="20" name="TextBox 19"/>
+              <a:t>Radix UI, lucide-react, class-variance-authority</a:t>
+            </a:r>
+          </a:p>
+        </p:txBody>
+      </p:sp>
+      <p:sp>
+        <p:nvSpPr>
+          <p:cNvPr id="21" name="TextBox 20"/>
           <p:cNvSpPr txBox="1"/>
           <p:nvPr/>
         </p:nvSpPr>
         <p:spPr>
           <a:xfrm>
-            <a:off x="457200" y="2816352"/>
-            <a:ext cx="2560320" cy="320040"/>
+            <a:off x="457200" y="2944368"/>
+            <a:ext cx="2011680" cy="274320"/>
           </a:xfrm>
           <a:prstGeom prst="rect">
             <a:avLst/>
@@ -8359,7 +9087,7 @@
           <a:lstStyle/>
           <a:p>
             <a:pPr algn="l">
-              <a:defRPr sz="1200" b="1">
+              <a:defRPr sz="1100" b="1">
                 <a:solidFill>
                   <a:srgbClr val="3B82F6"/>
                 </a:solidFill>
@@ -8374,14 +9102,14 @@
       </p:sp>
       <p:sp>
         <p:nvSpPr>
-          <p:cNvPr id="21" name="TextBox 20"/>
+          <p:cNvPr id="22" name="TextBox 21"/>
           <p:cNvSpPr txBox="1"/>
           <p:nvPr/>
         </p:nvSpPr>
         <p:spPr>
           <a:xfrm>
-            <a:off x="3017520" y="2816352"/>
-            <a:ext cx="3108960" cy="320040"/>
+            <a:off x="2560320" y="2944368"/>
+            <a:ext cx="3474720" cy="274320"/>
           </a:xfrm>
           <a:prstGeom prst="rect">
             <a:avLst/>
@@ -8403,21 +9131,21 @@
               </a:defRPr>
             </a:pPr>
             <a:r>
-              <a:t>Framer Motion 12, GSAP 3, Three.js, Lenis smooth scroll</a:t>
-            </a:r>
-          </a:p>
-        </p:txBody>
-      </p:sp>
-      <p:sp>
-        <p:nvSpPr>
-          <p:cNvPr id="22" name="TextBox 21"/>
+              <a:t>Framer Motion 12, GSAP 3, Three.js, Lenis</a:t>
+            </a:r>
+          </a:p>
+        </p:txBody>
+      </p:sp>
+      <p:sp>
+        <p:nvSpPr>
+          <p:cNvPr id="23" name="TextBox 22"/>
           <p:cNvSpPr txBox="1"/>
           <p:nvPr/>
         </p:nvSpPr>
         <p:spPr>
           <a:xfrm>
-            <a:off x="6309360" y="2816352"/>
-            <a:ext cx="2560320" cy="320040"/>
+            <a:off x="6309360" y="2944368"/>
+            <a:ext cx="2011680" cy="274320"/>
           </a:xfrm>
           <a:prstGeom prst="rect">
             <a:avLst/>
@@ -8431,7 +9159,7 @@
           <a:lstStyle/>
           <a:p>
             <a:pPr algn="l">
-              <a:defRPr sz="1200" b="1">
+              <a:defRPr sz="1100" b="1">
                 <a:solidFill>
                   <a:srgbClr val="3B82F6"/>
                 </a:solidFill>
@@ -8446,14 +9174,14 @@
       </p:sp>
       <p:sp>
         <p:nvSpPr>
-          <p:cNvPr id="23" name="TextBox 22"/>
+          <p:cNvPr id="24" name="TextBox 23"/>
           <p:cNvSpPr txBox="1"/>
           <p:nvPr/>
         </p:nvSpPr>
         <p:spPr>
           <a:xfrm>
-            <a:off x="8869680" y="2816352"/>
-            <a:ext cx="3108960" cy="320040"/>
+            <a:off x="8412480" y="2944368"/>
+            <a:ext cx="3474720" cy="274320"/>
           </a:xfrm>
           <a:prstGeom prst="rect">
             <a:avLst/>
@@ -8482,14 +9210,14 @@
       </p:sp>
       <p:sp>
         <p:nvSpPr>
-          <p:cNvPr id="24" name="TextBox 23"/>
+          <p:cNvPr id="25" name="TextBox 24"/>
           <p:cNvSpPr txBox="1"/>
           <p:nvPr/>
         </p:nvSpPr>
         <p:spPr>
           <a:xfrm>
-            <a:off x="457200" y="3200400"/>
-            <a:ext cx="2560320" cy="320040"/>
+            <a:off x="457200" y="3291839"/>
+            <a:ext cx="2011680" cy="274320"/>
           </a:xfrm>
           <a:prstGeom prst="rect">
             <a:avLst/>
@@ -8503,7 +9231,7 @@
           <a:lstStyle/>
           <a:p>
             <a:pPr algn="l">
-              <a:defRPr sz="1200" b="1">
+              <a:defRPr sz="1100" b="1">
                 <a:solidFill>
                   <a:srgbClr val="3B82F6"/>
                 </a:solidFill>
@@ -8518,14 +9246,14 @@
       </p:sp>
       <p:sp>
         <p:nvSpPr>
-          <p:cNvPr id="25" name="TextBox 24"/>
+          <p:cNvPr id="26" name="TextBox 25"/>
           <p:cNvSpPr txBox="1"/>
           <p:nvPr/>
         </p:nvSpPr>
         <p:spPr>
           <a:xfrm>
-            <a:off x="3017520" y="3200400"/>
-            <a:ext cx="3108960" cy="320040"/>
+            <a:off x="2560320" y="3291839"/>
+            <a:ext cx="3474720" cy="274320"/>
           </a:xfrm>
           <a:prstGeom prst="rect">
             <a:avLst/>
@@ -8554,14 +9282,14 @@
       </p:sp>
       <p:sp>
         <p:nvSpPr>
-          <p:cNvPr id="26" name="TextBox 25"/>
+          <p:cNvPr id="27" name="TextBox 26"/>
           <p:cNvSpPr txBox="1"/>
           <p:nvPr/>
         </p:nvSpPr>
         <p:spPr>
           <a:xfrm>
-            <a:off x="6309360" y="3200400"/>
-            <a:ext cx="2560320" cy="320040"/>
+            <a:off x="6309360" y="3291839"/>
+            <a:ext cx="2011680" cy="274320"/>
           </a:xfrm>
           <a:prstGeom prst="rect">
             <a:avLst/>
@@ -8575,7 +9303,7 @@
           <a:lstStyle/>
           <a:p>
             <a:pPr algn="l">
-              <a:defRPr sz="1200" b="1">
+              <a:defRPr sz="1100" b="1">
                 <a:solidFill>
                   <a:srgbClr val="3B82F6"/>
                 </a:solidFill>
@@ -8590,14 +9318,14 @@
       </p:sp>
       <p:sp>
         <p:nvSpPr>
-          <p:cNvPr id="27" name="TextBox 26"/>
+          <p:cNvPr id="28" name="TextBox 27"/>
           <p:cNvSpPr txBox="1"/>
           <p:nvPr/>
         </p:nvSpPr>
         <p:spPr>
           <a:xfrm>
-            <a:off x="8869680" y="3200400"/>
-            <a:ext cx="3108960" cy="320040"/>
+            <a:off x="8412480" y="3291839"/>
+            <a:ext cx="3474720" cy="274320"/>
           </a:xfrm>
           <a:prstGeom prst="rect">
             <a:avLst/>
@@ -8626,14 +9354,14 @@
       </p:sp>
       <p:sp>
         <p:nvSpPr>
-          <p:cNvPr id="28" name="TextBox 27"/>
+          <p:cNvPr id="29" name="TextBox 28"/>
           <p:cNvSpPr txBox="1"/>
           <p:nvPr/>
         </p:nvSpPr>
         <p:spPr>
           <a:xfrm>
-            <a:off x="457200" y="3584448"/>
-            <a:ext cx="2560320" cy="320040"/>
+            <a:off x="457200" y="3639312"/>
+            <a:ext cx="2011680" cy="274320"/>
           </a:xfrm>
           <a:prstGeom prst="rect">
             <a:avLst/>
@@ -8647,7 +9375,7 @@
           <a:lstStyle/>
           <a:p>
             <a:pPr algn="l">
-              <a:defRPr sz="1200" b="1">
+              <a:defRPr sz="1100" b="1">
                 <a:solidFill>
                   <a:srgbClr val="3B82F6"/>
                 </a:solidFill>
@@ -8655,21 +9383,21 @@
               </a:defRPr>
             </a:pPr>
             <a:r>
-              <a:t>▸ DevOps &amp; Tools</a:t>
-            </a:r>
-          </a:p>
-        </p:txBody>
-      </p:sp>
-      <p:sp>
-        <p:nvSpPr>
-          <p:cNvPr id="29" name="TextBox 28"/>
+              <a:t>▸ DevOps</a:t>
+            </a:r>
+          </a:p>
+        </p:txBody>
+      </p:sp>
+      <p:sp>
+        <p:nvSpPr>
+          <p:cNvPr id="30" name="TextBox 29"/>
           <p:cNvSpPr txBox="1"/>
           <p:nvPr/>
         </p:nvSpPr>
         <p:spPr>
           <a:xfrm>
-            <a:off x="3017520" y="3584448"/>
-            <a:ext cx="3108960" cy="320040"/>
+            <a:off x="2560320" y="3639312"/>
+            <a:ext cx="3474720" cy="274320"/>
           </a:xfrm>
           <a:prstGeom prst="rect">
             <a:avLst/>
@@ -8691,21 +9419,21 @@
               </a:defRPr>
             </a:pPr>
             <a:r>
-              <a:t>Docker, docker-compose, Git, ESLint, Ruff, mypy, pytest, Vitest</a:t>
-            </a:r>
-          </a:p>
-        </p:txBody>
-      </p:sp>
-      <p:sp>
-        <p:nvSpPr>
-          <p:cNvPr id="30" name="TextBox 29"/>
+              <a:t>Docker, docker-compose, Git, ESLint, Ruff, mypy</a:t>
+            </a:r>
+          </a:p>
+        </p:txBody>
+      </p:sp>
+      <p:sp>
+        <p:nvSpPr>
+          <p:cNvPr id="31" name="TextBox 30"/>
           <p:cNvSpPr txBox="1"/>
           <p:nvPr/>
         </p:nvSpPr>
         <p:spPr>
           <a:xfrm>
-            <a:off x="6309360" y="3584448"/>
-            <a:ext cx="2560320" cy="320040"/>
+            <a:off x="6309360" y="3639312"/>
+            <a:ext cx="2011680" cy="274320"/>
           </a:xfrm>
           <a:prstGeom prst="rect">
             <a:avLst/>
@@ -8719,7 +9447,7 @@
           <a:lstStyle/>
           <a:p>
             <a:pPr algn="l">
-              <a:defRPr sz="1200" b="1">
+              <a:defRPr sz="1100" b="1">
                 <a:solidFill>
                   <a:srgbClr val="3B82F6"/>
                 </a:solidFill>
@@ -8734,14 +9462,14 @@
       </p:sp>
       <p:sp>
         <p:nvSpPr>
-          <p:cNvPr id="31" name="TextBox 30"/>
+          <p:cNvPr id="32" name="TextBox 31"/>
           <p:cNvSpPr txBox="1"/>
           <p:nvPr/>
         </p:nvSpPr>
         <p:spPr>
           <a:xfrm>
-            <a:off x="8869680" y="3584448"/>
-            <a:ext cx="3108960" cy="320040"/>
+            <a:off x="8412480" y="3639312"/>
+            <a:ext cx="3474720" cy="274320"/>
           </a:xfrm>
           <a:prstGeom prst="rect">
             <a:avLst/>
@@ -8763,7 +9491,7 @@
               </a:defRPr>
             </a:pPr>
             <a:r>
-              <a:t>pytest-asyncio, Vitest, React Testing Library, Locust (load test)</a:t>
+              <a:t>pytest-asyncio, Vitest, React Testing Library</a:t>
             </a:r>
           </a:p>
         </p:txBody>
@@ -8782,7 +9510,7 @@
     <p:bg>
       <p:bgPr>
         <a:solidFill>
-          <a:srgbClr val="F8FAFC"/>
+          <a:srgbClr val="070B15"/>
         </a:solidFill>
         <a:effectLst/>
       </p:bgPr>
@@ -8803,13 +9531,13 @@
         <p:spPr>
           <a:xfrm>
             <a:off x="0" y="0"/>
-            <a:ext cx="12191695" cy="1188720"/>
+            <a:ext cx="12191695" cy="1280160"/>
           </a:xfrm>
           <a:prstGeom prst="rect">
             <a:avLst/>
           </a:prstGeom>
           <a:solidFill>
-            <a:srgbClr val="0F172A"/>
+            <a:srgbClr val="0D1428"/>
           </a:solidFill>
           <a:ln>
             <a:noFill/>
@@ -8845,8 +9573,8 @@
         </p:nvSpPr>
         <p:spPr>
           <a:xfrm>
-            <a:off x="731520" y="320040"/>
-            <a:ext cx="9144000" cy="548640"/>
+            <a:off x="548640" y="320040"/>
+            <a:ext cx="5486400" cy="365760"/>
           </a:xfrm>
           <a:prstGeom prst="rect">
             <a:avLst/>
@@ -8860,29 +9588,65 @@
           <a:lstStyle/>
           <a:p>
             <a:pPr algn="l">
+              <a:defRPr sz="1300" b="0">
+                <a:solidFill>
+                  <a:srgbClr val="3B82F6"/>
+                </a:solidFill>
+                <a:latin typeface="Calibri"/>
+              </a:defRPr>
+            </a:pPr>
+            <a:r>
+              <a:t>✦  DATA</a:t>
+            </a:r>
+          </a:p>
+        </p:txBody>
+      </p:sp>
+      <p:sp>
+        <p:nvSpPr>
+          <p:cNvPr id="4" name="TextBox 3"/>
+          <p:cNvSpPr txBox="1"/>
+          <p:nvPr/>
+        </p:nvSpPr>
+        <p:spPr>
+          <a:xfrm>
+            <a:off x="548640" y="640080"/>
+            <a:ext cx="9144000" cy="548640"/>
+          </a:xfrm>
+          <a:prstGeom prst="rect">
+            <a:avLst/>
+          </a:prstGeom>
+          <a:noFill/>
+        </p:spPr>
+        <p:txBody>
+          <a:bodyPr wrap="square">
+            <a:spAutoFit/>
+          </a:bodyPr>
+          <a:lstStyle/>
+          <a:p>
+            <a:pPr algn="l">
               <a:defRPr sz="2800" b="1">
                 <a:solidFill>
-                  <a:srgbClr val="FFFFFF"/>
-                </a:solidFill>
-                <a:latin typeface="Calibri"/>
-              </a:defRPr>
-            </a:pPr>
-            <a:r>
-              <a:t>DATABASE &amp; VECTOR STORE</a:t>
-            </a:r>
-          </a:p>
-        </p:txBody>
-      </p:sp>
-      <p:sp>
-        <p:nvSpPr>
-          <p:cNvPr id="4" name="Rectangle 3"/>
+                  <a:srgbClr val="F1F5F9"/>
+                </a:solidFill>
+                <a:latin typeface="Calibri"/>
+              </a:defRPr>
+            </a:pPr>
+            <a:r>
+              <a:t>Database &amp; Vector Store</a:t>
+            </a:r>
+          </a:p>
+        </p:txBody>
+      </p:sp>
+      <p:sp>
+        <p:nvSpPr>
+          <p:cNvPr id="5" name="Rectangle 4"/>
           <p:cNvSpPr/>
           <p:nvPr/>
         </p:nvSpPr>
         <p:spPr>
           <a:xfrm>
-            <a:off x="731520" y="960120"/>
-            <a:ext cx="1097280" cy="54864"/>
+            <a:off x="548640" y="1097280"/>
+            <a:ext cx="731520" cy="36576"/>
           </a:xfrm>
           <a:prstGeom prst="rect">
             <a:avLst/>
@@ -8918,14 +9682,14 @@
       </p:sp>
       <p:sp>
         <p:nvSpPr>
-          <p:cNvPr id="5" name="TextBox 4"/>
+          <p:cNvPr id="6" name="TextBox 5"/>
           <p:cNvSpPr txBox="1"/>
           <p:nvPr/>
         </p:nvSpPr>
         <p:spPr>
           <a:xfrm>
             <a:off x="457200" y="1463040"/>
-            <a:ext cx="5486400" cy="365760"/>
+            <a:ext cx="4572000" cy="365760"/>
           </a:xfrm>
           <a:prstGeom prst="rect">
             <a:avLst/>
@@ -8939,35 +9703,37 @@
           <a:lstStyle/>
           <a:p>
             <a:pPr algn="l">
-              <a:defRPr sz="1800" b="1">
-                <a:solidFill>
-                  <a:srgbClr val="0F172A"/>
-                </a:solidFill>
-                <a:latin typeface="Calibri"/>
-              </a:defRPr>
-            </a:pPr>
-            <a:r>
-              <a:t>Relational Database (PostgreSQL / SQLite)</a:t>
-            </a:r>
-          </a:p>
-        </p:txBody>
-      </p:sp>
-      <p:sp>
-        <p:nvSpPr>
-          <p:cNvPr id="6" name="Rounded Rectangle 5"/>
+              <a:defRPr sz="1600" b="1">
+                <a:solidFill>
+                  <a:srgbClr val="F1F5F9"/>
+                </a:solidFill>
+                <a:latin typeface="Calibri"/>
+              </a:defRPr>
+            </a:pPr>
+            <a:r>
+              <a:t>Relational Database</a:t>
+            </a:r>
+          </a:p>
+        </p:txBody>
+      </p:sp>
+      <p:sp>
+        <p:nvSpPr>
+          <p:cNvPr id="7" name="Rounded Rectangle 6"/>
           <p:cNvSpPr/>
           <p:nvPr/>
         </p:nvSpPr>
         <p:spPr>
           <a:xfrm>
-            <a:off x="457200" y="2011680"/>
-            <a:ext cx="2560320" cy="1645920"/>
+            <a:off x="457200" y="1920240"/>
+            <a:ext cx="2651760" cy="1554480"/>
           </a:xfrm>
           <a:prstGeom prst="roundRect">
-            <a:avLst/>
+            <a:avLst>
+              <a:gd name="adj" fmla="val 4000"/>
+            </a:avLst>
           </a:prstGeom>
           <a:solidFill>
-            <a:srgbClr val="1E4073"/>
+            <a:srgbClr val="0D254A"/>
           </a:solidFill>
           <a:ln>
             <a:noFill/>
@@ -8988,51 +9754,65 @@
           </a:fontRef>
         </p:style>
         <p:txBody>
-          <a:bodyPr rtlCol="0" anchor="ctr" wrap="square" lIns="182880" rIns="182880" tIns="137160" bIns="137160"/>
+          <a:bodyPr rtlCol="0" anchor="ctr" wrap="square" lIns="182880" rIns="182880" tIns="164592" bIns="91440"/>
           <a:lstStyle/>
           <a:p>
             <a:pPr algn="ctr">
-              <a:defRPr sz="1200">
-                <a:solidFill>
-                  <a:srgbClr val="FFFFFF"/>
-                </a:solidFill>
-                <a:latin typeface="Calibri"/>
-              </a:defRPr>
-            </a:pPr>
-            <a:r>
-              <a:t>Orders</a:t>
+              <a:defRPr sz="1400" b="1">
+                <a:solidFill>
+                  <a:srgbClr val="3B82F6"/>
+                </a:solidFill>
+                <a:latin typeface="Calibri"/>
+              </a:defRPr>
+            </a:pPr>
+            <a:r>
+              <a:t>📋 Orders</a:t>
+            </a:r>
+          </a:p>
+          <a:p>
+            <a:pPr algn="ctr">
+              <a:spcBef>
+                <a:spcPts val="600"/>
+              </a:spcBef>
+              <a:defRPr sz="1100">
+                <a:solidFill>
+                  <a:srgbClr val="94A3B8"/>
+                </a:solidFill>
+                <a:latin typeface="Calibri"/>
+              </a:defRPr>
+            </a:pPr>
+            <a:r>
+              <a:t>Order ID, Customer, Items</a:t>
             </a:r>
             <a:br/>
             <a:r>
-              <a:t>• Order ID, Customer, Items</a:t>
+              <a:t>Status, Total, Timeline</a:t>
             </a:r>
             <a:br/>
             <a:r>
-              <a:t>• Status, Total, Timeline</a:t>
-            </a:r>
-            <a:br/>
-            <a:r>
-              <a:t>• Agent Assignments</a:t>
-            </a:r>
-          </a:p>
-        </p:txBody>
-      </p:sp>
-      <p:sp>
-        <p:nvSpPr>
-          <p:cNvPr id="7" name="Rounded Rectangle 6"/>
+              <a:t>Agent Assignments</a:t>
+            </a:r>
+          </a:p>
+        </p:txBody>
+      </p:sp>
+      <p:sp>
+        <p:nvSpPr>
+          <p:cNvPr id="8" name="Rounded Rectangle 7"/>
           <p:cNvSpPr/>
           <p:nvPr/>
         </p:nvSpPr>
         <p:spPr>
           <a:xfrm>
-            <a:off x="3291840" y="2011680"/>
-            <a:ext cx="2560320" cy="1645920"/>
+            <a:off x="3383280" y="1920240"/>
+            <a:ext cx="2651760" cy="1554480"/>
           </a:xfrm>
           <a:prstGeom prst="roundRect">
-            <a:avLst/>
+            <a:avLst>
+              <a:gd name="adj" fmla="val 4000"/>
+            </a:avLst>
           </a:prstGeom>
           <a:solidFill>
-            <a:srgbClr val="1E4073"/>
+            <a:srgbClr val="0D254A"/>
           </a:solidFill>
           <a:ln>
             <a:noFill/>
@@ -9053,51 +9833,65 @@
           </a:fontRef>
         </p:style>
         <p:txBody>
-          <a:bodyPr rtlCol="0" anchor="ctr" wrap="square" lIns="182880" rIns="182880" tIns="137160" bIns="137160"/>
+          <a:bodyPr rtlCol="0" anchor="ctr" wrap="square" lIns="182880" rIns="182880" tIns="164592" bIns="91440"/>
           <a:lstStyle/>
           <a:p>
             <a:pPr algn="ctr">
-              <a:defRPr sz="1200">
-                <a:solidFill>
-                  <a:srgbClr val="FFFFFF"/>
-                </a:solidFill>
-                <a:latin typeface="Calibri"/>
-              </a:defRPr>
-            </a:pPr>
-            <a:r>
-              <a:t>Shipments</a:t>
+              <a:defRPr sz="1400" b="1">
+                <a:solidFill>
+                  <a:srgbClr val="3B82F6"/>
+                </a:solidFill>
+                <a:latin typeface="Calibri"/>
+              </a:defRPr>
+            </a:pPr>
+            <a:r>
+              <a:t>📦 Shipments</a:t>
+            </a:r>
+          </a:p>
+          <a:p>
+            <a:pPr algn="ctr">
+              <a:spcBef>
+                <a:spcPts val="600"/>
+              </a:spcBef>
+              <a:defRPr sz="1100">
+                <a:solidFill>
+                  <a:srgbClr val="94A3B8"/>
+                </a:solidFill>
+                <a:latin typeface="Calibri"/>
+              </a:defRPr>
+            </a:pPr>
+            <a:r>
+              <a:t>Shipment ID, Carrier</a:t>
             </a:r>
             <a:br/>
             <a:r>
-              <a:t>• Shipment ID, Carrier</a:t>
+              <a:t>Tracking, Status</a:t>
             </a:r>
             <a:br/>
             <a:r>
-              <a:t>• Tracking, Status</a:t>
-            </a:r>
-            <a:br/>
-            <a:r>
-              <a:t>• Delays, Reroutes</a:t>
-            </a:r>
-          </a:p>
-        </p:txBody>
-      </p:sp>
-      <p:sp>
-        <p:nvSpPr>
-          <p:cNvPr id="8" name="Rounded Rectangle 7"/>
+              <a:t>Delays, Reroutes</a:t>
+            </a:r>
+          </a:p>
+        </p:txBody>
+      </p:sp>
+      <p:sp>
+        <p:nvSpPr>
+          <p:cNvPr id="9" name="Rounded Rectangle 8"/>
           <p:cNvSpPr/>
           <p:nvPr/>
         </p:nvSpPr>
         <p:spPr>
           <a:xfrm>
-            <a:off x="6126480" y="2011680"/>
-            <a:ext cx="2560320" cy="1645920"/>
+            <a:off x="6309360" y="1920240"/>
+            <a:ext cx="2651760" cy="1554480"/>
           </a:xfrm>
           <a:prstGeom prst="roundRect">
-            <a:avLst/>
+            <a:avLst>
+              <a:gd name="adj" fmla="val 4000"/>
+            </a:avLst>
           </a:prstGeom>
           <a:solidFill>
-            <a:srgbClr val="1E4073"/>
+            <a:srgbClr val="0D254A"/>
           </a:solidFill>
           <a:ln>
             <a:noFill/>
@@ -9118,51 +9912,65 @@
           </a:fontRef>
         </p:style>
         <p:txBody>
-          <a:bodyPr rtlCol="0" anchor="ctr" wrap="square" lIns="182880" rIns="182880" tIns="137160" bIns="137160"/>
+          <a:bodyPr rtlCol="0" anchor="ctr" wrap="square" lIns="182880" rIns="182880" tIns="164592" bIns="91440"/>
           <a:lstStyle/>
           <a:p>
             <a:pPr algn="ctr">
-              <a:defRPr sz="1200">
-                <a:solidFill>
-                  <a:srgbClr val="FFFFFF"/>
-                </a:solidFill>
-                <a:latin typeface="Calibri"/>
-              </a:defRPr>
-            </a:pPr>
-            <a:r>
-              <a:t>Fulfillment Centers</a:t>
+              <a:defRPr sz="1400" b="1">
+                <a:solidFill>
+                  <a:srgbClr val="3B82F6"/>
+                </a:solidFill>
+                <a:latin typeface="Calibri"/>
+              </a:defRPr>
+            </a:pPr>
+            <a:r>
+              <a:t>🏭 Fulfillment Centers</a:t>
+            </a:r>
+          </a:p>
+          <a:p>
+            <a:pPr algn="ctr">
+              <a:spcBef>
+                <a:spcPts val="600"/>
+              </a:spcBef>
+              <a:defRPr sz="1100">
+                <a:solidFill>
+                  <a:srgbClr val="94A3B8"/>
+                </a:solidFill>
+                <a:latin typeface="Calibri"/>
+              </a:defRPr>
+            </a:pPr>
+            <a:r>
+              <a:t>Location, Capacity</a:t>
             </a:r>
             <a:br/>
             <a:r>
-              <a:t>• Location, Capacity</a:t>
+              <a:t>Active Hours</a:t>
             </a:r>
             <a:br/>
             <a:r>
-              <a:t>• Active Hours</a:t>
-            </a:r>
-            <a:br/>
-            <a:r>
-              <a:t>• Carrier Partners</a:t>
-            </a:r>
-          </a:p>
-        </p:txBody>
-      </p:sp>
-      <p:sp>
-        <p:nvSpPr>
-          <p:cNvPr id="9" name="Rounded Rectangle 8"/>
+              <a:t>Carrier Partners</a:t>
+            </a:r>
+          </a:p>
+        </p:txBody>
+      </p:sp>
+      <p:sp>
+        <p:nvSpPr>
+          <p:cNvPr id="10" name="Rounded Rectangle 9"/>
           <p:cNvSpPr/>
           <p:nvPr/>
         </p:nvSpPr>
         <p:spPr>
           <a:xfrm>
-            <a:off x="8961120" y="2011680"/>
-            <a:ext cx="2560320" cy="1645920"/>
+            <a:off x="9235440" y="1920240"/>
+            <a:ext cx="2651760" cy="1554480"/>
           </a:xfrm>
           <a:prstGeom prst="roundRect">
-            <a:avLst/>
+            <a:avLst>
+              <a:gd name="adj" fmla="val 4000"/>
+            </a:avLst>
           </a:prstGeom>
           <a:solidFill>
-            <a:srgbClr val="1E4073"/>
+            <a:srgbClr val="0D254A"/>
           </a:solidFill>
           <a:ln>
             <a:noFill/>
@@ -9183,45 +9991,57 @@
           </a:fontRef>
         </p:style>
         <p:txBody>
-          <a:bodyPr rtlCol="0" anchor="ctr" wrap="square" lIns="182880" rIns="182880" tIns="137160" bIns="137160"/>
+          <a:bodyPr rtlCol="0" anchor="ctr" wrap="square" lIns="182880" rIns="182880" tIns="164592" bIns="91440"/>
           <a:lstStyle/>
           <a:p>
             <a:pPr algn="ctr">
-              <a:defRPr sz="1200">
-                <a:solidFill>
-                  <a:srgbClr val="FFFFFF"/>
-                </a:solidFill>
-                <a:latin typeface="Calibri"/>
-              </a:defRPr>
-            </a:pPr>
-            <a:r>
-              <a:t>Carrier Rates</a:t>
+              <a:defRPr sz="1400" b="1">
+                <a:solidFill>
+                  <a:srgbClr val="3B82F6"/>
+                </a:solidFill>
+                <a:latin typeface="Calibri"/>
+              </a:defRPr>
+            </a:pPr>
+            <a:r>
+              <a:t>💰 Carrier Rates</a:t>
+            </a:r>
+          </a:p>
+          <a:p>
+            <a:pPr algn="ctr">
+              <a:spcBef>
+                <a:spcPts val="600"/>
+              </a:spcBef>
+              <a:defRPr sz="1100">
+                <a:solidFill>
+                  <a:srgbClr val="94A3B8"/>
+                </a:solidFill>
+                <a:latin typeface="Calibri"/>
+              </a:defRPr>
+            </a:pPr>
+            <a:r>
+              <a:t>Rate Tables</a:t>
             </a:r>
             <a:br/>
             <a:r>
-              <a:t>• Rate Tables</a:t>
+              <a:t>Service Levels</a:t>
             </a:r>
             <a:br/>
             <a:r>
-              <a:t>• Service Levels</a:t>
-            </a:r>
-            <a:br/>
-            <a:r>
-              <a:t>• Cost per Zone</a:t>
-            </a:r>
-          </a:p>
-        </p:txBody>
-      </p:sp>
-      <p:sp>
-        <p:nvSpPr>
-          <p:cNvPr id="10" name="TextBox 9"/>
+              <a:t>Cost per Zone</a:t>
+            </a:r>
+          </a:p>
+        </p:txBody>
+      </p:sp>
+      <p:sp>
+        <p:nvSpPr>
+          <p:cNvPr id="11" name="TextBox 10"/>
           <p:cNvSpPr txBox="1"/>
           <p:nvPr/>
         </p:nvSpPr>
         <p:spPr>
           <a:xfrm>
-            <a:off x="457200" y="3931920"/>
-            <a:ext cx="5486400" cy="365760"/>
+            <a:off x="457200" y="3749039"/>
+            <a:ext cx="7315200" cy="365760"/>
           </a:xfrm>
           <a:prstGeom prst="rect">
             <a:avLst/>
@@ -9235,35 +10055,37 @@
           <a:lstStyle/>
           <a:p>
             <a:pPr algn="l">
-              <a:defRPr sz="1800" b="1">
-                <a:solidFill>
-                  <a:srgbClr val="0F172A"/>
-                </a:solidFill>
-                <a:latin typeface="Calibri"/>
-              </a:defRPr>
-            </a:pPr>
-            <a:r>
-              <a:t>Vector Database (Qdrant) - 1536-dimension embeddings</a:t>
-            </a:r>
-          </a:p>
-        </p:txBody>
-      </p:sp>
-      <p:sp>
-        <p:nvSpPr>
-          <p:cNvPr id="11" name="Rounded Rectangle 10"/>
+              <a:defRPr sz="1600" b="1">
+                <a:solidFill>
+                  <a:srgbClr val="F1F5F9"/>
+                </a:solidFill>
+                <a:latin typeface="Calibri"/>
+              </a:defRPr>
+            </a:pPr>
+            <a:r>
+              <a:t>Vector Database (Qdrant) — 1536-dimension embeddings</a:t>
+            </a:r>
+          </a:p>
+        </p:txBody>
+      </p:sp>
+      <p:sp>
+        <p:nvSpPr>
+          <p:cNvPr id="12" name="Rounded Rectangle 11"/>
           <p:cNvSpPr/>
           <p:nvPr/>
         </p:nvSpPr>
         <p:spPr>
           <a:xfrm>
-            <a:off x="457200" y="4480560"/>
-            <a:ext cx="2560320" cy="1463040"/>
+            <a:off x="457200" y="4206240"/>
+            <a:ext cx="2651760" cy="1554480"/>
           </a:xfrm>
           <a:prstGeom prst="roundRect">
-            <a:avLst/>
+            <a:avLst>
+              <a:gd name="adj" fmla="val 4000"/>
+            </a:avLst>
           </a:prstGeom>
           <a:solidFill>
-            <a:srgbClr val="7C3AED"/>
+            <a:srgbClr val="1E0A3A"/>
           </a:solidFill>
           <a:ln>
             <a:noFill/>
@@ -9284,30 +10106,42 @@
           </a:fontRef>
         </p:style>
         <p:txBody>
-          <a:bodyPr rtlCol="0" anchor="ctr" wrap="square" lIns="182880" rIns="182880" tIns="137160" bIns="137160"/>
+          <a:bodyPr rtlCol="0" anchor="ctr" wrap="square" lIns="182880" rIns="182880" tIns="164592" bIns="91440"/>
           <a:lstStyle/>
           <a:p>
             <a:pPr algn="ctr">
-              <a:defRPr sz="1200">
-                <a:solidFill>
-                  <a:srgbClr val="FFFFFF"/>
-                </a:solidFill>
-                <a:latin typeface="Calibri"/>
-              </a:defRPr>
-            </a:pPr>
-            <a:r>
-              <a:t>shipment_events</a:t>
+              <a:defRPr sz="1400" b="1">
+                <a:solidFill>
+                  <a:srgbClr val="8B5CF6"/>
+                </a:solidFill>
+                <a:latin typeface="Calibri"/>
+              </a:defRPr>
+            </a:pPr>
+            <a:r>
+              <a:t>🚚 shipment_events</a:t>
+            </a:r>
+          </a:p>
+          <a:p>
+            <a:pPr algn="ctr">
+              <a:spcBef>
+                <a:spcPts val="600"/>
+              </a:spcBef>
+              <a:defRPr sz="1100">
+                <a:solidFill>
+                  <a:srgbClr val="94A3B8"/>
+                </a:solidFill>
+                <a:latin typeface="Calibri"/>
+              </a:defRPr>
+            </a:pPr>
+            <a:r>
+              <a:t>Vector embeddings of</a:t>
             </a:r>
             <a:br/>
             <a:r>
-              <a:t>Vector embeddings of</a:t>
+              <a:t>shipment tracking events</a:t>
             </a:r>
             <a:br/>
             <a:r>
-              <a:t>shipment tracking events</a:t>
-            </a:r>
-            <a:br/>
-            <a:r>
               <a:t>for similarity search</a:t>
             </a:r>
           </a:p>
@@ -9315,20 +10149,22 @@
       </p:sp>
       <p:sp>
         <p:nvSpPr>
-          <p:cNvPr id="12" name="Rounded Rectangle 11"/>
+          <p:cNvPr id="13" name="Rounded Rectangle 12"/>
           <p:cNvSpPr/>
           <p:nvPr/>
         </p:nvSpPr>
         <p:spPr>
           <a:xfrm>
-            <a:off x="3291840" y="4480560"/>
-            <a:ext cx="2560320" cy="1463040"/>
+            <a:off x="3383280" y="4206240"/>
+            <a:ext cx="2651760" cy="1554480"/>
           </a:xfrm>
           <a:prstGeom prst="roundRect">
-            <a:avLst/>
+            <a:avLst>
+              <a:gd name="adj" fmla="val 4000"/>
+            </a:avLst>
           </a:prstGeom>
           <a:solidFill>
-            <a:srgbClr val="7C3AED"/>
+            <a:srgbClr val="1E0A3A"/>
           </a:solidFill>
           <a:ln>
             <a:noFill/>
@@ -9349,30 +10185,42 @@
           </a:fontRef>
         </p:style>
         <p:txBody>
-          <a:bodyPr rtlCol="0" anchor="ctr" wrap="square" lIns="182880" rIns="182880" tIns="137160" bIns="137160"/>
+          <a:bodyPr rtlCol="0" anchor="ctr" wrap="square" lIns="182880" rIns="182880" tIns="164592" bIns="91440"/>
           <a:lstStyle/>
           <a:p>
             <a:pPr algn="ctr">
-              <a:defRPr sz="1200">
-                <a:solidFill>
-                  <a:srgbClr val="FFFFFF"/>
-                </a:solidFill>
-                <a:latin typeface="Calibri"/>
-              </a:defRPr>
-            </a:pPr>
-            <a:r>
-              <a:t>product_catalog</a:t>
+              <a:defRPr sz="1400" b="1">
+                <a:solidFill>
+                  <a:srgbClr val="8B5CF6"/>
+                </a:solidFill>
+                <a:latin typeface="Calibri"/>
+              </a:defRPr>
+            </a:pPr>
+            <a:r>
+              <a:t>📦 product_catalog</a:t>
+            </a:r>
+          </a:p>
+          <a:p>
+            <a:pPr algn="ctr">
+              <a:spcBef>
+                <a:spcPts val="600"/>
+              </a:spcBef>
+              <a:defRPr sz="1100">
+                <a:solidFill>
+                  <a:srgbClr val="94A3B8"/>
+                </a:solidFill>
+                <a:latin typeface="Calibri"/>
+              </a:defRPr>
+            </a:pPr>
+            <a:r>
+              <a:t>Product descriptions &amp;</a:t>
             </a:r>
             <a:br/>
             <a:r>
-              <a:t>Product descriptions &amp;</a:t>
+              <a:t>features as vectors</a:t>
             </a:r>
             <a:br/>
             <a:r>
-              <a:t>features as vectors</a:t>
-            </a:r>
-            <a:br/>
-            <a:r>
               <a:t>for semantic search</a:t>
             </a:r>
           </a:p>
@@ -9380,20 +10228,22 @@
       </p:sp>
       <p:sp>
         <p:nvSpPr>
-          <p:cNvPr id="13" name="Rounded Rectangle 12"/>
+          <p:cNvPr id="14" name="Rounded Rectangle 13"/>
           <p:cNvSpPr/>
           <p:nvPr/>
         </p:nvSpPr>
         <p:spPr>
           <a:xfrm>
-            <a:off x="6126480" y="4480560"/>
-            <a:ext cx="2560320" cy="1463040"/>
+            <a:off x="6309360" y="4206240"/>
+            <a:ext cx="2651760" cy="1554480"/>
           </a:xfrm>
           <a:prstGeom prst="roundRect">
-            <a:avLst/>
+            <a:avLst>
+              <a:gd name="adj" fmla="val 4000"/>
+            </a:avLst>
           </a:prstGeom>
           <a:solidFill>
-            <a:srgbClr val="7C3AED"/>
+            <a:srgbClr val="1E0A3A"/>
           </a:solidFill>
           <a:ln>
             <a:noFill/>
@@ -9414,30 +10264,42 @@
           </a:fontRef>
         </p:style>
         <p:txBody>
-          <a:bodyPr rtlCol="0" anchor="ctr" wrap="square" lIns="182880" rIns="182880" tIns="137160" bIns="137160"/>
+          <a:bodyPr rtlCol="0" anchor="ctr" wrap="square" lIns="182880" rIns="182880" tIns="164592" bIns="91440"/>
           <a:lstStyle/>
           <a:p>
             <a:pPr algn="ctr">
-              <a:defRPr sz="1200">
-                <a:solidFill>
-                  <a:srgbClr val="FFFFFF"/>
-                </a:solidFill>
-                <a:latin typeface="Calibri"/>
-              </a:defRPr>
-            </a:pPr>
-            <a:r>
-              <a:t>customer_order_history</a:t>
+              <a:defRPr sz="1400" b="1">
+                <a:solidFill>
+                  <a:srgbClr val="8B5CF6"/>
+                </a:solidFill>
+                <a:latin typeface="Calibri"/>
+              </a:defRPr>
+            </a:pPr>
+            <a:r>
+              <a:t>👤 customer_order_history</a:t>
+            </a:r>
+          </a:p>
+          <a:p>
+            <a:pPr algn="ctr">
+              <a:spcBef>
+                <a:spcPts val="600"/>
+              </a:spcBef>
+              <a:defRPr sz="1100">
+                <a:solidFill>
+                  <a:srgbClr val="94A3B8"/>
+                </a:solidFill>
+                <a:latin typeface="Calibri"/>
+              </a:defRPr>
+            </a:pPr>
+            <a:r>
+              <a:t>Customer patterns &amp;</a:t>
             </a:r>
             <a:br/>
             <a:r>
-              <a:t>Customer patterns &amp;</a:t>
+              <a:t>preferences for</a:t>
             </a:r>
             <a:br/>
             <a:r>
-              <a:t>preferences for</a:t>
-            </a:r>
-            <a:br/>
-            <a:r>
               <a:t>personalized routing</a:t>
             </a:r>
           </a:p>
@@ -9445,20 +10307,22 @@
       </p:sp>
       <p:sp>
         <p:nvSpPr>
-          <p:cNvPr id="14" name="Rounded Rectangle 13"/>
+          <p:cNvPr id="15" name="Rounded Rectangle 14"/>
           <p:cNvSpPr/>
           <p:nvPr/>
         </p:nvSpPr>
         <p:spPr>
           <a:xfrm>
-            <a:off x="8961120" y="4480560"/>
-            <a:ext cx="2560320" cy="1463040"/>
+            <a:off x="9235440" y="4206240"/>
+            <a:ext cx="2651760" cy="1554480"/>
           </a:xfrm>
           <a:prstGeom prst="roundRect">
-            <a:avLst/>
+            <a:avLst>
+              <a:gd name="adj" fmla="val 4000"/>
+            </a:avLst>
           </a:prstGeom>
           <a:solidFill>
-            <a:srgbClr val="7C3AED"/>
+            <a:srgbClr val="1E0A3A"/>
           </a:solidFill>
           <a:ln>
             <a:noFill/>
@@ -9479,30 +10343,42 @@
           </a:fontRef>
         </p:style>
         <p:txBody>
-          <a:bodyPr rtlCol="0" anchor="ctr" wrap="square" lIns="182880" rIns="182880" tIns="137160" bIns="137160"/>
+          <a:bodyPr rtlCol="0" anchor="ctr" wrap="square" lIns="182880" rIns="182880" tIns="164592" bIns="91440"/>
           <a:lstStyle/>
           <a:p>
             <a:pPr algn="ctr">
-              <a:defRPr sz="1200">
-                <a:solidFill>
-                  <a:srgbClr val="FFFFFF"/>
-                </a:solidFill>
-                <a:latin typeface="Calibri"/>
-              </a:defRPr>
-            </a:pPr>
-            <a:r>
-              <a:t>agent_decisions</a:t>
+              <a:defRPr sz="1400" b="1">
+                <a:solidFill>
+                  <a:srgbClr val="8B5CF6"/>
+                </a:solidFill>
+                <a:latin typeface="Calibri"/>
+              </a:defRPr>
+            </a:pPr>
+            <a:r>
+              <a:t>🧠 agent_decisions</a:t>
+            </a:r>
+          </a:p>
+          <a:p>
+            <a:pPr algn="ctr">
+              <a:spcBef>
+                <a:spcPts val="600"/>
+              </a:spcBef>
+              <a:defRPr sz="1100">
+                <a:solidFill>
+                  <a:srgbClr val="94A3B8"/>
+                </a:solidFill>
+                <a:latin typeface="Calibri"/>
+              </a:defRPr>
+            </a:pPr>
+            <a:r>
+              <a:t>Agent reasoning traces</a:t>
             </a:r>
             <a:br/>
             <a:r>
-              <a:t>Agent reasoning traces</a:t>
+              <a:t>for audit &amp; continuous</a:t>
             </a:r>
             <a:br/>
             <a:r>
-              <a:t>for audit &amp; continuous</a:t>
-            </a:r>
-            <a:br/>
-            <a:r>
               <a:t>improvement</a:t>
             </a:r>
           </a:p>
@@ -9510,14 +10386,14 @@
       </p:sp>
       <p:sp>
         <p:nvSpPr>
-          <p:cNvPr id="15" name="TextBox 14"/>
+          <p:cNvPr id="16" name="TextBox 15"/>
           <p:cNvSpPr txBox="1"/>
           <p:nvPr/>
         </p:nvSpPr>
         <p:spPr>
           <a:xfrm>
-            <a:off x="457200" y="6217920"/>
-            <a:ext cx="10972800" cy="365760"/>
+            <a:off x="457200" y="6035040"/>
+            <a:ext cx="10972800" cy="274320"/>
           </a:xfrm>
           <a:prstGeom prst="rect">
             <a:avLst/>
@@ -9531,9 +10407,9 @@
           <a:lstStyle/>
           <a:p>
             <a:pPr algn="l">
-              <a:defRPr sz="1200" b="0">
-                <a:solidFill>
-                  <a:srgbClr val="6B728B"/>
+              <a:defRPr sz="1100" b="0">
+                <a:solidFill>
+                  <a:srgbClr val="475669"/>
                 </a:solidFill>
                 <a:latin typeface="Calibri"/>
               </a:defRPr>
@@ -9558,7 +10434,7 @@
     <p:bg>
       <p:bgPr>
         <a:solidFill>
-          <a:srgbClr val="0F172A"/>
+          <a:srgbClr val="070B15"/>
         </a:solidFill>
         <a:effectLst/>
       </p:bgPr>
@@ -9578,8 +10454,8 @@
         </p:nvSpPr>
         <p:spPr>
           <a:xfrm>
-            <a:off x="731520" y="365760"/>
-            <a:ext cx="9144000" cy="548640"/>
+            <a:off x="548640" y="365760"/>
+            <a:ext cx="5486400" cy="365760"/>
           </a:xfrm>
           <a:prstGeom prst="rect">
             <a:avLst/>
@@ -9593,29 +10469,65 @@
           <a:lstStyle/>
           <a:p>
             <a:pPr algn="l">
+              <a:defRPr sz="1300" b="0">
+                <a:solidFill>
+                  <a:srgbClr val="3B82F6"/>
+                </a:solidFill>
+                <a:latin typeface="Calibri"/>
+              </a:defRPr>
+            </a:pPr>
+            <a:r>
+              <a:t>✦  WORKFLOW</a:t>
+            </a:r>
+          </a:p>
+        </p:txBody>
+      </p:sp>
+      <p:sp>
+        <p:nvSpPr>
+          <p:cNvPr id="3" name="TextBox 2"/>
+          <p:cNvSpPr txBox="1"/>
+          <p:nvPr/>
+        </p:nvSpPr>
+        <p:spPr>
+          <a:xfrm>
+            <a:off x="548640" y="731520"/>
+            <a:ext cx="9144000" cy="548640"/>
+          </a:xfrm>
+          <a:prstGeom prst="rect">
+            <a:avLst/>
+          </a:prstGeom>
+          <a:noFill/>
+        </p:spPr>
+        <p:txBody>
+          <a:bodyPr wrap="square">
+            <a:spAutoFit/>
+          </a:bodyPr>
+          <a:lstStyle/>
+          <a:p>
+            <a:pPr algn="l">
               <a:defRPr sz="2800" b="1">
                 <a:solidFill>
-                  <a:srgbClr val="FFFFFF"/>
-                </a:solidFill>
-                <a:latin typeface="Calibri"/>
-              </a:defRPr>
-            </a:pPr>
-            <a:r>
-              <a:t>ORDER FULFILLMENT WORKFLOW</a:t>
-            </a:r>
-          </a:p>
-        </p:txBody>
-      </p:sp>
-      <p:sp>
-        <p:nvSpPr>
-          <p:cNvPr id="3" name="Rectangle 2"/>
+                  <a:srgbClr val="F1F5F9"/>
+                </a:solidFill>
+                <a:latin typeface="Calibri"/>
+              </a:defRPr>
+            </a:pPr>
+            <a:r>
+              <a:t>Order Fulfillment Workflow</a:t>
+            </a:r>
+          </a:p>
+        </p:txBody>
+      </p:sp>
+      <p:sp>
+        <p:nvSpPr>
+          <p:cNvPr id="4" name="Rectangle 3"/>
           <p:cNvSpPr/>
           <p:nvPr/>
         </p:nvSpPr>
         <p:spPr>
           <a:xfrm>
-            <a:off x="731520" y="1005840"/>
-            <a:ext cx="1097280" cy="54864"/>
+            <a:off x="548640" y="1280160"/>
+            <a:ext cx="731520" cy="36576"/>
           </a:xfrm>
           <a:prstGeom prst="rect">
             <a:avLst/>
@@ -9651,14 +10563,14 @@
       </p:sp>
       <p:sp>
         <p:nvSpPr>
-          <p:cNvPr id="4" name="Oval 3"/>
+          <p:cNvPr id="5" name="Oval 4"/>
           <p:cNvSpPr/>
           <p:nvPr/>
         </p:nvSpPr>
         <p:spPr>
           <a:xfrm>
-            <a:off x="1554480" y="1371600"/>
-            <a:ext cx="457200" cy="457200"/>
+            <a:off x="1828800" y="1554480"/>
+            <a:ext cx="502920" cy="502920"/>
           </a:xfrm>
           <a:prstGeom prst="ellipse">
             <a:avLst/>
@@ -9689,12 +10601,9 @@
           <a:lstStyle/>
           <a:p>
             <a:pPr algn="ctr">
-              <a:spcBef>
-                <a:spcPts val="0"/>
-              </a:spcBef>
-              <a:defRPr sz="1600" b="1">
-                <a:solidFill>
-                  <a:srgbClr val="FFFFFF"/>
+              <a:defRPr sz="1800" b="1">
+                <a:solidFill>
+                  <a:srgbClr val="F1F5F9"/>
                 </a:solidFill>
                 <a:latin typeface="Calibri"/>
               </a:defRPr>
@@ -9707,14 +10616,14 @@
       </p:sp>
       <p:sp>
         <p:nvSpPr>
-          <p:cNvPr id="5" name="TextBox 4"/>
+          <p:cNvPr id="6" name="TextBox 5"/>
           <p:cNvSpPr txBox="1"/>
           <p:nvPr/>
         </p:nvSpPr>
         <p:spPr>
           <a:xfrm>
-            <a:off x="457200" y="2011680"/>
-            <a:ext cx="3474720" cy="365760"/>
+            <a:off x="457200" y="2240280"/>
+            <a:ext cx="3474720" cy="320040"/>
           </a:xfrm>
           <a:prstGeom prst="rect">
             <a:avLst/>
@@ -9728,7 +10637,7 @@
           <a:lstStyle/>
           <a:p>
             <a:pPr algn="ctr">
-              <a:defRPr sz="1500" b="1">
+              <a:defRPr sz="1600" b="1">
                 <a:solidFill>
                   <a:srgbClr val="3B82F6"/>
                 </a:solidFill>
@@ -9743,14 +10652,14 @@
       </p:sp>
       <p:sp>
         <p:nvSpPr>
-          <p:cNvPr id="6" name="TextBox 5"/>
+          <p:cNvPr id="7" name="TextBox 6"/>
           <p:cNvSpPr txBox="1"/>
           <p:nvPr/>
         </p:nvSpPr>
         <p:spPr>
           <a:xfrm>
-            <a:off x="457200" y="2377440"/>
-            <a:ext cx="3474720" cy="548640"/>
+            <a:off x="457200" y="2560320"/>
+            <a:ext cx="3474720" cy="457200"/>
           </a:xfrm>
           <a:prstGeom prst="rect">
             <a:avLst/>
@@ -9764,7 +10673,7 @@
           <a:lstStyle/>
           <a:p>
             <a:pPr algn="ctr">
-              <a:defRPr sz="1100" b="0">
+              <a:defRPr sz="1200" b="0">
                 <a:solidFill>
                   <a:srgbClr val="94A3B8"/>
                 </a:solidFill>
@@ -9783,14 +10692,14 @@
       </p:sp>
       <p:sp>
         <p:nvSpPr>
-          <p:cNvPr id="7" name="Oval 6"/>
+          <p:cNvPr id="8" name="Oval 7"/>
           <p:cNvSpPr/>
           <p:nvPr/>
         </p:nvSpPr>
         <p:spPr>
           <a:xfrm>
-            <a:off x="5394960" y="1371600"/>
-            <a:ext cx="457200" cy="457200"/>
+            <a:off x="5669280" y="1554480"/>
+            <a:ext cx="502920" cy="502920"/>
           </a:xfrm>
           <a:prstGeom prst="ellipse">
             <a:avLst/>
@@ -9821,12 +10730,9 @@
           <a:lstStyle/>
           <a:p>
             <a:pPr algn="ctr">
-              <a:spcBef>
-                <a:spcPts val="0"/>
-              </a:spcBef>
-              <a:defRPr sz="1600" b="1">
-                <a:solidFill>
-                  <a:srgbClr val="FFFFFF"/>
+              <a:defRPr sz="1800" b="1">
+                <a:solidFill>
+                  <a:srgbClr val="F1F5F9"/>
                 </a:solidFill>
                 <a:latin typeface="Calibri"/>
               </a:defRPr>
@@ -9839,14 +10745,14 @@
       </p:sp>
       <p:sp>
         <p:nvSpPr>
-          <p:cNvPr id="8" name="TextBox 7"/>
+          <p:cNvPr id="9" name="TextBox 8"/>
           <p:cNvSpPr txBox="1"/>
           <p:nvPr/>
         </p:nvSpPr>
         <p:spPr>
           <a:xfrm>
-            <a:off x="4297680" y="2011680"/>
-            <a:ext cx="3474720" cy="365760"/>
+            <a:off x="4297680" y="2240280"/>
+            <a:ext cx="3474720" cy="320040"/>
           </a:xfrm>
           <a:prstGeom prst="rect">
             <a:avLst/>
@@ -9860,7 +10766,7 @@
           <a:lstStyle/>
           <a:p>
             <a:pPr algn="ctr">
-              <a:defRPr sz="1500" b="1">
+              <a:defRPr sz="1600" b="1">
                 <a:solidFill>
                   <a:srgbClr val="22C55E"/>
                 </a:solidFill>
@@ -9875,14 +10781,14 @@
       </p:sp>
       <p:sp>
         <p:nvSpPr>
-          <p:cNvPr id="9" name="TextBox 8"/>
+          <p:cNvPr id="10" name="TextBox 9"/>
           <p:cNvSpPr txBox="1"/>
           <p:nvPr/>
         </p:nvSpPr>
         <p:spPr>
           <a:xfrm>
-            <a:off x="4297680" y="2377440"/>
-            <a:ext cx="3474720" cy="548640"/>
+            <a:off x="4297680" y="2560320"/>
+            <a:ext cx="3474720" cy="457200"/>
           </a:xfrm>
           <a:prstGeom prst="rect">
             <a:avLst/>
@@ -9896,7 +10802,7 @@
           <a:lstStyle/>
           <a:p>
             <a:pPr algn="ctr">
-              <a:defRPr sz="1100" b="0">
+              <a:defRPr sz="1200" b="0">
                 <a:solidFill>
                   <a:srgbClr val="94A3B8"/>
                 </a:solidFill>
@@ -9915,14 +10821,14 @@
       </p:sp>
       <p:sp>
         <p:nvSpPr>
-          <p:cNvPr id="10" name="Oval 9"/>
+          <p:cNvPr id="11" name="Oval 10"/>
           <p:cNvSpPr/>
           <p:nvPr/>
         </p:nvSpPr>
         <p:spPr>
           <a:xfrm>
-            <a:off x="9235440" y="1371600"/>
-            <a:ext cx="457200" cy="457200"/>
+            <a:off x="9509760" y="1554480"/>
+            <a:ext cx="502920" cy="502920"/>
           </a:xfrm>
           <a:prstGeom prst="ellipse">
             <a:avLst/>
@@ -9953,12 +10859,9 @@
           <a:lstStyle/>
           <a:p>
             <a:pPr algn="ctr">
-              <a:spcBef>
-                <a:spcPts val="0"/>
-              </a:spcBef>
-              <a:defRPr sz="1600" b="1">
-                <a:solidFill>
-                  <a:srgbClr val="FFFFFF"/>
+              <a:defRPr sz="1800" b="1">
+                <a:solidFill>
+                  <a:srgbClr val="F1F5F9"/>
                 </a:solidFill>
                 <a:latin typeface="Calibri"/>
               </a:defRPr>
@@ -9971,14 +10874,14 @@
       </p:sp>
       <p:sp>
         <p:nvSpPr>
-          <p:cNvPr id="11" name="TextBox 10"/>
+          <p:cNvPr id="12" name="TextBox 11"/>
           <p:cNvSpPr txBox="1"/>
           <p:nvPr/>
         </p:nvSpPr>
         <p:spPr>
           <a:xfrm>
-            <a:off x="8138160" y="2011680"/>
-            <a:ext cx="3474720" cy="365760"/>
+            <a:off x="8138160" y="2240280"/>
+            <a:ext cx="3474720" cy="320040"/>
           </a:xfrm>
           <a:prstGeom prst="rect">
             <a:avLst/>
@@ -9992,7 +10895,7 @@
           <a:lstStyle/>
           <a:p>
             <a:pPr algn="ctr">
-              <a:defRPr sz="1500" b="1">
+              <a:defRPr sz="1600" b="1">
                 <a:solidFill>
                   <a:srgbClr val="F59E0B"/>
                 </a:solidFill>
@@ -10007,14 +10910,14 @@
       </p:sp>
       <p:sp>
         <p:nvSpPr>
-          <p:cNvPr id="12" name="TextBox 11"/>
+          <p:cNvPr id="13" name="TextBox 12"/>
           <p:cNvSpPr txBox="1"/>
           <p:nvPr/>
         </p:nvSpPr>
         <p:spPr>
           <a:xfrm>
-            <a:off x="8138160" y="2377440"/>
-            <a:ext cx="3474720" cy="548640"/>
+            <a:off x="8138160" y="2560320"/>
+            <a:ext cx="3474720" cy="457200"/>
           </a:xfrm>
           <a:prstGeom prst="rect">
             <a:avLst/>
@@ -10028,7 +10931,7 @@
           <a:lstStyle/>
           <a:p>
             <a:pPr algn="ctr">
-              <a:defRPr sz="1100" b="0">
+              <a:defRPr sz="1200" b="0">
                 <a:solidFill>
                   <a:srgbClr val="94A3B8"/>
                 </a:solidFill>
@@ -10047,14 +10950,14 @@
       </p:sp>
       <p:sp>
         <p:nvSpPr>
-          <p:cNvPr id="13" name="Oval 12"/>
+          <p:cNvPr id="14" name="Oval 13"/>
           <p:cNvSpPr/>
           <p:nvPr/>
         </p:nvSpPr>
         <p:spPr>
           <a:xfrm>
-            <a:off x="1554480" y="3108960"/>
-            <a:ext cx="457200" cy="457200"/>
+            <a:off x="1828800" y="3291839"/>
+            <a:ext cx="502920" cy="502920"/>
           </a:xfrm>
           <a:prstGeom prst="ellipse">
             <a:avLst/>
@@ -10085,12 +10988,9 @@
           <a:lstStyle/>
           <a:p>
             <a:pPr algn="ctr">
-              <a:spcBef>
-                <a:spcPts val="0"/>
-              </a:spcBef>
-              <a:defRPr sz="1600" b="1">
-                <a:solidFill>
-                  <a:srgbClr val="FFFFFF"/>
+              <a:defRPr sz="1800" b="1">
+                <a:solidFill>
+                  <a:srgbClr val="F1F5F9"/>
                 </a:solidFill>
                 <a:latin typeface="Calibri"/>
               </a:defRPr>
@@ -10103,14 +11003,14 @@
       </p:sp>
       <p:sp>
         <p:nvSpPr>
-          <p:cNvPr id="14" name="TextBox 13"/>
+          <p:cNvPr id="15" name="TextBox 14"/>
           <p:cNvSpPr txBox="1"/>
           <p:nvPr/>
         </p:nvSpPr>
         <p:spPr>
           <a:xfrm>
-            <a:off x="457200" y="3749039"/>
-            <a:ext cx="3474720" cy="365760"/>
+            <a:off x="457200" y="3977639"/>
+            <a:ext cx="3474720" cy="320040"/>
           </a:xfrm>
           <a:prstGeom prst="rect">
             <a:avLst/>
@@ -10124,7 +11024,7 @@
           <a:lstStyle/>
           <a:p>
             <a:pPr algn="ctr">
-              <a:defRPr sz="1500" b="1">
+              <a:defRPr sz="1600" b="1">
                 <a:solidFill>
                   <a:srgbClr val="EF4444"/>
                 </a:solidFill>
@@ -10139,14 +11039,14 @@
       </p:sp>
       <p:sp>
         <p:nvSpPr>
-          <p:cNvPr id="15" name="TextBox 14"/>
+          <p:cNvPr id="16" name="TextBox 15"/>
           <p:cNvSpPr txBox="1"/>
           <p:nvPr/>
         </p:nvSpPr>
         <p:spPr>
           <a:xfrm>
-            <a:off x="457200" y="4114800"/>
-            <a:ext cx="3474720" cy="548640"/>
+            <a:off x="457200" y="4297679"/>
+            <a:ext cx="3474720" cy="457200"/>
           </a:xfrm>
           <a:prstGeom prst="rect">
             <a:avLst/>
@@ -10160,7 +11060,7 @@
           <a:lstStyle/>
           <a:p>
             <a:pPr algn="ctr">
-              <a:defRPr sz="1100" b="0">
+              <a:defRPr sz="1200" b="0">
                 <a:solidFill>
                   <a:srgbClr val="94A3B8"/>
                 </a:solidFill>
@@ -10179,14 +11079,14 @@
       </p:sp>
       <p:sp>
         <p:nvSpPr>
-          <p:cNvPr id="16" name="Oval 15"/>
+          <p:cNvPr id="17" name="Oval 16"/>
           <p:cNvSpPr/>
           <p:nvPr/>
         </p:nvSpPr>
         <p:spPr>
           <a:xfrm>
-            <a:off x="5394960" y="3108960"/>
-            <a:ext cx="457200" cy="457200"/>
+            <a:off x="5669280" y="3291839"/>
+            <a:ext cx="502920" cy="502920"/>
           </a:xfrm>
           <a:prstGeom prst="ellipse">
             <a:avLst/>
@@ -10217,12 +11117,9 @@
           <a:lstStyle/>
           <a:p>
             <a:pPr algn="ctr">
-              <a:spcBef>
-                <a:spcPts val="0"/>
-              </a:spcBef>
-              <a:defRPr sz="1600" b="1">
-                <a:solidFill>
-                  <a:srgbClr val="FFFFFF"/>
+              <a:defRPr sz="1800" b="1">
+                <a:solidFill>
+                  <a:srgbClr val="F1F5F9"/>
                 </a:solidFill>
                 <a:latin typeface="Calibri"/>
               </a:defRPr>
@@ -10235,14 +11132,14 @@
       </p:sp>
       <p:sp>
         <p:nvSpPr>
-          <p:cNvPr id="17" name="TextBox 16"/>
+          <p:cNvPr id="18" name="TextBox 17"/>
           <p:cNvSpPr txBox="1"/>
           <p:nvPr/>
         </p:nvSpPr>
         <p:spPr>
           <a:xfrm>
-            <a:off x="4297680" y="3749039"/>
-            <a:ext cx="3474720" cy="365760"/>
+            <a:off x="4297680" y="3977639"/>
+            <a:ext cx="3474720" cy="320040"/>
           </a:xfrm>
           <a:prstGeom prst="rect">
             <a:avLst/>
@@ -10256,7 +11153,7 @@
           <a:lstStyle/>
           <a:p>
             <a:pPr algn="ctr">
-              <a:defRPr sz="1500" b="1">
+              <a:defRPr sz="1600" b="1">
                 <a:solidFill>
                   <a:srgbClr val="3B82F6"/>
                 </a:solidFill>
@@ -10271,14 +11168,14 @@
       </p:sp>
       <p:sp>
         <p:nvSpPr>
-          <p:cNvPr id="18" name="TextBox 17"/>
+          <p:cNvPr id="19" name="TextBox 18"/>
           <p:cNvSpPr txBox="1"/>
           <p:nvPr/>
         </p:nvSpPr>
         <p:spPr>
           <a:xfrm>
-            <a:off x="4297680" y="4114800"/>
-            <a:ext cx="3474720" cy="548640"/>
+            <a:off x="4297680" y="4297679"/>
+            <a:ext cx="3474720" cy="457200"/>
           </a:xfrm>
           <a:prstGeom prst="rect">
             <a:avLst/>
@@ -10292,7 +11189,7 @@
           <a:lstStyle/>
           <a:p>
             <a:pPr algn="ctr">
-              <a:defRPr sz="1100" b="0">
+              <a:defRPr sz="1200" b="0">
                 <a:solidFill>
                   <a:srgbClr val="94A3B8"/>
                 </a:solidFill>
@@ -10311,14 +11208,14 @@
       </p:sp>
       <p:sp>
         <p:nvSpPr>
-          <p:cNvPr id="19" name="Oval 18"/>
+          <p:cNvPr id="20" name="Oval 19"/>
           <p:cNvSpPr/>
           <p:nvPr/>
         </p:nvSpPr>
         <p:spPr>
           <a:xfrm>
-            <a:off x="9235440" y="3108960"/>
-            <a:ext cx="457200" cy="457200"/>
+            <a:off x="9509760" y="3291839"/>
+            <a:ext cx="502920" cy="502920"/>
           </a:xfrm>
           <a:prstGeom prst="ellipse">
             <a:avLst/>
@@ -10349,12 +11246,9 @@
           <a:lstStyle/>
           <a:p>
             <a:pPr algn="ctr">
-              <a:spcBef>
-                <a:spcPts val="0"/>
-              </a:spcBef>
-              <a:defRPr sz="1600" b="1">
-                <a:solidFill>
-                  <a:srgbClr val="FFFFFF"/>
+              <a:defRPr sz="1800" b="1">
+                <a:solidFill>
+                  <a:srgbClr val="F1F5F9"/>
                 </a:solidFill>
                 <a:latin typeface="Calibri"/>
               </a:defRPr>
@@ -10367,14 +11261,14 @@
       </p:sp>
       <p:sp>
         <p:nvSpPr>
-          <p:cNvPr id="20" name="TextBox 19"/>
+          <p:cNvPr id="21" name="TextBox 20"/>
           <p:cNvSpPr txBox="1"/>
           <p:nvPr/>
         </p:nvSpPr>
         <p:spPr>
           <a:xfrm>
-            <a:off x="8138160" y="3749039"/>
-            <a:ext cx="3474720" cy="365760"/>
+            <a:off x="8138160" y="3977639"/>
+            <a:ext cx="3474720" cy="320040"/>
           </a:xfrm>
           <a:prstGeom prst="rect">
             <a:avLst/>
@@ -10388,7 +11282,7 @@
           <a:lstStyle/>
           <a:p>
             <a:pPr algn="ctr">
-              <a:defRPr sz="1500" b="1">
+              <a:defRPr sz="1600" b="1">
                 <a:solidFill>
                   <a:srgbClr val="22C55E"/>
                 </a:solidFill>
@@ -10403,14 +11297,14 @@
       </p:sp>
       <p:sp>
         <p:nvSpPr>
-          <p:cNvPr id="21" name="TextBox 20"/>
+          <p:cNvPr id="22" name="TextBox 21"/>
           <p:cNvSpPr txBox="1"/>
           <p:nvPr/>
         </p:nvSpPr>
         <p:spPr>
           <a:xfrm>
-            <a:off x="8138160" y="4114800"/>
-            <a:ext cx="3474720" cy="548640"/>
+            <a:off x="8138160" y="4297679"/>
+            <a:ext cx="3474720" cy="457200"/>
           </a:xfrm>
           <a:prstGeom prst="rect">
             <a:avLst/>
@@ -10424,7 +11318,7 @@
           <a:lstStyle/>
           <a:p>
             <a:pPr algn="ctr">
-              <a:defRPr sz="1100" b="0">
+              <a:defRPr sz="1200" b="0">
                 <a:solidFill>
                   <a:srgbClr val="94A3B8"/>
                 </a:solidFill>
@@ -10443,14 +11337,14 @@
       </p:sp>
       <p:sp>
         <p:nvSpPr>
-          <p:cNvPr id="22" name="Oval 21"/>
+          <p:cNvPr id="23" name="Oval 22"/>
           <p:cNvSpPr/>
           <p:nvPr/>
         </p:nvSpPr>
         <p:spPr>
           <a:xfrm>
-            <a:off x="1554480" y="4846320"/>
-            <a:ext cx="457200" cy="457200"/>
+            <a:off x="1828800" y="5029200"/>
+            <a:ext cx="502920" cy="502920"/>
           </a:xfrm>
           <a:prstGeom prst="ellipse">
             <a:avLst/>
@@ -10481,12 +11375,9 @@
           <a:lstStyle/>
           <a:p>
             <a:pPr algn="ctr">
-              <a:spcBef>
-                <a:spcPts val="0"/>
-              </a:spcBef>
-              <a:defRPr sz="1600" b="1">
-                <a:solidFill>
-                  <a:srgbClr val="FFFFFF"/>
+              <a:defRPr sz="1800" b="1">
+                <a:solidFill>
+                  <a:srgbClr val="F1F5F9"/>
                 </a:solidFill>
                 <a:latin typeface="Calibri"/>
               </a:defRPr>
@@ -10499,14 +11390,14 @@
       </p:sp>
       <p:sp>
         <p:nvSpPr>
-          <p:cNvPr id="23" name="TextBox 22"/>
+          <p:cNvPr id="24" name="TextBox 23"/>
           <p:cNvSpPr txBox="1"/>
           <p:nvPr/>
         </p:nvSpPr>
         <p:spPr>
           <a:xfrm>
-            <a:off x="457200" y="5486400"/>
-            <a:ext cx="3474720" cy="365760"/>
+            <a:off x="457200" y="5715000"/>
+            <a:ext cx="3474720" cy="320040"/>
           </a:xfrm>
           <a:prstGeom prst="rect">
             <a:avLst/>
@@ -10520,7 +11411,7 @@
           <a:lstStyle/>
           <a:p>
             <a:pPr algn="ctr">
-              <a:defRPr sz="1500" b="1">
+              <a:defRPr sz="1600" b="1">
                 <a:solidFill>
                   <a:srgbClr val="F59E0B"/>
                 </a:solidFill>
@@ -10535,14 +11426,14 @@
       </p:sp>
       <p:sp>
         <p:nvSpPr>
-          <p:cNvPr id="24" name="TextBox 23"/>
+          <p:cNvPr id="25" name="TextBox 24"/>
           <p:cNvSpPr txBox="1"/>
           <p:nvPr/>
         </p:nvSpPr>
         <p:spPr>
           <a:xfrm>
-            <a:off x="457200" y="5852160"/>
-            <a:ext cx="3474720" cy="548640"/>
+            <a:off x="457200" y="6035040"/>
+            <a:ext cx="3474720" cy="457200"/>
           </a:xfrm>
           <a:prstGeom prst="rect">
             <a:avLst/>
@@ -10556,7 +11447,7 @@
           <a:lstStyle/>
           <a:p>
             <a:pPr algn="ctr">
-              <a:defRPr sz="1100" b="0">
+              <a:defRPr sz="1200" b="0">
                 <a:solidFill>
                   <a:srgbClr val="94A3B8"/>
                 </a:solidFill>
@@ -10575,14 +11466,14 @@
       </p:sp>
       <p:sp>
         <p:nvSpPr>
-          <p:cNvPr id="25" name="Oval 24"/>
+          <p:cNvPr id="26" name="Oval 25"/>
           <p:cNvSpPr/>
           <p:nvPr/>
         </p:nvSpPr>
         <p:spPr>
           <a:xfrm>
-            <a:off x="5394960" y="4846320"/>
-            <a:ext cx="457200" cy="457200"/>
+            <a:off x="5669280" y="5029200"/>
+            <a:ext cx="502920" cy="502920"/>
           </a:xfrm>
           <a:prstGeom prst="ellipse">
             <a:avLst/>
@@ -10613,12 +11504,9 @@
           <a:lstStyle/>
           <a:p>
             <a:pPr algn="ctr">
-              <a:spcBef>
-                <a:spcPts val="0"/>
-              </a:spcBef>
-              <a:defRPr sz="1600" b="1">
-                <a:solidFill>
-                  <a:srgbClr val="FFFFFF"/>
+              <a:defRPr sz="1800" b="1">
+                <a:solidFill>
+                  <a:srgbClr val="F1F5F9"/>
                 </a:solidFill>
                 <a:latin typeface="Calibri"/>
               </a:defRPr>
@@ -10631,14 +11519,14 @@
       </p:sp>
       <p:sp>
         <p:nvSpPr>
-          <p:cNvPr id="26" name="TextBox 25"/>
+          <p:cNvPr id="27" name="TextBox 26"/>
           <p:cNvSpPr txBox="1"/>
           <p:nvPr/>
         </p:nvSpPr>
         <p:spPr>
           <a:xfrm>
-            <a:off x="4297680" y="5486400"/>
-            <a:ext cx="3474720" cy="365760"/>
+            <a:off x="4297680" y="5715000"/>
+            <a:ext cx="3474720" cy="320040"/>
           </a:xfrm>
           <a:prstGeom prst="rect">
             <a:avLst/>
@@ -10652,7 +11540,7 @@
           <a:lstStyle/>
           <a:p>
             <a:pPr algn="ctr">
-              <a:defRPr sz="1500" b="1">
+              <a:defRPr sz="1600" b="1">
                 <a:solidFill>
                   <a:srgbClr val="EF4444"/>
                 </a:solidFill>
@@ -10667,14 +11555,14 @@
       </p:sp>
       <p:sp>
         <p:nvSpPr>
-          <p:cNvPr id="27" name="TextBox 26"/>
+          <p:cNvPr id="28" name="TextBox 27"/>
           <p:cNvSpPr txBox="1"/>
           <p:nvPr/>
         </p:nvSpPr>
         <p:spPr>
           <a:xfrm>
-            <a:off x="4297680" y="5852160"/>
-            <a:ext cx="3474720" cy="548640"/>
+            <a:off x="4297680" y="6035040"/>
+            <a:ext cx="3474720" cy="457200"/>
           </a:xfrm>
           <a:prstGeom prst="rect">
             <a:avLst/>
@@ -10688,7 +11576,7 @@
           <a:lstStyle/>
           <a:p>
             <a:pPr algn="ctr">
-              <a:defRPr sz="1100" b="0">
+              <a:defRPr sz="1200" b="0">
                 <a:solidFill>
                   <a:srgbClr val="94A3B8"/>
                 </a:solidFill>
@@ -10707,14 +11595,14 @@
       </p:sp>
       <p:sp>
         <p:nvSpPr>
-          <p:cNvPr id="28" name="Oval 27"/>
+          <p:cNvPr id="29" name="Oval 28"/>
           <p:cNvSpPr/>
           <p:nvPr/>
         </p:nvSpPr>
         <p:spPr>
           <a:xfrm>
-            <a:off x="9235440" y="4846320"/>
-            <a:ext cx="457200" cy="457200"/>
+            <a:off x="9509760" y="5029200"/>
+            <a:ext cx="502920" cy="502920"/>
           </a:xfrm>
           <a:prstGeom prst="ellipse">
             <a:avLst/>
@@ -10745,12 +11633,9 @@
           <a:lstStyle/>
           <a:p>
             <a:pPr algn="ctr">
-              <a:spcBef>
-                <a:spcPts val="0"/>
-              </a:spcBef>
-              <a:defRPr sz="1600" b="1">
-                <a:solidFill>
-                  <a:srgbClr val="FFFFFF"/>
+              <a:defRPr sz="1800" b="1">
+                <a:solidFill>
+                  <a:srgbClr val="F1F5F9"/>
                 </a:solidFill>
                 <a:latin typeface="Calibri"/>
               </a:defRPr>
@@ -10763,14 +11648,14 @@
       </p:sp>
       <p:sp>
         <p:nvSpPr>
-          <p:cNvPr id="29" name="TextBox 28"/>
+          <p:cNvPr id="30" name="TextBox 29"/>
           <p:cNvSpPr txBox="1"/>
           <p:nvPr/>
         </p:nvSpPr>
         <p:spPr>
           <a:xfrm>
-            <a:off x="8138160" y="5486400"/>
-            <a:ext cx="3474720" cy="365760"/>
+            <a:off x="8138160" y="5715000"/>
+            <a:ext cx="3474720" cy="320040"/>
           </a:xfrm>
           <a:prstGeom prst="rect">
             <a:avLst/>
@@ -10784,7 +11669,7 @@
           <a:lstStyle/>
           <a:p>
             <a:pPr algn="ctr">
-              <a:defRPr sz="1500" b="1">
+              <a:defRPr sz="1600" b="1">
                 <a:solidFill>
                   <a:srgbClr val="22C55E"/>
                 </a:solidFill>
@@ -10799,14 +11684,14 @@
       </p:sp>
       <p:sp>
         <p:nvSpPr>
-          <p:cNvPr id="30" name="TextBox 29"/>
+          <p:cNvPr id="31" name="TextBox 30"/>
           <p:cNvSpPr txBox="1"/>
           <p:nvPr/>
         </p:nvSpPr>
         <p:spPr>
           <a:xfrm>
-            <a:off x="8138160" y="5852160"/>
-            <a:ext cx="3474720" cy="548640"/>
+            <a:off x="8138160" y="6035040"/>
+            <a:ext cx="3474720" cy="457200"/>
           </a:xfrm>
           <a:prstGeom prst="rect">
             <a:avLst/>
@@ -10820,7 +11705,7 @@
           <a:lstStyle/>
           <a:p>
             <a:pPr algn="ctr">
-              <a:defRPr sz="1100" b="0">
+              <a:defRPr sz="1200" b="0">
                 <a:solidFill>
                   <a:srgbClr val="94A3B8"/>
                 </a:solidFill>
